--- a/Final/Figures/SOI_structure.pptx
+++ b/Final/Figures/SOI_structure.pptx
@@ -2,13 +2,15 @@
 <file path=ppt/presentation.xml><?xml version="1.0" encoding="utf-8"?>
 <p:presentation xmlns:a="http://schemas.openxmlformats.org/drawingml/2006/main" xmlns:r="http://schemas.openxmlformats.org/officeDocument/2006/relationships" xmlns:p="http://schemas.openxmlformats.org/presentationml/2006/main" saveSubsetFonts="1">
   <p:sldMasterIdLst>
-    <p:sldMasterId id="2147483660" r:id="rId1"/>
+    <p:sldMasterId id="2147483804" r:id="rId1"/>
   </p:sldMasterIdLst>
   <p:sldIdLst>
     <p:sldId id="256" r:id="rId2"/>
     <p:sldId id="257" r:id="rId3"/>
+    <p:sldId id="258" r:id="rId4"/>
+    <p:sldId id="259" r:id="rId5"/>
   </p:sldIdLst>
-  <p:sldSz cx="12192000" cy="3600450"/>
+  <p:sldSz cx="14400213" cy="3600450"/>
   <p:notesSz cx="6858000" cy="9144000"/>
   <p:defaultTextStyle>
     <a:defPPr>
@@ -105,6 +107,11 @@
       </a:defRPr>
     </a:lvl9pPr>
   </p:defaultTextStyle>
+  <p:extLst>
+    <p:ext uri="{EFAFB233-063F-42B5-8137-9DF3F51BA10A}">
+      <p15:sldGuideLst xmlns:p15="http://schemas.microsoft.com/office/powerpoint/2012/main"/>
+    </p:ext>
+  </p:extLst>
 </p:presentation>
 </file>
 
@@ -137,8 +144,8 @@
         </p:nvSpPr>
         <p:spPr>
           <a:xfrm>
-            <a:off x="1524000" y="589241"/>
-            <a:ext cx="9144000" cy="1253490"/>
+            <a:off x="1800027" y="589241"/>
+            <a:ext cx="10800160" cy="1253490"/>
           </a:xfrm>
         </p:spPr>
         <p:txBody>
@@ -169,8 +176,8 @@
         </p:nvSpPr>
         <p:spPr>
           <a:xfrm>
-            <a:off x="1524000" y="1891070"/>
-            <a:ext cx="9144000" cy="869275"/>
+            <a:off x="1800027" y="1891070"/>
+            <a:ext cx="10800160" cy="869275"/>
           </a:xfrm>
         </p:spPr>
         <p:txBody>
@@ -239,7 +246,7 @@
           <a:p>
             <a:fld id="{C9965009-D4C9-4BD1-8D98-F9C892462EAE}" type="datetimeFigureOut">
               <a:rPr lang="zh-TW" altLang="en-US" smtClean="0"/>
-              <a:t>2026/3/17</a:t>
+              <a:t>2026/4/1</a:t>
             </a:fld>
             <a:endParaRPr lang="zh-TW" altLang="en-US"/>
           </a:p>
@@ -290,7 +297,7 @@
     </p:spTree>
     <p:extLst>
       <p:ext uri="{BB962C8B-B14F-4D97-AF65-F5344CB8AC3E}">
-        <p14:creationId xmlns:p14="http://schemas.microsoft.com/office/powerpoint/2010/main" val="2590742066"/>
+        <p14:creationId xmlns:p14="http://schemas.microsoft.com/office/powerpoint/2010/main" val="2372095697"/>
       </p:ext>
     </p:extLst>
   </p:cSld>
@@ -409,7 +416,7 @@
           <a:p>
             <a:fld id="{C9965009-D4C9-4BD1-8D98-F9C892462EAE}" type="datetimeFigureOut">
               <a:rPr lang="zh-TW" altLang="en-US" smtClean="0"/>
-              <a:t>2026/3/17</a:t>
+              <a:t>2026/4/1</a:t>
             </a:fld>
             <a:endParaRPr lang="zh-TW" altLang="en-US"/>
           </a:p>
@@ -460,7 +467,7 @@
     </p:spTree>
     <p:extLst>
       <p:ext uri="{BB962C8B-B14F-4D97-AF65-F5344CB8AC3E}">
-        <p14:creationId xmlns:p14="http://schemas.microsoft.com/office/powerpoint/2010/main" val="2799476647"/>
+        <p14:creationId xmlns:p14="http://schemas.microsoft.com/office/powerpoint/2010/main" val="1739853409"/>
       </p:ext>
     </p:extLst>
   </p:cSld>
@@ -499,8 +506,8 @@
         </p:nvSpPr>
         <p:spPr>
           <a:xfrm>
-            <a:off x="8724900" y="191691"/>
-            <a:ext cx="2628900" cy="3051215"/>
+            <a:off x="10305152" y="191691"/>
+            <a:ext cx="3105046" cy="3051215"/>
           </a:xfrm>
         </p:spPr>
         <p:txBody>
@@ -527,8 +534,8 @@
         </p:nvSpPr>
         <p:spPr>
           <a:xfrm>
-            <a:off x="838200" y="191691"/>
-            <a:ext cx="7734300" cy="3051215"/>
+            <a:off x="990015" y="191691"/>
+            <a:ext cx="9135135" cy="3051215"/>
           </a:xfrm>
         </p:spPr>
         <p:txBody>
@@ -589,7 +596,7 @@
           <a:p>
             <a:fld id="{C9965009-D4C9-4BD1-8D98-F9C892462EAE}" type="datetimeFigureOut">
               <a:rPr lang="zh-TW" altLang="en-US" smtClean="0"/>
-              <a:t>2026/3/17</a:t>
+              <a:t>2026/4/1</a:t>
             </a:fld>
             <a:endParaRPr lang="zh-TW" altLang="en-US"/>
           </a:p>
@@ -640,7 +647,7 @@
     </p:spTree>
     <p:extLst>
       <p:ext uri="{BB962C8B-B14F-4D97-AF65-F5344CB8AC3E}">
-        <p14:creationId xmlns:p14="http://schemas.microsoft.com/office/powerpoint/2010/main" val="3088930737"/>
+        <p14:creationId xmlns:p14="http://schemas.microsoft.com/office/powerpoint/2010/main" val="4253345371"/>
       </p:ext>
     </p:extLst>
   </p:cSld>
@@ -759,7 +766,7 @@
           <a:p>
             <a:fld id="{C9965009-D4C9-4BD1-8D98-F9C892462EAE}" type="datetimeFigureOut">
               <a:rPr lang="zh-TW" altLang="en-US" smtClean="0"/>
-              <a:t>2026/3/17</a:t>
+              <a:t>2026/4/1</a:t>
             </a:fld>
             <a:endParaRPr lang="zh-TW" altLang="en-US"/>
           </a:p>
@@ -810,7 +817,7 @@
     </p:spTree>
     <p:extLst>
       <p:ext uri="{BB962C8B-B14F-4D97-AF65-F5344CB8AC3E}">
-        <p14:creationId xmlns:p14="http://schemas.microsoft.com/office/powerpoint/2010/main" val="245266365"/>
+        <p14:creationId xmlns:p14="http://schemas.microsoft.com/office/powerpoint/2010/main" val="3938970197"/>
       </p:ext>
     </p:extLst>
   </p:cSld>
@@ -849,8 +856,8 @@
         </p:nvSpPr>
         <p:spPr>
           <a:xfrm>
-            <a:off x="831850" y="897613"/>
-            <a:ext cx="10515600" cy="1497687"/>
+            <a:off x="982514" y="897613"/>
+            <a:ext cx="12420184" cy="1497687"/>
           </a:xfrm>
         </p:spPr>
         <p:txBody>
@@ -881,8 +888,8 @@
         </p:nvSpPr>
         <p:spPr>
           <a:xfrm>
-            <a:off x="831850" y="2409468"/>
-            <a:ext cx="10515600" cy="787598"/>
+            <a:off x="982514" y="2409468"/>
+            <a:ext cx="12420184" cy="787598"/>
           </a:xfrm>
         </p:spPr>
         <p:txBody>
@@ -1005,7 +1012,7 @@
           <a:p>
             <a:fld id="{C9965009-D4C9-4BD1-8D98-F9C892462EAE}" type="datetimeFigureOut">
               <a:rPr lang="zh-TW" altLang="en-US" smtClean="0"/>
-              <a:t>2026/3/17</a:t>
+              <a:t>2026/4/1</a:t>
             </a:fld>
             <a:endParaRPr lang="zh-TW" altLang="en-US"/>
           </a:p>
@@ -1056,7 +1063,7 @@
     </p:spTree>
     <p:extLst>
       <p:ext uri="{BB962C8B-B14F-4D97-AF65-F5344CB8AC3E}">
-        <p14:creationId xmlns:p14="http://schemas.microsoft.com/office/powerpoint/2010/main" val="1923291689"/>
+        <p14:creationId xmlns:p14="http://schemas.microsoft.com/office/powerpoint/2010/main" val="1073751385"/>
       </p:ext>
     </p:extLst>
   </p:cSld>
@@ -1118,8 +1125,8 @@
         </p:nvSpPr>
         <p:spPr>
           <a:xfrm>
-            <a:off x="838200" y="958453"/>
-            <a:ext cx="5181600" cy="2284452"/>
+            <a:off x="990014" y="958453"/>
+            <a:ext cx="6120091" cy="2284452"/>
           </a:xfrm>
         </p:spPr>
         <p:txBody>
@@ -1175,8 +1182,8 @@
         </p:nvSpPr>
         <p:spPr>
           <a:xfrm>
-            <a:off x="6172200" y="958453"/>
-            <a:ext cx="5181600" cy="2284452"/>
+            <a:off x="7290108" y="958453"/>
+            <a:ext cx="6120091" cy="2284452"/>
           </a:xfrm>
         </p:spPr>
         <p:txBody>
@@ -1237,7 +1244,7 @@
           <a:p>
             <a:fld id="{C9965009-D4C9-4BD1-8D98-F9C892462EAE}" type="datetimeFigureOut">
               <a:rPr lang="zh-TW" altLang="en-US" smtClean="0"/>
-              <a:t>2026/3/17</a:t>
+              <a:t>2026/4/1</a:t>
             </a:fld>
             <a:endParaRPr lang="zh-TW" altLang="en-US"/>
           </a:p>
@@ -1288,7 +1295,7 @@
     </p:spTree>
     <p:extLst>
       <p:ext uri="{BB962C8B-B14F-4D97-AF65-F5344CB8AC3E}">
-        <p14:creationId xmlns:p14="http://schemas.microsoft.com/office/powerpoint/2010/main" val="3062708670"/>
+        <p14:creationId xmlns:p14="http://schemas.microsoft.com/office/powerpoint/2010/main" val="3894538146"/>
       </p:ext>
     </p:extLst>
   </p:cSld>
@@ -1327,8 +1334,8 @@
         </p:nvSpPr>
         <p:spPr>
           <a:xfrm>
-            <a:off x="839788" y="191691"/>
-            <a:ext cx="10515600" cy="695921"/>
+            <a:off x="991890" y="191691"/>
+            <a:ext cx="12420184" cy="695921"/>
           </a:xfrm>
         </p:spPr>
         <p:txBody>
@@ -1355,8 +1362,8 @@
         </p:nvSpPr>
         <p:spPr>
           <a:xfrm>
-            <a:off x="839789" y="882610"/>
-            <a:ext cx="5157787" cy="432554"/>
+            <a:off x="991891" y="882610"/>
+            <a:ext cx="6091965" cy="432554"/>
           </a:xfrm>
         </p:spPr>
         <p:txBody>
@@ -1420,8 +1427,8 @@
         </p:nvSpPr>
         <p:spPr>
           <a:xfrm>
-            <a:off x="839789" y="1315164"/>
-            <a:ext cx="5157787" cy="1934409"/>
+            <a:off x="991891" y="1315164"/>
+            <a:ext cx="6091965" cy="1934409"/>
           </a:xfrm>
         </p:spPr>
         <p:txBody>
@@ -1477,8 +1484,8 @@
         </p:nvSpPr>
         <p:spPr>
           <a:xfrm>
-            <a:off x="6172200" y="882610"/>
-            <a:ext cx="5183188" cy="432554"/>
+            <a:off x="7290108" y="882610"/>
+            <a:ext cx="6121966" cy="432554"/>
           </a:xfrm>
         </p:spPr>
         <p:txBody>
@@ -1542,8 +1549,8 @@
         </p:nvSpPr>
         <p:spPr>
           <a:xfrm>
-            <a:off x="6172200" y="1315164"/>
-            <a:ext cx="5183188" cy="1934409"/>
+            <a:off x="7290108" y="1315164"/>
+            <a:ext cx="6121966" cy="1934409"/>
           </a:xfrm>
         </p:spPr>
         <p:txBody>
@@ -1604,7 +1611,7 @@
           <a:p>
             <a:fld id="{C9965009-D4C9-4BD1-8D98-F9C892462EAE}" type="datetimeFigureOut">
               <a:rPr lang="zh-TW" altLang="en-US" smtClean="0"/>
-              <a:t>2026/3/17</a:t>
+              <a:t>2026/4/1</a:t>
             </a:fld>
             <a:endParaRPr lang="zh-TW" altLang="en-US"/>
           </a:p>
@@ -1655,7 +1662,7 @@
     </p:spTree>
     <p:extLst>
       <p:ext uri="{BB962C8B-B14F-4D97-AF65-F5344CB8AC3E}">
-        <p14:creationId xmlns:p14="http://schemas.microsoft.com/office/powerpoint/2010/main" val="4250919137"/>
+        <p14:creationId xmlns:p14="http://schemas.microsoft.com/office/powerpoint/2010/main" val="1699590958"/>
       </p:ext>
     </p:extLst>
   </p:cSld>
@@ -1722,7 +1729,7 @@
           <a:p>
             <a:fld id="{C9965009-D4C9-4BD1-8D98-F9C892462EAE}" type="datetimeFigureOut">
               <a:rPr lang="zh-TW" altLang="en-US" smtClean="0"/>
-              <a:t>2026/3/17</a:t>
+              <a:t>2026/4/1</a:t>
             </a:fld>
             <a:endParaRPr lang="zh-TW" altLang="en-US"/>
           </a:p>
@@ -1773,7 +1780,7 @@
     </p:spTree>
     <p:extLst>
       <p:ext uri="{BB962C8B-B14F-4D97-AF65-F5344CB8AC3E}">
-        <p14:creationId xmlns:p14="http://schemas.microsoft.com/office/powerpoint/2010/main" val="600512896"/>
+        <p14:creationId xmlns:p14="http://schemas.microsoft.com/office/powerpoint/2010/main" val="2042147970"/>
       </p:ext>
     </p:extLst>
   </p:cSld>
@@ -1817,7 +1824,7 @@
           <a:p>
             <a:fld id="{C9965009-D4C9-4BD1-8D98-F9C892462EAE}" type="datetimeFigureOut">
               <a:rPr lang="zh-TW" altLang="en-US" smtClean="0"/>
-              <a:t>2026/3/17</a:t>
+              <a:t>2026/4/1</a:t>
             </a:fld>
             <a:endParaRPr lang="zh-TW" altLang="en-US"/>
           </a:p>
@@ -1868,7 +1875,7 @@
     </p:spTree>
     <p:extLst>
       <p:ext uri="{BB962C8B-B14F-4D97-AF65-F5344CB8AC3E}">
-        <p14:creationId xmlns:p14="http://schemas.microsoft.com/office/powerpoint/2010/main" val="3393737723"/>
+        <p14:creationId xmlns:p14="http://schemas.microsoft.com/office/powerpoint/2010/main" val="1424240174"/>
       </p:ext>
     </p:extLst>
   </p:cSld>
@@ -1907,8 +1914,8 @@
         </p:nvSpPr>
         <p:spPr>
           <a:xfrm>
-            <a:off x="839789" y="240030"/>
-            <a:ext cx="3932237" cy="840105"/>
+            <a:off x="991891" y="240030"/>
+            <a:ext cx="4644443" cy="840105"/>
           </a:xfrm>
         </p:spPr>
         <p:txBody>
@@ -1939,8 +1946,8 @@
         </p:nvSpPr>
         <p:spPr>
           <a:xfrm>
-            <a:off x="5183188" y="518398"/>
-            <a:ext cx="6172200" cy="2558653"/>
+            <a:off x="6121966" y="518398"/>
+            <a:ext cx="7290108" cy="2558653"/>
           </a:xfrm>
         </p:spPr>
         <p:txBody>
@@ -2024,8 +2031,8 @@
         </p:nvSpPr>
         <p:spPr>
           <a:xfrm>
-            <a:off x="839789" y="1080135"/>
-            <a:ext cx="3932237" cy="2001084"/>
+            <a:off x="991891" y="1080135"/>
+            <a:ext cx="4644443" cy="2001084"/>
           </a:xfrm>
         </p:spPr>
         <p:txBody>
@@ -2094,7 +2101,7 @@
           <a:p>
             <a:fld id="{C9965009-D4C9-4BD1-8D98-F9C892462EAE}" type="datetimeFigureOut">
               <a:rPr lang="zh-TW" altLang="en-US" smtClean="0"/>
-              <a:t>2026/3/17</a:t>
+              <a:t>2026/4/1</a:t>
             </a:fld>
             <a:endParaRPr lang="zh-TW" altLang="en-US"/>
           </a:p>
@@ -2145,7 +2152,7 @@
     </p:spTree>
     <p:extLst>
       <p:ext uri="{BB962C8B-B14F-4D97-AF65-F5344CB8AC3E}">
-        <p14:creationId xmlns:p14="http://schemas.microsoft.com/office/powerpoint/2010/main" val="1822469808"/>
+        <p14:creationId xmlns:p14="http://schemas.microsoft.com/office/powerpoint/2010/main" val="3439990782"/>
       </p:ext>
     </p:extLst>
   </p:cSld>
@@ -2184,8 +2191,8 @@
         </p:nvSpPr>
         <p:spPr>
           <a:xfrm>
-            <a:off x="839789" y="240030"/>
-            <a:ext cx="3932237" cy="840105"/>
+            <a:off x="991891" y="240030"/>
+            <a:ext cx="4644443" cy="840105"/>
           </a:xfrm>
         </p:spPr>
         <p:txBody>
@@ -2216,8 +2223,8 @@
         </p:nvSpPr>
         <p:spPr>
           <a:xfrm>
-            <a:off x="5183188" y="518398"/>
-            <a:ext cx="6172200" cy="2558653"/>
+            <a:off x="6121966" y="518398"/>
+            <a:ext cx="7290108" cy="2558653"/>
           </a:xfrm>
         </p:spPr>
         <p:txBody>
@@ -2281,8 +2288,8 @@
         </p:nvSpPr>
         <p:spPr>
           <a:xfrm>
-            <a:off x="839789" y="1080135"/>
-            <a:ext cx="3932237" cy="2001084"/>
+            <a:off x="991891" y="1080135"/>
+            <a:ext cx="4644443" cy="2001084"/>
           </a:xfrm>
         </p:spPr>
         <p:txBody>
@@ -2351,7 +2358,7 @@
           <a:p>
             <a:fld id="{C9965009-D4C9-4BD1-8D98-F9C892462EAE}" type="datetimeFigureOut">
               <a:rPr lang="zh-TW" altLang="en-US" smtClean="0"/>
-              <a:t>2026/3/17</a:t>
+              <a:t>2026/4/1</a:t>
             </a:fld>
             <a:endParaRPr lang="zh-TW" altLang="en-US"/>
           </a:p>
@@ -2402,7 +2409,7 @@
     </p:spTree>
     <p:extLst>
       <p:ext uri="{BB962C8B-B14F-4D97-AF65-F5344CB8AC3E}">
-        <p14:creationId xmlns:p14="http://schemas.microsoft.com/office/powerpoint/2010/main" val="298027041"/>
+        <p14:creationId xmlns:p14="http://schemas.microsoft.com/office/powerpoint/2010/main" val="1863831201"/>
       </p:ext>
     </p:extLst>
   </p:cSld>
@@ -2446,8 +2453,8 @@
         </p:nvSpPr>
         <p:spPr>
           <a:xfrm>
-            <a:off x="838200" y="191691"/>
-            <a:ext cx="10515600" cy="695921"/>
+            <a:off x="990015" y="191691"/>
+            <a:ext cx="12420184" cy="695921"/>
           </a:xfrm>
           <a:prstGeom prst="rect">
             <a:avLst/>
@@ -2479,8 +2486,8 @@
         </p:nvSpPr>
         <p:spPr>
           <a:xfrm>
-            <a:off x="838200" y="958453"/>
-            <a:ext cx="10515600" cy="2284452"/>
+            <a:off x="990015" y="958453"/>
+            <a:ext cx="12420184" cy="2284452"/>
           </a:xfrm>
           <a:prstGeom prst="rect">
             <a:avLst/>
@@ -2541,8 +2548,8 @@
         </p:nvSpPr>
         <p:spPr>
           <a:xfrm>
-            <a:off x="838200" y="3337084"/>
-            <a:ext cx="2743200" cy="191691"/>
+            <a:off x="990015" y="3337084"/>
+            <a:ext cx="3240048" cy="191691"/>
           </a:xfrm>
           <a:prstGeom prst="rect">
             <a:avLst/>
@@ -2564,7 +2571,7 @@
           <a:p>
             <a:fld id="{C9965009-D4C9-4BD1-8D98-F9C892462EAE}" type="datetimeFigureOut">
               <a:rPr lang="zh-TW" altLang="en-US" smtClean="0"/>
-              <a:t>2026/3/17</a:t>
+              <a:t>2026/4/1</a:t>
             </a:fld>
             <a:endParaRPr lang="zh-TW" altLang="en-US"/>
           </a:p>
@@ -2582,8 +2589,8 @@
         </p:nvSpPr>
         <p:spPr>
           <a:xfrm>
-            <a:off x="4038600" y="3337084"/>
-            <a:ext cx="4114800" cy="191691"/>
+            <a:off x="4770071" y="3337084"/>
+            <a:ext cx="4860072" cy="191691"/>
           </a:xfrm>
           <a:prstGeom prst="rect">
             <a:avLst/>
@@ -2619,8 +2626,8 @@
         </p:nvSpPr>
         <p:spPr>
           <a:xfrm>
-            <a:off x="8610600" y="3337084"/>
-            <a:ext cx="2743200" cy="191691"/>
+            <a:off x="10170150" y="3337084"/>
+            <a:ext cx="3240048" cy="191691"/>
           </a:xfrm>
           <a:prstGeom prst="rect">
             <a:avLst/>
@@ -2651,23 +2658,23 @@
     </p:spTree>
     <p:extLst>
       <p:ext uri="{BB962C8B-B14F-4D97-AF65-F5344CB8AC3E}">
-        <p14:creationId xmlns:p14="http://schemas.microsoft.com/office/powerpoint/2010/main" val="2552684593"/>
+        <p14:creationId xmlns:p14="http://schemas.microsoft.com/office/powerpoint/2010/main" val="2240199972"/>
       </p:ext>
     </p:extLst>
   </p:cSld>
   <p:clrMap bg1="lt1" tx1="dk1" bg2="lt2" tx2="dk2" accent1="accent1" accent2="accent2" accent3="accent3" accent4="accent4" accent5="accent5" accent6="accent6" hlink="hlink" folHlink="folHlink"/>
   <p:sldLayoutIdLst>
-    <p:sldLayoutId id="2147483661" r:id="rId1"/>
-    <p:sldLayoutId id="2147483662" r:id="rId2"/>
-    <p:sldLayoutId id="2147483663" r:id="rId3"/>
-    <p:sldLayoutId id="2147483664" r:id="rId4"/>
-    <p:sldLayoutId id="2147483665" r:id="rId5"/>
-    <p:sldLayoutId id="2147483666" r:id="rId6"/>
-    <p:sldLayoutId id="2147483667" r:id="rId7"/>
-    <p:sldLayoutId id="2147483668" r:id="rId8"/>
-    <p:sldLayoutId id="2147483669" r:id="rId9"/>
-    <p:sldLayoutId id="2147483670" r:id="rId10"/>
-    <p:sldLayoutId id="2147483671" r:id="rId11"/>
+    <p:sldLayoutId id="2147483805" r:id="rId1"/>
+    <p:sldLayoutId id="2147483806" r:id="rId2"/>
+    <p:sldLayoutId id="2147483807" r:id="rId3"/>
+    <p:sldLayoutId id="2147483808" r:id="rId4"/>
+    <p:sldLayoutId id="2147483809" r:id="rId5"/>
+    <p:sldLayoutId id="2147483810" r:id="rId6"/>
+    <p:sldLayoutId id="2147483811" r:id="rId7"/>
+    <p:sldLayoutId id="2147483812" r:id="rId8"/>
+    <p:sldLayoutId id="2147483813" r:id="rId9"/>
+    <p:sldLayoutId id="2147483814" r:id="rId10"/>
+    <p:sldLayoutId id="2147483815" r:id="rId11"/>
   </p:sldLayoutIdLst>
   <p:txStyles>
     <p:titleStyle>
@@ -2997,8 +3004,8 @@
         </p:blipFill>
         <p:spPr>
           <a:xfrm>
-            <a:off x="2044460" y="-1586207"/>
-            <a:ext cx="8557404" cy="6763773"/>
+            <a:off x="2820232" y="-1860637"/>
+            <a:ext cx="9250889" cy="7311904"/>
           </a:xfrm>
           <a:prstGeom prst="rect">
             <a:avLst/>
@@ -3019,7 +3026,7 @@
 </file>
 
 <file path=ppt/slides/slide2.xml><?xml version="1.0" encoding="utf-8"?>
-<p:sld xmlns:a="http://schemas.openxmlformats.org/drawingml/2006/main" xmlns:r="http://schemas.openxmlformats.org/officeDocument/2006/relationships" xmlns:p="http://schemas.openxmlformats.org/presentationml/2006/main">
+<p:sld xmlns:a="http://schemas.openxmlformats.org/drawingml/2006/main" xmlns:r="http://schemas.openxmlformats.org/officeDocument/2006/relationships" xmlns:p="http://schemas.openxmlformats.org/presentationml/2006/main" show="0">
   <p:cSld>
     <p:spTree>
       <p:nvGrpSpPr>
@@ -3049,10 +3056,10 @@
         </p:nvGrpSpPr>
         <p:grpSpPr>
           <a:xfrm>
-            <a:off x="-12151" y="20488"/>
-            <a:ext cx="12216303" cy="3502325"/>
-            <a:chOff x="19734" y="1647645"/>
-            <a:chExt cx="12216303" cy="3502325"/>
+            <a:off x="184949" y="245405"/>
+            <a:ext cx="13618316" cy="3417016"/>
+            <a:chOff x="90306" y="1989107"/>
+            <a:chExt cx="12145731" cy="3160863"/>
           </a:xfrm>
         </p:grpSpPr>
         <p:sp>
@@ -3069,8 +3076,8 @@
           </p:nvSpPr>
           <p:spPr>
             <a:xfrm>
-              <a:off x="90306" y="1708030"/>
-              <a:ext cx="12090192" cy="3347049"/>
+              <a:off x="90306" y="1989107"/>
+              <a:ext cx="12090192" cy="3065972"/>
             </a:xfrm>
             <a:prstGeom prst="rect">
               <a:avLst/>
@@ -3099,7 +3106,7 @@
             </a:fontRef>
           </p:style>
           <p:txBody>
-            <a:bodyPr rot="0" spcFirstLastPara="0" vertOverflow="overflow" horzOverflow="overflow" vert="horz" wrap="square" lIns="91440" tIns="45720" rIns="91440" bIns="45720" numCol="1" spcCol="0" rtlCol="0" fromWordArt="0" anchor="ctr" anchorCtr="0" forceAA="0" compatLnSpc="1">
+            <a:bodyPr rot="0" spcFirstLastPara="0" vertOverflow="overflow" horzOverflow="overflow" vert="horz" wrap="square" lIns="98850" tIns="49425" rIns="98850" bIns="49425" numCol="1" spcCol="0" rtlCol="0" fromWordArt="0" anchor="ctr" anchorCtr="0" forceAA="0" compatLnSpc="1">
               <a:prstTxWarp prst="textNoShape">
                 <a:avLst/>
               </a:prstTxWarp>
@@ -3108,7 +3115,7 @@
             <a:lstStyle/>
             <a:p>
               <a:pPr algn="ctr"/>
-              <a:endParaRPr lang="zh-TW" altLang="en-US"/>
+              <a:endParaRPr lang="zh-TW" altLang="en-US" sz="1945"/>
             </a:p>
           </p:txBody>
         </p:sp>
@@ -3126,10 +3133,10 @@
           </p:nvGrpSpPr>
           <p:grpSpPr>
             <a:xfrm>
-              <a:off x="19734" y="1647645"/>
-              <a:ext cx="12216303" cy="3502325"/>
-              <a:chOff x="467769" y="1225155"/>
-              <a:chExt cx="10741557" cy="3079526"/>
+              <a:off x="125678" y="1999164"/>
+              <a:ext cx="12110359" cy="3150806"/>
+              <a:chOff x="560923" y="1534239"/>
+              <a:chExt cx="10648403" cy="2770442"/>
             </a:xfrm>
           </p:grpSpPr>
           <p:pic>
@@ -3202,84 +3209,6 @@
               </a:prstGeom>
             </p:spPr>
           </p:pic>
-          <p:sp>
-            <p:nvSpPr>
-              <p:cNvPr id="6" name="文字方塊 5">
-                <a:extLst>
-                  <a:ext uri="{FF2B5EF4-FFF2-40B4-BE49-F238E27FC236}">
-                    <a16:creationId xmlns:a16="http://schemas.microsoft.com/office/drawing/2014/main" id="{F294F27E-A595-4634-BBC3-FD880ACBE2EF}"/>
-                  </a:ext>
-                </a:extLst>
-              </p:cNvPr>
-              <p:cNvSpPr txBox="1"/>
-              <p:nvPr/>
-            </p:nvSpPr>
-            <p:spPr>
-              <a:xfrm>
-                <a:off x="467769" y="1225155"/>
-                <a:ext cx="334489" cy="332108"/>
-              </a:xfrm>
-              <a:prstGeom prst="rect">
-                <a:avLst/>
-              </a:prstGeom>
-              <a:solidFill>
-                <a:schemeClr val="bg1"/>
-              </a:solidFill>
-            </p:spPr>
-            <p:txBody>
-              <a:bodyPr wrap="square" rtlCol="0">
-                <a:spAutoFit/>
-              </a:bodyPr>
-              <a:lstStyle/>
-              <a:p>
-                <a:pPr algn="r"/>
-                <a:r>
-                  <a:rPr lang="en-US" altLang="zh-TW" dirty="0"/>
-                  <a:t>(a)</a:t>
-                </a:r>
-                <a:endParaRPr lang="zh-TW" altLang="en-US" dirty="0"/>
-              </a:p>
-            </p:txBody>
-          </p:sp>
-          <p:sp>
-            <p:nvSpPr>
-              <p:cNvPr id="7" name="文字方塊 6">
-                <a:extLst>
-                  <a:ext uri="{FF2B5EF4-FFF2-40B4-BE49-F238E27FC236}">
-                    <a16:creationId xmlns:a16="http://schemas.microsoft.com/office/drawing/2014/main" id="{101E3CF4-0A9D-4AD6-A133-B199F8664EE2}"/>
-                  </a:ext>
-                </a:extLst>
-              </p:cNvPr>
-              <p:cNvSpPr txBox="1"/>
-              <p:nvPr/>
-            </p:nvSpPr>
-            <p:spPr>
-              <a:xfrm>
-                <a:off x="6579080" y="1225155"/>
-                <a:ext cx="552090" cy="324746"/>
-              </a:xfrm>
-              <a:prstGeom prst="rect">
-                <a:avLst/>
-              </a:prstGeom>
-              <a:solidFill>
-                <a:schemeClr val="bg1"/>
-              </a:solidFill>
-            </p:spPr>
-            <p:txBody>
-              <a:bodyPr wrap="square" rtlCol="0">
-                <a:spAutoFit/>
-              </a:bodyPr>
-              <a:lstStyle/>
-              <a:p>
-                <a:pPr algn="r"/>
-                <a:r>
-                  <a:rPr lang="en-US" altLang="zh-TW" dirty="0"/>
-                  <a:t>(b)</a:t>
-                </a:r>
-                <a:endParaRPr lang="zh-TW" altLang="en-US" dirty="0"/>
-              </a:p>
-            </p:txBody>
-          </p:sp>
           <mc:AlternateContent xmlns:mc="http://schemas.openxmlformats.org/markup-compatibility/2006">
             <mc:Choice xmlns:a14="http://schemas.microsoft.com/office/drawing/2010/main" Requires="a14">
               <p:sp>
@@ -3296,8 +3225,8 @@
                 </p:nvSpPr>
                 <p:spPr>
                   <a:xfrm rot="16200000">
-                    <a:off x="-63328" y="2810350"/>
-                    <a:ext cx="1555631" cy="324746"/>
+                    <a:off x="-63328" y="2819159"/>
+                    <a:ext cx="1555631" cy="307129"/>
                   </a:xfrm>
                   <a:prstGeom prst="rect">
                     <a:avLst/>
@@ -3312,7 +3241,7 @@
                   <a:p>
                     <a:pPr algn="r"/>
                     <a:r>
-                      <a:rPr lang="en-US" altLang="zh-TW" dirty="0"/>
+                      <a:rPr lang="en-US" altLang="zh-TW" sz="1945" dirty="0"/>
                       <a:t>Energy (</a:t>
                     </a:r>
                     <a14:m>
@@ -3321,7 +3250,7 @@
                           <m:rPr>
                             <m:sty m:val="p"/>
                           </m:rPr>
-                          <a:rPr lang="en-US" altLang="zh-TW" dirty="0">
+                          <a:rPr lang="en-US" altLang="zh-TW" sz="1945" dirty="0">
                             <a:latin typeface="Cambria Math" panose="02040503050406030204" pitchFamily="18" charset="0"/>
                           </a:rPr>
                           <m:t>eV</m:t>
@@ -3329,10 +3258,10 @@
                       </m:oMath>
                     </a14:m>
                     <a:r>
-                      <a:rPr lang="en-US" altLang="zh-TW" dirty="0"/>
+                      <a:rPr lang="en-US" altLang="zh-TW" sz="1945" dirty="0"/>
                       <a:t>) </a:t>
                     </a:r>
-                    <a:endParaRPr lang="zh-TW" altLang="en-US" dirty="0"/>
+                    <a:endParaRPr lang="zh-TW" altLang="en-US" sz="1945" dirty="0"/>
                   </a:p>
                 </p:txBody>
               </p:sp>
@@ -3354,8 +3283,8 @@
                 </p:nvSpPr>
                 <p:spPr>
                   <a:xfrm rot="16200000">
-                    <a:off x="-63328" y="2810350"/>
-                    <a:ext cx="1555631" cy="324746"/>
+                    <a:off x="-63328" y="2819159"/>
+                    <a:ext cx="1555631" cy="307129"/>
                   </a:xfrm>
                   <a:prstGeom prst="rect">
                     <a:avLst/>
@@ -3363,7 +3292,7 @@
                   <a:blipFill>
                     <a:blip r:embed="rId3"/>
                     <a:stretch>
-                      <a:fillRect l="-10000" t="-5155" r="-26667"/>
+                      <a:fillRect l="-7813" t="-6369" r="-26563"/>
                     </a:stretch>
                   </a:blipFill>
                 </p:spPr>
@@ -3398,8 +3327,8 @@
                 </p:nvSpPr>
                 <p:spPr>
                   <a:xfrm rot="16200000">
-                    <a:off x="6098812" y="2810350"/>
-                    <a:ext cx="1555631" cy="324746"/>
+                    <a:off x="6098812" y="2819159"/>
+                    <a:ext cx="1555631" cy="307129"/>
                   </a:xfrm>
                   <a:prstGeom prst="rect">
                     <a:avLst/>
@@ -3414,7 +3343,7 @@
                   <a:p>
                     <a:pPr algn="r"/>
                     <a:r>
-                      <a:rPr lang="en-US" altLang="zh-TW" dirty="0"/>
+                      <a:rPr lang="en-US" altLang="zh-TW" sz="1945" dirty="0"/>
                       <a:t>Energy (</a:t>
                     </a:r>
                     <a14:m>
@@ -3423,7 +3352,7 @@
                           <m:rPr>
                             <m:sty m:val="p"/>
                           </m:rPr>
-                          <a:rPr lang="en-US" altLang="zh-TW" dirty="0">
+                          <a:rPr lang="en-US" altLang="zh-TW" sz="1945" dirty="0">
                             <a:latin typeface="Cambria Math" panose="02040503050406030204" pitchFamily="18" charset="0"/>
                           </a:rPr>
                           <m:t>eV</m:t>
@@ -3431,10 +3360,10 @@
                       </m:oMath>
                     </a14:m>
                     <a:r>
-                      <a:rPr lang="en-US" altLang="zh-TW" dirty="0"/>
+                      <a:rPr lang="en-US" altLang="zh-TW" sz="1945" dirty="0"/>
                       <a:t>) </a:t>
                     </a:r>
-                    <a:endParaRPr lang="zh-TW" altLang="en-US" dirty="0"/>
+                    <a:endParaRPr lang="zh-TW" altLang="en-US" sz="1945" dirty="0"/>
                   </a:p>
                 </p:txBody>
               </p:sp>
@@ -3456,8 +3385,8 @@
                 </p:nvSpPr>
                 <p:spPr>
                   <a:xfrm rot="16200000">
-                    <a:off x="6098812" y="2810350"/>
-                    <a:ext cx="1555631" cy="324746"/>
+                    <a:off x="6098812" y="2819159"/>
+                    <a:ext cx="1555631" cy="307129"/>
                   </a:xfrm>
                   <a:prstGeom prst="rect">
                     <a:avLst/>
@@ -3465,7 +3394,7 @@
                   <a:blipFill>
                     <a:blip r:embed="rId4"/>
                     <a:stretch>
-                      <a:fillRect l="-8197" t="-5155" r="-24590"/>
+                      <a:fillRect l="-7813" t="-6369" r="-26563"/>
                     </a:stretch>
                   </a:blipFill>
                 </p:spPr>
@@ -3490,6 +3419,1938 @@
     <p:extLst>
       <p:ext uri="{BB962C8B-B14F-4D97-AF65-F5344CB8AC3E}">
         <p14:creationId xmlns:p14="http://schemas.microsoft.com/office/powerpoint/2010/main" val="2391114610"/>
+      </p:ext>
+    </p:extLst>
+  </p:cSld>
+  <p:clrMapOvr>
+    <a:masterClrMapping/>
+  </p:clrMapOvr>
+</p:sld>
+</file>
+
+<file path=ppt/slides/slide3.xml><?xml version="1.0" encoding="utf-8"?>
+<p:sld xmlns:a="http://schemas.openxmlformats.org/drawingml/2006/main" xmlns:r="http://schemas.openxmlformats.org/officeDocument/2006/relationships" xmlns:p="http://schemas.openxmlformats.org/presentationml/2006/main" show="0">
+  <p:cSld>
+    <p:spTree>
+      <p:nvGrpSpPr>
+        <p:cNvPr id="1" name=""/>
+        <p:cNvGrpSpPr/>
+        <p:nvPr/>
+      </p:nvGrpSpPr>
+      <p:grpSpPr>
+        <a:xfrm>
+          <a:off x="0" y="0"/>
+          <a:ext cx="0" cy="0"/>
+          <a:chOff x="0" y="0"/>
+          <a:chExt cx="0" cy="0"/>
+        </a:xfrm>
+      </p:grpSpPr>
+      <p:pic>
+        <p:nvPicPr>
+          <p:cNvPr id="6" name="圖片 5">
+            <a:extLst>
+              <a:ext uri="{FF2B5EF4-FFF2-40B4-BE49-F238E27FC236}">
+                <a16:creationId xmlns:a16="http://schemas.microsoft.com/office/drawing/2014/main" id="{77625C0E-3A03-4F5D-A082-ADA7B96B4D6D}"/>
+              </a:ext>
+            </a:extLst>
+          </p:cNvPr>
+          <p:cNvPicPr>
+            <a:picLocks noChangeAspect="1"/>
+          </p:cNvPicPr>
+          <p:nvPr/>
+        </p:nvPicPr>
+        <p:blipFill>
+          <a:blip r:embed="rId2"/>
+          <a:stretch>
+            <a:fillRect/>
+          </a:stretch>
+        </p:blipFill>
+        <p:spPr>
+          <a:xfrm>
+            <a:off x="1876927" y="228514"/>
+            <a:ext cx="10646361" cy="3143445"/>
+          </a:xfrm>
+          <a:prstGeom prst="rect">
+            <a:avLst/>
+          </a:prstGeom>
+        </p:spPr>
+      </p:pic>
+      <p:sp>
+        <p:nvSpPr>
+          <p:cNvPr id="77" name="等腰三角形 76">
+            <a:extLst>
+              <a:ext uri="{FF2B5EF4-FFF2-40B4-BE49-F238E27FC236}">
+                <a16:creationId xmlns:a16="http://schemas.microsoft.com/office/drawing/2014/main" id="{DC88E714-022C-42D8-86DC-2B6AA33982EB}"/>
+              </a:ext>
+            </a:extLst>
+          </p:cNvPr>
+          <p:cNvSpPr/>
+          <p:nvPr/>
+        </p:nvSpPr>
+        <p:spPr>
+          <a:xfrm rot="10800000">
+            <a:off x="5288510" y="4692434"/>
+            <a:ext cx="1953163" cy="2599285"/>
+          </a:xfrm>
+          <a:prstGeom prst="triangle">
+            <a:avLst/>
+          </a:prstGeom>
+          <a:solidFill>
+            <a:srgbClr val="FFC000">
+              <a:alpha val="30196"/>
+            </a:srgbClr>
+          </a:solidFill>
+          <a:ln>
+            <a:noFill/>
+          </a:ln>
+        </p:spPr>
+        <p:style>
+          <a:lnRef idx="2">
+            <a:schemeClr val="accent4">
+              <a:shade val="50000"/>
+            </a:schemeClr>
+          </a:lnRef>
+          <a:fillRef idx="1">
+            <a:schemeClr val="accent4"/>
+          </a:fillRef>
+          <a:effectRef idx="0">
+            <a:schemeClr val="accent4"/>
+          </a:effectRef>
+          <a:fontRef idx="minor">
+            <a:schemeClr val="lt1"/>
+          </a:fontRef>
+        </p:style>
+        <p:txBody>
+          <a:bodyPr rot="0" spcFirstLastPara="0" vertOverflow="overflow" horzOverflow="overflow" vert="horz" wrap="square" lIns="120198" tIns="60096" rIns="120198" bIns="60096" numCol="1" spcCol="0" rtlCol="0" fromWordArt="0" anchor="ctr" anchorCtr="0" forceAA="0" compatLnSpc="1">
+            <a:prstTxWarp prst="textNoShape">
+              <a:avLst/>
+            </a:prstTxWarp>
+            <a:noAutofit/>
+          </a:bodyPr>
+          <a:lstStyle/>
+          <a:p>
+            <a:pPr algn="ctr"/>
+            <a:endParaRPr lang="zh-TW" altLang="en-US" sz="2369" dirty="0"/>
+          </a:p>
+        </p:txBody>
+      </p:sp>
+      <p:sp>
+        <p:nvSpPr>
+          <p:cNvPr id="78" name="等腰三角形 77">
+            <a:extLst>
+              <a:ext uri="{FF2B5EF4-FFF2-40B4-BE49-F238E27FC236}">
+                <a16:creationId xmlns:a16="http://schemas.microsoft.com/office/drawing/2014/main" id="{F4B32212-8015-45F2-AEB4-1453CDFD5A01}"/>
+              </a:ext>
+            </a:extLst>
+          </p:cNvPr>
+          <p:cNvSpPr/>
+          <p:nvPr/>
+        </p:nvSpPr>
+        <p:spPr>
+          <a:xfrm rot="10800000">
+            <a:off x="8516919" y="4692434"/>
+            <a:ext cx="1953163" cy="2599285"/>
+          </a:xfrm>
+          <a:prstGeom prst="triangle">
+            <a:avLst/>
+          </a:prstGeom>
+          <a:solidFill>
+            <a:srgbClr val="FFC000">
+              <a:alpha val="30196"/>
+            </a:srgbClr>
+          </a:solidFill>
+          <a:ln>
+            <a:noFill/>
+          </a:ln>
+        </p:spPr>
+        <p:style>
+          <a:lnRef idx="2">
+            <a:schemeClr val="accent4">
+              <a:shade val="50000"/>
+            </a:schemeClr>
+          </a:lnRef>
+          <a:fillRef idx="1">
+            <a:schemeClr val="accent4"/>
+          </a:fillRef>
+          <a:effectRef idx="0">
+            <a:schemeClr val="accent4"/>
+          </a:effectRef>
+          <a:fontRef idx="minor">
+            <a:schemeClr val="lt1"/>
+          </a:fontRef>
+        </p:style>
+        <p:txBody>
+          <a:bodyPr rot="0" spcFirstLastPara="0" vertOverflow="overflow" horzOverflow="overflow" vert="horz" wrap="square" lIns="120198" tIns="60096" rIns="120198" bIns="60096" numCol="1" spcCol="0" rtlCol="0" fromWordArt="0" anchor="ctr" anchorCtr="0" forceAA="0" compatLnSpc="1">
+            <a:prstTxWarp prst="textNoShape">
+              <a:avLst/>
+            </a:prstTxWarp>
+            <a:noAutofit/>
+          </a:bodyPr>
+          <a:lstStyle/>
+          <a:p>
+            <a:pPr algn="ctr"/>
+            <a:endParaRPr lang="zh-TW" altLang="en-US" sz="2369"/>
+          </a:p>
+        </p:txBody>
+      </p:sp>
+      <p:pic>
+        <p:nvPicPr>
+          <p:cNvPr id="79" name="圖片 78">
+            <a:extLst>
+              <a:ext uri="{FF2B5EF4-FFF2-40B4-BE49-F238E27FC236}">
+                <a16:creationId xmlns:a16="http://schemas.microsoft.com/office/drawing/2014/main" id="{51C7B06C-8D78-403B-ADBD-C3AAA5603ED4}"/>
+              </a:ext>
+            </a:extLst>
+          </p:cNvPr>
+          <p:cNvPicPr>
+            <a:picLocks noChangeAspect="1"/>
+          </p:cNvPicPr>
+          <p:nvPr/>
+        </p:nvPicPr>
+        <p:blipFill rotWithShape="1">
+          <a:blip r:embed="rId3"/>
+          <a:srcRect l="7992" t="38920" r="6883"/>
+          <a:stretch/>
+        </p:blipFill>
+        <p:spPr>
+          <a:xfrm>
+            <a:off x="8059889" y="4919626"/>
+            <a:ext cx="2804949" cy="1222725"/>
+          </a:xfrm>
+          <a:prstGeom prst="rect">
+            <a:avLst/>
+          </a:prstGeom>
+        </p:spPr>
+      </p:pic>
+      <p:sp>
+        <p:nvSpPr>
+          <p:cNvPr id="80" name="等腰三角形 79">
+            <a:extLst>
+              <a:ext uri="{FF2B5EF4-FFF2-40B4-BE49-F238E27FC236}">
+                <a16:creationId xmlns:a16="http://schemas.microsoft.com/office/drawing/2014/main" id="{FF4DF668-9B3B-4170-AC92-4FBE19F4A1F5}"/>
+              </a:ext>
+            </a:extLst>
+          </p:cNvPr>
+          <p:cNvSpPr/>
+          <p:nvPr/>
+        </p:nvSpPr>
+        <p:spPr>
+          <a:xfrm rot="10800000">
+            <a:off x="11791065" y="4692434"/>
+            <a:ext cx="1953163" cy="2599285"/>
+          </a:xfrm>
+          <a:prstGeom prst="triangle">
+            <a:avLst/>
+          </a:prstGeom>
+          <a:solidFill>
+            <a:srgbClr val="FFC000">
+              <a:alpha val="30196"/>
+            </a:srgbClr>
+          </a:solidFill>
+          <a:ln>
+            <a:noFill/>
+          </a:ln>
+        </p:spPr>
+        <p:style>
+          <a:lnRef idx="2">
+            <a:schemeClr val="accent4">
+              <a:shade val="50000"/>
+            </a:schemeClr>
+          </a:lnRef>
+          <a:fillRef idx="1">
+            <a:schemeClr val="accent4"/>
+          </a:fillRef>
+          <a:effectRef idx="0">
+            <a:schemeClr val="accent4"/>
+          </a:effectRef>
+          <a:fontRef idx="minor">
+            <a:schemeClr val="lt1"/>
+          </a:fontRef>
+        </p:style>
+        <p:txBody>
+          <a:bodyPr rot="0" spcFirstLastPara="0" vertOverflow="overflow" horzOverflow="overflow" vert="horz" wrap="square" lIns="120198" tIns="60096" rIns="120198" bIns="60096" numCol="1" spcCol="0" rtlCol="0" fromWordArt="0" anchor="ctr" anchorCtr="0" forceAA="0" compatLnSpc="1">
+            <a:prstTxWarp prst="textNoShape">
+              <a:avLst/>
+            </a:prstTxWarp>
+            <a:noAutofit/>
+          </a:bodyPr>
+          <a:lstStyle/>
+          <a:p>
+            <a:pPr algn="ctr"/>
+            <a:endParaRPr lang="zh-TW" altLang="en-US" sz="2369"/>
+          </a:p>
+        </p:txBody>
+      </p:sp>
+      <p:cxnSp>
+        <p:nvCxnSpPr>
+          <p:cNvPr id="81" name="直線單箭頭接點 80">
+            <a:extLst>
+              <a:ext uri="{FF2B5EF4-FFF2-40B4-BE49-F238E27FC236}">
+                <a16:creationId xmlns:a16="http://schemas.microsoft.com/office/drawing/2014/main" id="{B81EA5F4-2DC0-4A7C-BFAE-C6F94065C8CC}"/>
+              </a:ext>
+            </a:extLst>
+          </p:cNvPr>
+          <p:cNvCxnSpPr>
+            <a:cxnSpLocks/>
+          </p:cNvCxnSpPr>
+          <p:nvPr/>
+        </p:nvCxnSpPr>
+        <p:spPr>
+          <a:xfrm flipV="1">
+            <a:off x="9499172" y="4990437"/>
+            <a:ext cx="1189278" cy="2329407"/>
+          </a:xfrm>
+          <a:prstGeom prst="straightConnector1">
+            <a:avLst/>
+          </a:prstGeom>
+          <a:ln w="57150">
+            <a:solidFill>
+              <a:srgbClr val="E1B037"/>
+            </a:solidFill>
+            <a:headEnd w="sm" len="sm"/>
+            <a:tailEnd type="triangle" w="med" len="lg"/>
+          </a:ln>
+        </p:spPr>
+        <p:style>
+          <a:lnRef idx="3">
+            <a:schemeClr val="accent4"/>
+          </a:lnRef>
+          <a:fillRef idx="0">
+            <a:schemeClr val="accent4"/>
+          </a:fillRef>
+          <a:effectRef idx="2">
+            <a:schemeClr val="accent4"/>
+          </a:effectRef>
+          <a:fontRef idx="minor">
+            <a:schemeClr val="tx1"/>
+          </a:fontRef>
+        </p:style>
+      </p:cxnSp>
+      <p:cxnSp>
+        <p:nvCxnSpPr>
+          <p:cNvPr id="82" name="直線單箭頭接點 81">
+            <a:extLst>
+              <a:ext uri="{FF2B5EF4-FFF2-40B4-BE49-F238E27FC236}">
+                <a16:creationId xmlns:a16="http://schemas.microsoft.com/office/drawing/2014/main" id="{29B8442D-53F4-4FC0-8204-2EE7C92579D0}"/>
+              </a:ext>
+            </a:extLst>
+          </p:cNvPr>
+          <p:cNvCxnSpPr>
+            <a:cxnSpLocks/>
+          </p:cNvCxnSpPr>
+          <p:nvPr/>
+        </p:nvCxnSpPr>
+        <p:spPr>
+          <a:xfrm flipV="1">
+            <a:off x="12783195" y="6198607"/>
+            <a:ext cx="74467" cy="1121235"/>
+          </a:xfrm>
+          <a:prstGeom prst="straightConnector1">
+            <a:avLst/>
+          </a:prstGeom>
+          <a:ln w="57150">
+            <a:solidFill>
+              <a:srgbClr val="E1B037"/>
+            </a:solidFill>
+            <a:headEnd w="sm" len="sm"/>
+            <a:tailEnd type="triangle" w="med" len="lg"/>
+          </a:ln>
+        </p:spPr>
+        <p:style>
+          <a:lnRef idx="3">
+            <a:schemeClr val="accent4"/>
+          </a:lnRef>
+          <a:fillRef idx="0">
+            <a:schemeClr val="accent4"/>
+          </a:fillRef>
+          <a:effectRef idx="2">
+            <a:schemeClr val="accent4"/>
+          </a:effectRef>
+          <a:fontRef idx="minor">
+            <a:schemeClr val="tx1"/>
+          </a:fontRef>
+        </p:style>
+      </p:cxnSp>
+      <p:pic>
+        <p:nvPicPr>
+          <p:cNvPr id="83" name="圖片 82">
+            <a:extLst>
+              <a:ext uri="{FF2B5EF4-FFF2-40B4-BE49-F238E27FC236}">
+                <a16:creationId xmlns:a16="http://schemas.microsoft.com/office/drawing/2014/main" id="{B4676756-0590-4365-8629-B046BF860D6E}"/>
+              </a:ext>
+            </a:extLst>
+          </p:cNvPr>
+          <p:cNvPicPr>
+            <a:picLocks noChangeAspect="1"/>
+          </p:cNvPicPr>
+          <p:nvPr/>
+        </p:nvPicPr>
+        <p:blipFill rotWithShape="1">
+          <a:blip r:embed="rId4"/>
+          <a:srcRect l="7872" t="40135" r="7992" b="-2"/>
+          <a:stretch/>
+        </p:blipFill>
+        <p:spPr>
+          <a:xfrm rot="10800000">
+            <a:off x="11350361" y="7258683"/>
+            <a:ext cx="2772340" cy="1198426"/>
+          </a:xfrm>
+          <a:prstGeom prst="rect">
+            <a:avLst/>
+          </a:prstGeom>
+        </p:spPr>
+      </p:pic>
+      <p:pic>
+        <p:nvPicPr>
+          <p:cNvPr id="84" name="圖片 83">
+            <a:extLst>
+              <a:ext uri="{FF2B5EF4-FFF2-40B4-BE49-F238E27FC236}">
+                <a16:creationId xmlns:a16="http://schemas.microsoft.com/office/drawing/2014/main" id="{0C4911DD-913E-480E-B726-442423114484}"/>
+              </a:ext>
+            </a:extLst>
+          </p:cNvPr>
+          <p:cNvPicPr>
+            <a:picLocks noChangeAspect="1"/>
+          </p:cNvPicPr>
+          <p:nvPr/>
+        </p:nvPicPr>
+        <p:blipFill rotWithShape="1">
+          <a:blip r:embed="rId3"/>
+          <a:srcRect l="7992" t="38920" r="6883"/>
+          <a:stretch/>
+        </p:blipFill>
+        <p:spPr>
+          <a:xfrm>
+            <a:off x="11334035" y="4919626"/>
+            <a:ext cx="2804949" cy="1222725"/>
+          </a:xfrm>
+          <a:prstGeom prst="rect">
+            <a:avLst/>
+          </a:prstGeom>
+        </p:spPr>
+      </p:pic>
+      <p:pic>
+        <p:nvPicPr>
+          <p:cNvPr id="85" name="圖片 84">
+            <a:extLst>
+              <a:ext uri="{FF2B5EF4-FFF2-40B4-BE49-F238E27FC236}">
+                <a16:creationId xmlns:a16="http://schemas.microsoft.com/office/drawing/2014/main" id="{1D933F25-1E42-4BEC-A005-D2A1ED9F2E6F}"/>
+              </a:ext>
+            </a:extLst>
+          </p:cNvPr>
+          <p:cNvPicPr>
+            <a:picLocks noChangeAspect="1"/>
+          </p:cNvPicPr>
+          <p:nvPr/>
+        </p:nvPicPr>
+        <p:blipFill rotWithShape="1">
+          <a:blip r:embed="rId4"/>
+          <a:srcRect l="7663" t="40135" r="7542" b="-2"/>
+          <a:stretch/>
+        </p:blipFill>
+        <p:spPr>
+          <a:xfrm>
+            <a:off x="11339476" y="4397455"/>
+            <a:ext cx="2794085" cy="1198426"/>
+          </a:xfrm>
+          <a:prstGeom prst="rect">
+            <a:avLst/>
+          </a:prstGeom>
+        </p:spPr>
+      </p:pic>
+      <p:sp>
+        <p:nvSpPr>
+          <p:cNvPr id="86" name="橢圓 85">
+            <a:extLst>
+              <a:ext uri="{FF2B5EF4-FFF2-40B4-BE49-F238E27FC236}">
+                <a16:creationId xmlns:a16="http://schemas.microsoft.com/office/drawing/2014/main" id="{85965922-738E-43B3-829E-CC45941EB2B9}"/>
+              </a:ext>
+            </a:extLst>
+          </p:cNvPr>
+          <p:cNvSpPr/>
+          <p:nvPr/>
+        </p:nvSpPr>
+        <p:spPr>
+          <a:xfrm>
+            <a:off x="12646947" y="7192271"/>
+            <a:ext cx="236607" cy="236607"/>
+          </a:xfrm>
+          <a:prstGeom prst="ellipse">
+            <a:avLst/>
+          </a:prstGeom>
+          <a:solidFill>
+            <a:schemeClr val="bg1"/>
+          </a:solidFill>
+          <a:ln>
+            <a:solidFill>
+              <a:schemeClr val="tx1"/>
+            </a:solidFill>
+          </a:ln>
+        </p:spPr>
+        <p:style>
+          <a:lnRef idx="2">
+            <a:schemeClr val="accent1">
+              <a:shade val="50000"/>
+            </a:schemeClr>
+          </a:lnRef>
+          <a:fillRef idx="1">
+            <a:schemeClr val="accent1"/>
+          </a:fillRef>
+          <a:effectRef idx="0">
+            <a:schemeClr val="accent1"/>
+          </a:effectRef>
+          <a:fontRef idx="minor">
+            <a:schemeClr val="lt1"/>
+          </a:fontRef>
+        </p:style>
+        <p:txBody>
+          <a:bodyPr rtlCol="0" anchor="ctr"/>
+          <a:lstStyle/>
+          <a:p>
+            <a:pPr algn="ctr"/>
+            <a:endParaRPr lang="zh-TW" altLang="en-US" sz="2369" dirty="0"/>
+          </a:p>
+        </p:txBody>
+      </p:sp>
+      <p:sp>
+        <p:nvSpPr>
+          <p:cNvPr id="87" name="橢圓 86">
+            <a:extLst>
+              <a:ext uri="{FF2B5EF4-FFF2-40B4-BE49-F238E27FC236}">
+                <a16:creationId xmlns:a16="http://schemas.microsoft.com/office/drawing/2014/main" id="{F688DE77-3556-4DEE-AD99-CA67157E7516}"/>
+              </a:ext>
+            </a:extLst>
+          </p:cNvPr>
+          <p:cNvSpPr/>
+          <p:nvPr/>
+        </p:nvSpPr>
+        <p:spPr>
+          <a:xfrm>
+            <a:off x="12750468" y="5944386"/>
+            <a:ext cx="236607" cy="236607"/>
+          </a:xfrm>
+          <a:prstGeom prst="ellipse">
+            <a:avLst/>
+          </a:prstGeom>
+          <a:solidFill>
+            <a:schemeClr val="tx1"/>
+          </a:solidFill>
+          <a:ln>
+            <a:solidFill>
+              <a:schemeClr val="tx1"/>
+            </a:solidFill>
+          </a:ln>
+        </p:spPr>
+        <p:style>
+          <a:lnRef idx="2">
+            <a:schemeClr val="accent1">
+              <a:shade val="50000"/>
+            </a:schemeClr>
+          </a:lnRef>
+          <a:fillRef idx="1">
+            <a:schemeClr val="accent1"/>
+          </a:fillRef>
+          <a:effectRef idx="0">
+            <a:schemeClr val="accent1"/>
+          </a:effectRef>
+          <a:fontRef idx="minor">
+            <a:schemeClr val="lt1"/>
+          </a:fontRef>
+        </p:style>
+        <p:txBody>
+          <a:bodyPr rtlCol="0" anchor="ctr"/>
+          <a:lstStyle/>
+          <a:p>
+            <a:pPr algn="ctr"/>
+            <a:endParaRPr lang="zh-TW" altLang="en-US" sz="2369" dirty="0"/>
+          </a:p>
+        </p:txBody>
+      </p:sp>
+      <p:sp>
+        <p:nvSpPr>
+          <p:cNvPr id="88" name="文字方塊 87">
+            <a:extLst>
+              <a:ext uri="{FF2B5EF4-FFF2-40B4-BE49-F238E27FC236}">
+                <a16:creationId xmlns:a16="http://schemas.microsoft.com/office/drawing/2014/main" id="{F3FC269E-E30A-4BA8-AEC0-E4B85E510326}"/>
+              </a:ext>
+            </a:extLst>
+          </p:cNvPr>
+          <p:cNvSpPr txBox="1"/>
+          <p:nvPr/>
+        </p:nvSpPr>
+        <p:spPr>
+          <a:xfrm>
+            <a:off x="4809917" y="3746964"/>
+            <a:ext cx="2962561" cy="821507"/>
+          </a:xfrm>
+          <a:prstGeom prst="rect">
+            <a:avLst/>
+          </a:prstGeom>
+          <a:noFill/>
+        </p:spPr>
+        <p:txBody>
+          <a:bodyPr wrap="square" rtlCol="0">
+            <a:spAutoFit/>
+          </a:bodyPr>
+          <a:lstStyle/>
+          <a:p>
+            <a:pPr algn="ctr"/>
+            <a:r>
+              <a:rPr lang="en-US" altLang="zh-TW" sz="2369" dirty="0">
+                <a:latin typeface="Times New Roman" panose="02020603050405020304" pitchFamily="18" charset="0"/>
+                <a:cs typeface="Times New Roman" panose="02020603050405020304" pitchFamily="18" charset="0"/>
+              </a:rPr>
+              <a:t>Spin-allowed</a:t>
+            </a:r>
+          </a:p>
+          <a:p>
+            <a:pPr algn="ctr"/>
+            <a:r>
+              <a:rPr lang="en-US" altLang="zh-TW" sz="2369" dirty="0">
+                <a:latin typeface="Times New Roman" panose="02020603050405020304" pitchFamily="18" charset="0"/>
+                <a:cs typeface="Times New Roman" panose="02020603050405020304" pitchFamily="18" charset="0"/>
+              </a:rPr>
+              <a:t>BX</a:t>
+            </a:r>
+          </a:p>
+        </p:txBody>
+      </p:sp>
+      <p:sp>
+        <p:nvSpPr>
+          <p:cNvPr id="89" name="文字方塊 88">
+            <a:extLst>
+              <a:ext uri="{FF2B5EF4-FFF2-40B4-BE49-F238E27FC236}">
+                <a16:creationId xmlns:a16="http://schemas.microsoft.com/office/drawing/2014/main" id="{3B2FF01B-811F-42F4-B8B1-38A50F230BC6}"/>
+              </a:ext>
+            </a:extLst>
+          </p:cNvPr>
+          <p:cNvSpPr txBox="1"/>
+          <p:nvPr/>
+        </p:nvSpPr>
+        <p:spPr>
+          <a:xfrm>
+            <a:off x="11241711" y="3746964"/>
+            <a:ext cx="2962561" cy="821507"/>
+          </a:xfrm>
+          <a:prstGeom prst="rect">
+            <a:avLst/>
+          </a:prstGeom>
+          <a:noFill/>
+        </p:spPr>
+        <p:txBody>
+          <a:bodyPr wrap="square" rtlCol="0">
+            <a:spAutoFit/>
+          </a:bodyPr>
+          <a:lstStyle/>
+          <a:p>
+            <a:pPr algn="ctr"/>
+            <a:r>
+              <a:rPr lang="en-US" altLang="zh-TW" sz="2369" dirty="0">
+                <a:latin typeface="Times New Roman" panose="02020603050405020304" pitchFamily="18" charset="0"/>
+                <a:cs typeface="Times New Roman" panose="02020603050405020304" pitchFamily="18" charset="0"/>
+              </a:rPr>
+              <a:t>Spin-forbidden</a:t>
+            </a:r>
+          </a:p>
+          <a:p>
+            <a:pPr algn="ctr"/>
+            <a:r>
+              <a:rPr lang="en-US" altLang="zh-TW" sz="2369" dirty="0">
+                <a:latin typeface="Times New Roman" panose="02020603050405020304" pitchFamily="18" charset="0"/>
+                <a:cs typeface="Times New Roman" panose="02020603050405020304" pitchFamily="18" charset="0"/>
+              </a:rPr>
+              <a:t>DX </a:t>
+            </a:r>
+            <a:endParaRPr lang="zh-TW" altLang="en-US" sz="2369" dirty="0">
+              <a:latin typeface="Times New Roman" panose="02020603050405020304" pitchFamily="18" charset="0"/>
+              <a:cs typeface="Times New Roman" panose="02020603050405020304" pitchFamily="18" charset="0"/>
+            </a:endParaRPr>
+          </a:p>
+        </p:txBody>
+      </p:sp>
+      <p:pic>
+        <p:nvPicPr>
+          <p:cNvPr id="90" name="圖片 89">
+            <a:extLst>
+              <a:ext uri="{FF2B5EF4-FFF2-40B4-BE49-F238E27FC236}">
+                <a16:creationId xmlns:a16="http://schemas.microsoft.com/office/drawing/2014/main" id="{0421A701-2821-426E-BD71-03CA011A11BB}"/>
+              </a:ext>
+            </a:extLst>
+          </p:cNvPr>
+          <p:cNvPicPr>
+            <a:picLocks noChangeAspect="1"/>
+          </p:cNvPicPr>
+          <p:nvPr/>
+        </p:nvPicPr>
+        <p:blipFill rotWithShape="1">
+          <a:blip r:embed="rId4"/>
+          <a:srcRect l="7872" t="40135" r="7992" b="-2"/>
+          <a:stretch/>
+        </p:blipFill>
+        <p:spPr>
+          <a:xfrm rot="10800000">
+            <a:off x="8076213" y="7258683"/>
+            <a:ext cx="2772340" cy="1198426"/>
+          </a:xfrm>
+          <a:prstGeom prst="rect">
+            <a:avLst/>
+          </a:prstGeom>
+        </p:spPr>
+      </p:pic>
+      <p:pic>
+        <p:nvPicPr>
+          <p:cNvPr id="91" name="圖片 90">
+            <a:extLst>
+              <a:ext uri="{FF2B5EF4-FFF2-40B4-BE49-F238E27FC236}">
+                <a16:creationId xmlns:a16="http://schemas.microsoft.com/office/drawing/2014/main" id="{EAD241BC-B561-4508-B0D4-C92C9CB63859}"/>
+              </a:ext>
+            </a:extLst>
+          </p:cNvPr>
+          <p:cNvPicPr>
+            <a:picLocks noChangeAspect="1"/>
+          </p:cNvPicPr>
+          <p:nvPr/>
+        </p:nvPicPr>
+        <p:blipFill rotWithShape="1">
+          <a:blip r:embed="rId4"/>
+          <a:srcRect l="7663" t="40135" r="7542" b="-2"/>
+          <a:stretch/>
+        </p:blipFill>
+        <p:spPr>
+          <a:xfrm>
+            <a:off x="8065328" y="4397455"/>
+            <a:ext cx="2794085" cy="1198426"/>
+          </a:xfrm>
+          <a:prstGeom prst="rect">
+            <a:avLst/>
+          </a:prstGeom>
+        </p:spPr>
+      </p:pic>
+      <p:sp>
+        <p:nvSpPr>
+          <p:cNvPr id="92" name="橢圓 91">
+            <a:extLst>
+              <a:ext uri="{FF2B5EF4-FFF2-40B4-BE49-F238E27FC236}">
+                <a16:creationId xmlns:a16="http://schemas.microsoft.com/office/drawing/2014/main" id="{6984B83C-8737-43CE-9630-1BCD961D6031}"/>
+              </a:ext>
+            </a:extLst>
+          </p:cNvPr>
+          <p:cNvSpPr/>
+          <p:nvPr/>
+        </p:nvSpPr>
+        <p:spPr>
+          <a:xfrm>
+            <a:off x="9372798" y="7192271"/>
+            <a:ext cx="236607" cy="236607"/>
+          </a:xfrm>
+          <a:prstGeom prst="ellipse">
+            <a:avLst/>
+          </a:prstGeom>
+          <a:solidFill>
+            <a:schemeClr val="bg1"/>
+          </a:solidFill>
+          <a:ln>
+            <a:solidFill>
+              <a:schemeClr val="tx1"/>
+            </a:solidFill>
+          </a:ln>
+        </p:spPr>
+        <p:style>
+          <a:lnRef idx="2">
+            <a:schemeClr val="accent1">
+              <a:shade val="50000"/>
+            </a:schemeClr>
+          </a:lnRef>
+          <a:fillRef idx="1">
+            <a:schemeClr val="accent1"/>
+          </a:fillRef>
+          <a:effectRef idx="0">
+            <a:schemeClr val="accent1"/>
+          </a:effectRef>
+          <a:fontRef idx="minor">
+            <a:schemeClr val="lt1"/>
+          </a:fontRef>
+        </p:style>
+        <p:txBody>
+          <a:bodyPr rtlCol="0" anchor="ctr"/>
+          <a:lstStyle/>
+          <a:p>
+            <a:pPr algn="ctr"/>
+            <a:endParaRPr lang="zh-TW" altLang="en-US" sz="2369" dirty="0"/>
+          </a:p>
+        </p:txBody>
+      </p:sp>
+      <p:sp>
+        <p:nvSpPr>
+          <p:cNvPr id="93" name="橢圓 92">
+            <a:extLst>
+              <a:ext uri="{FF2B5EF4-FFF2-40B4-BE49-F238E27FC236}">
+                <a16:creationId xmlns:a16="http://schemas.microsoft.com/office/drawing/2014/main" id="{CA9F5899-B8CD-4E2B-8B0B-9107C9666056}"/>
+              </a:ext>
+            </a:extLst>
+          </p:cNvPr>
+          <p:cNvSpPr/>
+          <p:nvPr/>
+        </p:nvSpPr>
+        <p:spPr>
+          <a:xfrm>
+            <a:off x="10579309" y="4700278"/>
+            <a:ext cx="236607" cy="236607"/>
+          </a:xfrm>
+          <a:prstGeom prst="ellipse">
+            <a:avLst/>
+          </a:prstGeom>
+          <a:solidFill>
+            <a:schemeClr val="tx1"/>
+          </a:solidFill>
+          <a:ln>
+            <a:solidFill>
+              <a:schemeClr val="tx1"/>
+            </a:solidFill>
+          </a:ln>
+        </p:spPr>
+        <p:style>
+          <a:lnRef idx="2">
+            <a:schemeClr val="accent1">
+              <a:shade val="50000"/>
+            </a:schemeClr>
+          </a:lnRef>
+          <a:fillRef idx="1">
+            <a:schemeClr val="accent1"/>
+          </a:fillRef>
+          <a:effectRef idx="0">
+            <a:schemeClr val="accent1"/>
+          </a:effectRef>
+          <a:fontRef idx="minor">
+            <a:schemeClr val="lt1"/>
+          </a:fontRef>
+        </p:style>
+        <p:txBody>
+          <a:bodyPr rtlCol="0" anchor="ctr"/>
+          <a:lstStyle/>
+          <a:p>
+            <a:pPr algn="ctr"/>
+            <a:endParaRPr lang="zh-TW" altLang="en-US" sz="2369" dirty="0"/>
+          </a:p>
+        </p:txBody>
+      </p:sp>
+      <p:sp>
+        <p:nvSpPr>
+          <p:cNvPr id="94" name="文字方塊 93">
+            <a:extLst>
+              <a:ext uri="{FF2B5EF4-FFF2-40B4-BE49-F238E27FC236}">
+                <a16:creationId xmlns:a16="http://schemas.microsoft.com/office/drawing/2014/main" id="{3CA6F54B-885E-4F40-9868-18F482E0820B}"/>
+              </a:ext>
+            </a:extLst>
+          </p:cNvPr>
+          <p:cNvSpPr txBox="1"/>
+          <p:nvPr/>
+        </p:nvSpPr>
+        <p:spPr>
+          <a:xfrm>
+            <a:off x="7661112" y="3746964"/>
+            <a:ext cx="3575429" cy="821507"/>
+          </a:xfrm>
+          <a:prstGeom prst="rect">
+            <a:avLst/>
+          </a:prstGeom>
+          <a:noFill/>
+        </p:spPr>
+        <p:txBody>
+          <a:bodyPr wrap="square" rtlCol="0">
+            <a:spAutoFit/>
+          </a:bodyPr>
+          <a:lstStyle/>
+          <a:p>
+            <a:pPr algn="ctr"/>
+            <a:r>
+              <a:rPr lang="en-US" altLang="zh-TW" sz="2369" dirty="0">
+                <a:latin typeface="Times New Roman" panose="02020603050405020304" pitchFamily="18" charset="0"/>
+                <a:cs typeface="Times New Roman" panose="02020603050405020304" pitchFamily="18" charset="0"/>
+              </a:rPr>
+              <a:t>Momentum-forbidden</a:t>
+            </a:r>
+          </a:p>
+          <a:p>
+            <a:pPr algn="ctr"/>
+            <a:r>
+              <a:rPr lang="en-US" altLang="zh-TW" sz="2369" dirty="0">
+                <a:latin typeface="Times New Roman" panose="02020603050405020304" pitchFamily="18" charset="0"/>
+                <a:cs typeface="Times New Roman" panose="02020603050405020304" pitchFamily="18" charset="0"/>
+              </a:rPr>
+              <a:t>DX </a:t>
+            </a:r>
+            <a:endParaRPr lang="zh-TW" altLang="en-US" sz="2369" dirty="0">
+              <a:latin typeface="Times New Roman" panose="02020603050405020304" pitchFamily="18" charset="0"/>
+              <a:cs typeface="Times New Roman" panose="02020603050405020304" pitchFamily="18" charset="0"/>
+            </a:endParaRPr>
+          </a:p>
+        </p:txBody>
+      </p:sp>
+      <p:cxnSp>
+        <p:nvCxnSpPr>
+          <p:cNvPr id="95" name="直線單箭頭接點 94">
+            <a:extLst>
+              <a:ext uri="{FF2B5EF4-FFF2-40B4-BE49-F238E27FC236}">
+                <a16:creationId xmlns:a16="http://schemas.microsoft.com/office/drawing/2014/main" id="{ECE0A5B5-C789-432B-9DFD-6E54F54A1696}"/>
+              </a:ext>
+            </a:extLst>
+          </p:cNvPr>
+          <p:cNvCxnSpPr>
+            <a:cxnSpLocks/>
+          </p:cNvCxnSpPr>
+          <p:nvPr/>
+        </p:nvCxnSpPr>
+        <p:spPr>
+          <a:xfrm>
+            <a:off x="11271847" y="8542426"/>
+            <a:ext cx="3082661" cy="0"/>
+          </a:xfrm>
+          <a:prstGeom prst="straightConnector1">
+            <a:avLst/>
+          </a:prstGeom>
+          <a:ln>
+            <a:tailEnd type="triangle" w="lg" len="lg"/>
+          </a:ln>
+        </p:spPr>
+        <p:style>
+          <a:lnRef idx="3">
+            <a:schemeClr val="dk1"/>
+          </a:lnRef>
+          <a:fillRef idx="0">
+            <a:schemeClr val="dk1"/>
+          </a:fillRef>
+          <a:effectRef idx="2">
+            <a:schemeClr val="dk1"/>
+          </a:effectRef>
+          <a:fontRef idx="minor">
+            <a:schemeClr val="tx1"/>
+          </a:fontRef>
+        </p:style>
+      </p:cxnSp>
+      <p:cxnSp>
+        <p:nvCxnSpPr>
+          <p:cNvPr id="96" name="直線單箭頭接點 95">
+            <a:extLst>
+              <a:ext uri="{FF2B5EF4-FFF2-40B4-BE49-F238E27FC236}">
+                <a16:creationId xmlns:a16="http://schemas.microsoft.com/office/drawing/2014/main" id="{C5D48ECA-13DA-44CD-9103-3B555236FA58}"/>
+              </a:ext>
+            </a:extLst>
+          </p:cNvPr>
+          <p:cNvCxnSpPr>
+            <a:cxnSpLocks/>
+          </p:cNvCxnSpPr>
+          <p:nvPr/>
+        </p:nvCxnSpPr>
+        <p:spPr>
+          <a:xfrm>
+            <a:off x="7984984" y="8542426"/>
+            <a:ext cx="3082661" cy="0"/>
+          </a:xfrm>
+          <a:prstGeom prst="straightConnector1">
+            <a:avLst/>
+          </a:prstGeom>
+          <a:ln>
+            <a:tailEnd type="triangle" w="lg" len="lg"/>
+          </a:ln>
+        </p:spPr>
+        <p:style>
+          <a:lnRef idx="3">
+            <a:schemeClr val="dk1"/>
+          </a:lnRef>
+          <a:fillRef idx="0">
+            <a:schemeClr val="dk1"/>
+          </a:fillRef>
+          <a:effectRef idx="2">
+            <a:schemeClr val="dk1"/>
+          </a:effectRef>
+          <a:fontRef idx="minor">
+            <a:schemeClr val="tx1"/>
+          </a:fontRef>
+        </p:style>
+      </p:cxnSp>
+      <p:cxnSp>
+        <p:nvCxnSpPr>
+          <p:cNvPr id="97" name="直線單箭頭接點 96">
+            <a:extLst>
+              <a:ext uri="{FF2B5EF4-FFF2-40B4-BE49-F238E27FC236}">
+                <a16:creationId xmlns:a16="http://schemas.microsoft.com/office/drawing/2014/main" id="{C18A94DF-0C83-4079-9B4B-E77627083CF2}"/>
+              </a:ext>
+            </a:extLst>
+          </p:cNvPr>
+          <p:cNvCxnSpPr>
+            <a:cxnSpLocks/>
+          </p:cNvCxnSpPr>
+          <p:nvPr/>
+        </p:nvCxnSpPr>
+        <p:spPr>
+          <a:xfrm>
+            <a:off x="4569199" y="8542426"/>
+            <a:ext cx="3209467" cy="0"/>
+          </a:xfrm>
+          <a:prstGeom prst="straightConnector1">
+            <a:avLst/>
+          </a:prstGeom>
+          <a:ln>
+            <a:tailEnd type="triangle" w="lg" len="lg"/>
+          </a:ln>
+        </p:spPr>
+        <p:style>
+          <a:lnRef idx="3">
+            <a:schemeClr val="dk1"/>
+          </a:lnRef>
+          <a:fillRef idx="0">
+            <a:schemeClr val="dk1"/>
+          </a:fillRef>
+          <a:effectRef idx="2">
+            <a:schemeClr val="dk1"/>
+          </a:effectRef>
+          <a:fontRef idx="minor">
+            <a:schemeClr val="tx1"/>
+          </a:fontRef>
+        </p:style>
+      </p:cxnSp>
+      <p:sp>
+        <p:nvSpPr>
+          <p:cNvPr id="98" name="箭號: 向上 97">
+            <a:extLst>
+              <a:ext uri="{FF2B5EF4-FFF2-40B4-BE49-F238E27FC236}">
+                <a16:creationId xmlns:a16="http://schemas.microsoft.com/office/drawing/2014/main" id="{C3C73C6E-1335-4550-B604-0F0FE34CA0CA}"/>
+              </a:ext>
+            </a:extLst>
+          </p:cNvPr>
+          <p:cNvSpPr/>
+          <p:nvPr/>
+        </p:nvSpPr>
+        <p:spPr>
+          <a:xfrm>
+            <a:off x="4584665" y="4141184"/>
+            <a:ext cx="236362" cy="545307"/>
+          </a:xfrm>
+          <a:prstGeom prst="upArrow">
+            <a:avLst>
+              <a:gd name="adj1" fmla="val 30192"/>
+              <a:gd name="adj2" fmla="val 76408"/>
+            </a:avLst>
+          </a:prstGeom>
+          <a:solidFill>
+            <a:srgbClr val="FF0000"/>
+          </a:solidFill>
+          <a:ln>
+            <a:noFill/>
+          </a:ln>
+        </p:spPr>
+        <p:style>
+          <a:lnRef idx="2">
+            <a:schemeClr val="accent1">
+              <a:shade val="50000"/>
+            </a:schemeClr>
+          </a:lnRef>
+          <a:fillRef idx="1">
+            <a:schemeClr val="accent1"/>
+          </a:fillRef>
+          <a:effectRef idx="0">
+            <a:schemeClr val="accent1"/>
+          </a:effectRef>
+          <a:fontRef idx="minor">
+            <a:schemeClr val="lt1"/>
+          </a:fontRef>
+        </p:style>
+        <p:txBody>
+          <a:bodyPr rtlCol="0" anchor="ctr"/>
+          <a:lstStyle/>
+          <a:p>
+            <a:pPr algn="ctr"/>
+            <a:endParaRPr lang="zh-TW" altLang="en-US" sz="2369" dirty="0"/>
+          </a:p>
+        </p:txBody>
+      </p:sp>
+      <p:sp>
+        <p:nvSpPr>
+          <p:cNvPr id="99" name="箭號: 向上 98">
+            <a:extLst>
+              <a:ext uri="{FF2B5EF4-FFF2-40B4-BE49-F238E27FC236}">
+                <a16:creationId xmlns:a16="http://schemas.microsoft.com/office/drawing/2014/main" id="{8DDF1AEC-72A5-4C33-943D-D32288923972}"/>
+              </a:ext>
+            </a:extLst>
+          </p:cNvPr>
+          <p:cNvSpPr/>
+          <p:nvPr/>
+        </p:nvSpPr>
+        <p:spPr>
+          <a:xfrm rot="10800000">
+            <a:off x="4584665" y="4865698"/>
+            <a:ext cx="236362" cy="545307"/>
+          </a:xfrm>
+          <a:prstGeom prst="upArrow">
+            <a:avLst>
+              <a:gd name="adj1" fmla="val 30192"/>
+              <a:gd name="adj2" fmla="val 76408"/>
+            </a:avLst>
+          </a:prstGeom>
+          <a:solidFill>
+            <a:srgbClr val="0070C0"/>
+          </a:solidFill>
+          <a:ln>
+            <a:noFill/>
+          </a:ln>
+        </p:spPr>
+        <p:style>
+          <a:lnRef idx="2">
+            <a:schemeClr val="accent1">
+              <a:shade val="50000"/>
+            </a:schemeClr>
+          </a:lnRef>
+          <a:fillRef idx="1">
+            <a:schemeClr val="accent1"/>
+          </a:fillRef>
+          <a:effectRef idx="0">
+            <a:schemeClr val="accent1"/>
+          </a:effectRef>
+          <a:fontRef idx="minor">
+            <a:schemeClr val="lt1"/>
+          </a:fontRef>
+        </p:style>
+        <p:txBody>
+          <a:bodyPr rtlCol="0" anchor="ctr"/>
+          <a:lstStyle/>
+          <a:p>
+            <a:pPr algn="ctr"/>
+            <a:endParaRPr lang="zh-TW" altLang="en-US" sz="2369"/>
+          </a:p>
+        </p:txBody>
+      </p:sp>
+      <p:sp>
+        <p:nvSpPr>
+          <p:cNvPr id="100" name="箭號: 向上 99">
+            <a:extLst>
+              <a:ext uri="{FF2B5EF4-FFF2-40B4-BE49-F238E27FC236}">
+                <a16:creationId xmlns:a16="http://schemas.microsoft.com/office/drawing/2014/main" id="{0A137049-3A75-4B5A-A49E-7C848B9FC137}"/>
+              </a:ext>
+            </a:extLst>
+          </p:cNvPr>
+          <p:cNvSpPr/>
+          <p:nvPr/>
+        </p:nvSpPr>
+        <p:spPr>
+          <a:xfrm>
+            <a:off x="4584665" y="7877926"/>
+            <a:ext cx="236362" cy="545307"/>
+          </a:xfrm>
+          <a:prstGeom prst="upArrow">
+            <a:avLst>
+              <a:gd name="adj1" fmla="val 30192"/>
+              <a:gd name="adj2" fmla="val 76408"/>
+            </a:avLst>
+          </a:prstGeom>
+          <a:solidFill>
+            <a:srgbClr val="FF0000"/>
+          </a:solidFill>
+          <a:ln>
+            <a:noFill/>
+          </a:ln>
+        </p:spPr>
+        <p:style>
+          <a:lnRef idx="2">
+            <a:schemeClr val="accent1">
+              <a:shade val="50000"/>
+            </a:schemeClr>
+          </a:lnRef>
+          <a:fillRef idx="1">
+            <a:schemeClr val="accent1"/>
+          </a:fillRef>
+          <a:effectRef idx="0">
+            <a:schemeClr val="accent1"/>
+          </a:effectRef>
+          <a:fontRef idx="minor">
+            <a:schemeClr val="lt1"/>
+          </a:fontRef>
+        </p:style>
+        <p:txBody>
+          <a:bodyPr rtlCol="0" anchor="ctr"/>
+          <a:lstStyle/>
+          <a:p>
+            <a:pPr algn="ctr"/>
+            <a:endParaRPr lang="zh-TW" altLang="en-US" sz="2369"/>
+          </a:p>
+        </p:txBody>
+      </p:sp>
+      <p:pic>
+        <p:nvPicPr>
+          <p:cNvPr id="101" name="圖片 100">
+            <a:extLst>
+              <a:ext uri="{FF2B5EF4-FFF2-40B4-BE49-F238E27FC236}">
+                <a16:creationId xmlns:a16="http://schemas.microsoft.com/office/drawing/2014/main" id="{7EDE3A9C-AB8E-4CF1-A24F-28F98A793032}"/>
+              </a:ext>
+            </a:extLst>
+          </p:cNvPr>
+          <p:cNvPicPr>
+            <a:picLocks noChangeAspect="1"/>
+          </p:cNvPicPr>
+          <p:nvPr/>
+        </p:nvPicPr>
+        <p:blipFill rotWithShape="1">
+          <a:blip r:embed="rId3"/>
+          <a:srcRect l="7992" t="38920" r="6883"/>
+          <a:stretch/>
+        </p:blipFill>
+        <p:spPr>
+          <a:xfrm>
+            <a:off x="4830496" y="4919626"/>
+            <a:ext cx="2804949" cy="1222725"/>
+          </a:xfrm>
+          <a:prstGeom prst="rect">
+            <a:avLst/>
+          </a:prstGeom>
+        </p:spPr>
+      </p:pic>
+      <p:pic>
+        <p:nvPicPr>
+          <p:cNvPr id="102" name="圖片 101">
+            <a:extLst>
+              <a:ext uri="{FF2B5EF4-FFF2-40B4-BE49-F238E27FC236}">
+                <a16:creationId xmlns:a16="http://schemas.microsoft.com/office/drawing/2014/main" id="{038D179F-5856-4168-A38A-ECABDABA6C33}"/>
+              </a:ext>
+            </a:extLst>
+          </p:cNvPr>
+          <p:cNvPicPr>
+            <a:picLocks noChangeAspect="1"/>
+          </p:cNvPicPr>
+          <p:nvPr/>
+        </p:nvPicPr>
+        <p:blipFill rotWithShape="1">
+          <a:blip r:embed="rId4"/>
+          <a:srcRect l="7872" t="40135" r="7992" b="-2"/>
+          <a:stretch/>
+        </p:blipFill>
+        <p:spPr>
+          <a:xfrm rot="10800000">
+            <a:off x="4846819" y="7258683"/>
+            <a:ext cx="2772340" cy="1198426"/>
+          </a:xfrm>
+          <a:prstGeom prst="rect">
+            <a:avLst/>
+          </a:prstGeom>
+        </p:spPr>
+      </p:pic>
+      <p:pic>
+        <p:nvPicPr>
+          <p:cNvPr id="103" name="圖片 102">
+            <a:extLst>
+              <a:ext uri="{FF2B5EF4-FFF2-40B4-BE49-F238E27FC236}">
+                <a16:creationId xmlns:a16="http://schemas.microsoft.com/office/drawing/2014/main" id="{6A0AC974-F260-437F-B2A3-B63CA8FD4933}"/>
+              </a:ext>
+            </a:extLst>
+          </p:cNvPr>
+          <p:cNvPicPr>
+            <a:picLocks noChangeAspect="1"/>
+          </p:cNvPicPr>
+          <p:nvPr/>
+        </p:nvPicPr>
+        <p:blipFill rotWithShape="1">
+          <a:blip r:embed="rId4"/>
+          <a:srcRect l="7663" t="40135" r="7542" b="-2"/>
+          <a:stretch/>
+        </p:blipFill>
+        <p:spPr>
+          <a:xfrm>
+            <a:off x="4835936" y="4397455"/>
+            <a:ext cx="2794085" cy="1198426"/>
+          </a:xfrm>
+          <a:prstGeom prst="rect">
+            <a:avLst/>
+          </a:prstGeom>
+        </p:spPr>
+      </p:pic>
+      <p:sp>
+        <p:nvSpPr>
+          <p:cNvPr id="104" name="橢圓 103">
+            <a:extLst>
+              <a:ext uri="{FF2B5EF4-FFF2-40B4-BE49-F238E27FC236}">
+                <a16:creationId xmlns:a16="http://schemas.microsoft.com/office/drawing/2014/main" id="{541F2F86-18E7-4937-81C1-E0B3422026F3}"/>
+              </a:ext>
+            </a:extLst>
+          </p:cNvPr>
+          <p:cNvSpPr/>
+          <p:nvPr/>
+        </p:nvSpPr>
+        <p:spPr>
+          <a:xfrm>
+            <a:off x="6671434" y="5278014"/>
+            <a:ext cx="236607" cy="236607"/>
+          </a:xfrm>
+          <a:prstGeom prst="ellipse">
+            <a:avLst/>
+          </a:prstGeom>
+          <a:solidFill>
+            <a:schemeClr val="tx1"/>
+          </a:solidFill>
+          <a:ln>
+            <a:solidFill>
+              <a:schemeClr val="tx1"/>
+            </a:solidFill>
+          </a:ln>
+        </p:spPr>
+        <p:style>
+          <a:lnRef idx="2">
+            <a:schemeClr val="accent1">
+              <a:shade val="50000"/>
+            </a:schemeClr>
+          </a:lnRef>
+          <a:fillRef idx="1">
+            <a:schemeClr val="accent1"/>
+          </a:fillRef>
+          <a:effectRef idx="0">
+            <a:schemeClr val="accent1"/>
+          </a:effectRef>
+          <a:fontRef idx="minor">
+            <a:schemeClr val="lt1"/>
+          </a:fontRef>
+        </p:style>
+        <p:txBody>
+          <a:bodyPr rtlCol="0" anchor="ctr"/>
+          <a:lstStyle/>
+          <a:p>
+            <a:pPr algn="ctr"/>
+            <a:endParaRPr lang="zh-TW" altLang="en-US" sz="2369" dirty="0"/>
+          </a:p>
+        </p:txBody>
+      </p:sp>
+      <p:cxnSp>
+        <p:nvCxnSpPr>
+          <p:cNvPr id="105" name="直線單箭頭接點 104">
+            <a:extLst>
+              <a:ext uri="{FF2B5EF4-FFF2-40B4-BE49-F238E27FC236}">
+                <a16:creationId xmlns:a16="http://schemas.microsoft.com/office/drawing/2014/main" id="{10930744-E8C8-4835-B88D-2F91CDA557EE}"/>
+              </a:ext>
+            </a:extLst>
+          </p:cNvPr>
+          <p:cNvCxnSpPr>
+            <a:cxnSpLocks/>
+          </p:cNvCxnSpPr>
+          <p:nvPr/>
+        </p:nvCxnSpPr>
+        <p:spPr>
+          <a:xfrm flipV="1">
+            <a:off x="6260775" y="5491553"/>
+            <a:ext cx="507980" cy="1822552"/>
+          </a:xfrm>
+          <a:prstGeom prst="straightConnector1">
+            <a:avLst/>
+          </a:prstGeom>
+          <a:ln w="57150">
+            <a:solidFill>
+              <a:srgbClr val="E1B037"/>
+            </a:solidFill>
+            <a:headEnd w="sm" len="sm"/>
+            <a:tailEnd type="triangle" w="med" len="lg"/>
+          </a:ln>
+        </p:spPr>
+        <p:style>
+          <a:lnRef idx="3">
+            <a:schemeClr val="accent4"/>
+          </a:lnRef>
+          <a:fillRef idx="0">
+            <a:schemeClr val="accent4"/>
+          </a:fillRef>
+          <a:effectRef idx="2">
+            <a:schemeClr val="accent4"/>
+          </a:effectRef>
+          <a:fontRef idx="minor">
+            <a:schemeClr val="tx1"/>
+          </a:fontRef>
+        </p:style>
+      </p:cxnSp>
+      <p:sp>
+        <p:nvSpPr>
+          <p:cNvPr id="106" name="橢圓 105">
+            <a:extLst>
+              <a:ext uri="{FF2B5EF4-FFF2-40B4-BE49-F238E27FC236}">
+                <a16:creationId xmlns:a16="http://schemas.microsoft.com/office/drawing/2014/main" id="{0D9F8D50-074E-4251-97A7-6213E27A8450}"/>
+              </a:ext>
+            </a:extLst>
+          </p:cNvPr>
+          <p:cNvSpPr/>
+          <p:nvPr/>
+        </p:nvSpPr>
+        <p:spPr>
+          <a:xfrm>
+            <a:off x="6143404" y="7192271"/>
+            <a:ext cx="236607" cy="236607"/>
+          </a:xfrm>
+          <a:prstGeom prst="ellipse">
+            <a:avLst/>
+          </a:prstGeom>
+          <a:solidFill>
+            <a:schemeClr val="bg1"/>
+          </a:solidFill>
+          <a:ln>
+            <a:solidFill>
+              <a:schemeClr val="tx1"/>
+            </a:solidFill>
+          </a:ln>
+        </p:spPr>
+        <p:style>
+          <a:lnRef idx="2">
+            <a:schemeClr val="accent1">
+              <a:shade val="50000"/>
+            </a:schemeClr>
+          </a:lnRef>
+          <a:fillRef idx="1">
+            <a:schemeClr val="accent1"/>
+          </a:fillRef>
+          <a:effectRef idx="0">
+            <a:schemeClr val="accent1"/>
+          </a:effectRef>
+          <a:fontRef idx="minor">
+            <a:schemeClr val="lt1"/>
+          </a:fontRef>
+        </p:style>
+        <p:txBody>
+          <a:bodyPr rtlCol="0" anchor="ctr"/>
+          <a:lstStyle/>
+          <a:p>
+            <a:pPr algn="ctr"/>
+            <a:endParaRPr lang="zh-TW" altLang="en-US" sz="2369" dirty="0"/>
+          </a:p>
+        </p:txBody>
+      </p:sp>
+      <p:sp>
+        <p:nvSpPr>
+          <p:cNvPr id="107" name="文字方塊 106">
+            <a:extLst>
+              <a:ext uri="{FF2B5EF4-FFF2-40B4-BE49-F238E27FC236}">
+                <a16:creationId xmlns:a16="http://schemas.microsoft.com/office/drawing/2014/main" id="{41A50F2B-5F76-4D16-AB5E-5C2F244D428D}"/>
+              </a:ext>
+            </a:extLst>
+          </p:cNvPr>
+          <p:cNvSpPr txBox="1"/>
+          <p:nvPr/>
+        </p:nvSpPr>
+        <p:spPr>
+          <a:xfrm>
+            <a:off x="4208181" y="6328492"/>
+            <a:ext cx="1834236" cy="456920"/>
+          </a:xfrm>
+          <a:prstGeom prst="rect">
+            <a:avLst/>
+          </a:prstGeom>
+          <a:noFill/>
+        </p:spPr>
+        <p:txBody>
+          <a:bodyPr wrap="square" rtlCol="0">
+            <a:spAutoFit/>
+          </a:bodyPr>
+          <a:lstStyle/>
+          <a:p>
+            <a:pPr algn="ctr"/>
+            <a:r>
+              <a:rPr lang="en-US" altLang="zh-TW" sz="2369" dirty="0">
+                <a:latin typeface="Times New Roman" panose="02020603050405020304" pitchFamily="18" charset="0"/>
+                <a:cs typeface="Times New Roman" panose="02020603050405020304" pitchFamily="18" charset="0"/>
+              </a:rPr>
+              <a:t>Light-cone</a:t>
+            </a:r>
+            <a:endParaRPr lang="zh-TW" altLang="en-US" sz="2369" dirty="0">
+              <a:latin typeface="Times New Roman" panose="02020603050405020304" pitchFamily="18" charset="0"/>
+              <a:cs typeface="Times New Roman" panose="02020603050405020304" pitchFamily="18" charset="0"/>
+            </a:endParaRPr>
+          </a:p>
+        </p:txBody>
+      </p:sp>
+      <mc:AlternateContent xmlns:mc="http://schemas.openxmlformats.org/markup-compatibility/2006">
+        <mc:Choice xmlns:a14="http://schemas.microsoft.com/office/drawing/2010/main" Requires="a14">
+          <p:sp>
+            <p:nvSpPr>
+              <p:cNvPr id="108" name="文字方塊 107">
+                <a:extLst>
+                  <a:ext uri="{FF2B5EF4-FFF2-40B4-BE49-F238E27FC236}">
+                    <a16:creationId xmlns:a16="http://schemas.microsoft.com/office/drawing/2014/main" id="{E3CD9686-0ABF-40C6-98AA-3E06A441FE22}"/>
+                  </a:ext>
+                </a:extLst>
+              </p:cNvPr>
+              <p:cNvSpPr txBox="1"/>
+              <p:nvPr/>
+            </p:nvSpPr>
+            <p:spPr>
+              <a:xfrm>
+                <a:off x="4202943" y="8314071"/>
+                <a:ext cx="482563" cy="456920"/>
+              </a:xfrm>
+              <a:prstGeom prst="rect">
+                <a:avLst/>
+              </a:prstGeom>
+              <a:noFill/>
+            </p:spPr>
+            <p:txBody>
+              <a:bodyPr wrap="square" rtlCol="0">
+                <a:spAutoFit/>
+              </a:bodyPr>
+              <a:lstStyle/>
+              <a:p>
+                <a:pPr algn="ctr"/>
+                <a14:m>
+                  <m:oMathPara xmlns:m="http://schemas.openxmlformats.org/officeDocument/2006/math">
+                    <m:oMathParaPr>
+                      <m:jc m:val="centerGroup"/>
+                    </m:oMathParaPr>
+                    <m:oMath xmlns:m="http://schemas.openxmlformats.org/officeDocument/2006/math">
+                      <m:r>
+                        <a:rPr lang="en-US" altLang="zh-TW" sz="2369" b="1" i="1" dirty="0">
+                          <a:latin typeface="Cambria Math" panose="02040503050406030204" pitchFamily="18" charset="0"/>
+                          <a:cs typeface="Times New Roman" panose="02020603050405020304" pitchFamily="18" charset="0"/>
+                        </a:rPr>
+                        <m:t>𝒌</m:t>
+                      </m:r>
+                    </m:oMath>
+                  </m:oMathPara>
+                </a14:m>
+                <a:endParaRPr lang="zh-TW" altLang="en-US" sz="2369" b="1" dirty="0">
+                  <a:latin typeface="Times New Roman" panose="02020603050405020304" pitchFamily="18" charset="0"/>
+                  <a:cs typeface="Times New Roman" panose="02020603050405020304" pitchFamily="18" charset="0"/>
+                </a:endParaRPr>
+              </a:p>
+            </p:txBody>
+          </p:sp>
+        </mc:Choice>
+        <mc:Fallback>
+          <p:sp>
+            <p:nvSpPr>
+              <p:cNvPr id="108" name="文字方塊 107">
+                <a:extLst>
+                  <a:ext uri="{FF2B5EF4-FFF2-40B4-BE49-F238E27FC236}">
+                    <a16:creationId xmlns:a16="http://schemas.microsoft.com/office/drawing/2014/main" id="{E3CD9686-0ABF-40C6-98AA-3E06A441FE22}"/>
+                  </a:ext>
+                </a:extLst>
+              </p:cNvPr>
+              <p:cNvSpPr txBox="1">
+                <a:spLocks noRot="1" noChangeAspect="1" noMove="1" noResize="1" noEditPoints="1" noAdjustHandles="1" noChangeArrowheads="1" noChangeShapeType="1" noTextEdit="1"/>
+              </p:cNvSpPr>
+              <p:nvPr/>
+            </p:nvSpPr>
+            <p:spPr>
+              <a:xfrm>
+                <a:off x="4202943" y="8314071"/>
+                <a:ext cx="482563" cy="456920"/>
+              </a:xfrm>
+              <a:prstGeom prst="rect">
+                <a:avLst/>
+              </a:prstGeom>
+              <a:blipFill>
+                <a:blip r:embed="rId5"/>
+                <a:stretch>
+                  <a:fillRect/>
+                </a:stretch>
+              </a:blipFill>
+            </p:spPr>
+            <p:txBody>
+              <a:bodyPr/>
+              <a:lstStyle/>
+              <a:p>
+                <a:r>
+                  <a:rPr lang="zh-TW" altLang="en-US">
+                    <a:noFill/>
+                  </a:rPr>
+                  <a:t> </a:t>
+                </a:r>
+              </a:p>
+            </p:txBody>
+          </p:sp>
+        </mc:Fallback>
+      </mc:AlternateContent>
+    </p:spTree>
+    <p:extLst>
+      <p:ext uri="{BB962C8B-B14F-4D97-AF65-F5344CB8AC3E}">
+        <p14:creationId xmlns:p14="http://schemas.microsoft.com/office/powerpoint/2010/main" val="4278092721"/>
+      </p:ext>
+    </p:extLst>
+  </p:cSld>
+  <p:clrMapOvr>
+    <a:masterClrMapping/>
+  </p:clrMapOvr>
+</p:sld>
+</file>
+
+<file path=ppt/slides/slide4.xml><?xml version="1.0" encoding="utf-8"?>
+<p:sld xmlns:a="http://schemas.openxmlformats.org/drawingml/2006/main" xmlns:r="http://schemas.openxmlformats.org/officeDocument/2006/relationships" xmlns:p="http://schemas.openxmlformats.org/presentationml/2006/main">
+  <p:cSld>
+    <p:spTree>
+      <p:nvGrpSpPr>
+        <p:cNvPr id="1" name=""/>
+        <p:cNvGrpSpPr/>
+        <p:nvPr/>
+      </p:nvGrpSpPr>
+      <p:grpSpPr>
+        <a:xfrm>
+          <a:off x="0" y="0"/>
+          <a:ext cx="0" cy="0"/>
+          <a:chOff x="0" y="0"/>
+          <a:chExt cx="0" cy="0"/>
+        </a:xfrm>
+      </p:grpSpPr>
+      <p:grpSp>
+        <p:nvGrpSpPr>
+          <p:cNvPr id="4" name="群組 3">
+            <a:extLst>
+              <a:ext uri="{FF2B5EF4-FFF2-40B4-BE49-F238E27FC236}">
+                <a16:creationId xmlns:a16="http://schemas.microsoft.com/office/drawing/2014/main" id="{6051CA0F-F3E3-4612-9D81-94BAE86CB835}"/>
+              </a:ext>
+            </a:extLst>
+          </p:cNvPr>
+          <p:cNvGrpSpPr/>
+          <p:nvPr/>
+        </p:nvGrpSpPr>
+        <p:grpSpPr>
+          <a:xfrm>
+            <a:off x="-47949" y="-43981"/>
+            <a:ext cx="14496110" cy="3755087"/>
+            <a:chOff x="246707" y="57509"/>
+            <a:chExt cx="13409421" cy="3473589"/>
+          </a:xfrm>
+        </p:grpSpPr>
+        <p:sp>
+          <p:nvSpPr>
+            <p:cNvPr id="122" name="矩形 121">
+              <a:extLst>
+                <a:ext uri="{FF2B5EF4-FFF2-40B4-BE49-F238E27FC236}">
+                  <a16:creationId xmlns:a16="http://schemas.microsoft.com/office/drawing/2014/main" id="{3AD9E2E4-BE1A-40F0-912D-43E87B0D9634}"/>
+                </a:ext>
+              </a:extLst>
+            </p:cNvPr>
+            <p:cNvSpPr/>
+            <p:nvPr/>
+          </p:nvSpPr>
+          <p:spPr>
+            <a:xfrm>
+              <a:off x="291061" y="69351"/>
+              <a:ext cx="13301113" cy="3461747"/>
+            </a:xfrm>
+            <a:prstGeom prst="rect">
+              <a:avLst/>
+            </a:prstGeom>
+            <a:solidFill>
+              <a:schemeClr val="bg1"/>
+            </a:solidFill>
+            <a:ln>
+              <a:noFill/>
+            </a:ln>
+          </p:spPr>
+          <p:style>
+            <a:lnRef idx="2">
+              <a:schemeClr val="accent1">
+                <a:shade val="50000"/>
+              </a:schemeClr>
+            </a:lnRef>
+            <a:fillRef idx="1">
+              <a:schemeClr val="accent1"/>
+            </a:fillRef>
+            <a:effectRef idx="0">
+              <a:schemeClr val="accent1"/>
+            </a:effectRef>
+            <a:fontRef idx="minor">
+              <a:schemeClr val="lt1"/>
+            </a:fontRef>
+          </p:style>
+          <p:txBody>
+            <a:bodyPr rot="0" spcFirstLastPara="0" vertOverflow="overflow" horzOverflow="overflow" vert="horz" wrap="square" lIns="98850" tIns="49425" rIns="98850" bIns="49425" numCol="1" spcCol="0" rtlCol="0" fromWordArt="0" anchor="ctr" anchorCtr="0" forceAA="0" compatLnSpc="1">
+              <a:prstTxWarp prst="textNoShape">
+                <a:avLst/>
+              </a:prstTxWarp>
+              <a:noAutofit/>
+            </a:bodyPr>
+            <a:lstStyle/>
+            <a:p>
+              <a:pPr algn="ctr"/>
+              <a:endParaRPr lang="zh-TW" altLang="en-US" sz="1945" dirty="0"/>
+            </a:p>
+          </p:txBody>
+        </p:sp>
+        <p:grpSp>
+          <p:nvGrpSpPr>
+            <p:cNvPr id="7" name="群組 6">
+              <a:extLst>
+                <a:ext uri="{FF2B5EF4-FFF2-40B4-BE49-F238E27FC236}">
+                  <a16:creationId xmlns:a16="http://schemas.microsoft.com/office/drawing/2014/main" id="{21E48CAA-B7E4-48A7-893D-0B819B444661}"/>
+                </a:ext>
+              </a:extLst>
+            </p:cNvPr>
+            <p:cNvGrpSpPr/>
+            <p:nvPr/>
+          </p:nvGrpSpPr>
+          <p:grpSpPr>
+            <a:xfrm>
+              <a:off x="419229" y="525279"/>
+              <a:ext cx="6623348" cy="2588128"/>
+              <a:chOff x="969907" y="1589412"/>
+              <a:chExt cx="5802804" cy="2351821"/>
+            </a:xfrm>
+          </p:grpSpPr>
+          <p:pic>
+            <p:nvPicPr>
+              <p:cNvPr id="8" name="圖片 7">
+                <a:extLst>
+                  <a:ext uri="{FF2B5EF4-FFF2-40B4-BE49-F238E27FC236}">
+                    <a16:creationId xmlns:a16="http://schemas.microsoft.com/office/drawing/2014/main" id="{5BAB739D-EF50-4AFB-9988-CC198712CD3B}"/>
+                  </a:ext>
+                </a:extLst>
+              </p:cNvPr>
+              <p:cNvPicPr>
+                <a:picLocks noChangeAspect="1"/>
+              </p:cNvPicPr>
+              <p:nvPr/>
+            </p:nvPicPr>
+            <p:blipFill rotWithShape="1">
+              <a:blip r:embed="rId2">
+                <a:extLst>
+                  <a:ext uri="{28A0092B-C50C-407E-A947-70E740481C1C}">
+                    <a14:useLocalDpi xmlns:a14="http://schemas.microsoft.com/office/drawing/2010/main" val="0"/>
+                  </a:ext>
+                </a:extLst>
+              </a:blip>
+              <a:srcRect l="8223" b="51017"/>
+              <a:stretch/>
+            </p:blipFill>
+            <p:spPr>
+              <a:xfrm>
+                <a:off x="1197695" y="1589412"/>
+                <a:ext cx="5575016" cy="2351821"/>
+              </a:xfrm>
+              <a:prstGeom prst="rect">
+                <a:avLst/>
+              </a:prstGeom>
+            </p:spPr>
+          </p:pic>
+          <mc:AlternateContent xmlns:mc="http://schemas.openxmlformats.org/markup-compatibility/2006">
+            <mc:Choice xmlns:a14="http://schemas.microsoft.com/office/drawing/2010/main" Requires="a14">
+              <p:sp>
+                <p:nvSpPr>
+                  <p:cNvPr id="10" name="文字方塊 9">
+                    <a:extLst>
+                      <a:ext uri="{FF2B5EF4-FFF2-40B4-BE49-F238E27FC236}">
+                        <a16:creationId xmlns:a16="http://schemas.microsoft.com/office/drawing/2014/main" id="{7D6B8A5F-28B9-4F81-AFEA-3C220B3BE1F6}"/>
+                      </a:ext>
+                    </a:extLst>
+                  </p:cNvPr>
+                  <p:cNvSpPr txBox="1"/>
+                  <p:nvPr/>
+                </p:nvSpPr>
+                <p:spPr>
+                  <a:xfrm rot="16200000">
+                    <a:off x="350793" y="2606620"/>
+                    <a:ext cx="1555631" cy="317404"/>
+                  </a:xfrm>
+                  <a:prstGeom prst="rect">
+                    <a:avLst/>
+                  </a:prstGeom>
+                  <a:noFill/>
+                </p:spPr>
+                <p:txBody>
+                  <a:bodyPr wrap="square" rtlCol="0">
+                    <a:spAutoFit/>
+                  </a:bodyPr>
+                  <a:lstStyle/>
+                  <a:p>
+                    <a:pPr algn="ctr"/>
+                    <a:r>
+                      <a:rPr lang="en-US" altLang="zh-TW" sz="1945" dirty="0">
+                        <a:latin typeface="Times New Roman" panose="02020603050405020304" pitchFamily="18" charset="0"/>
+                        <a:cs typeface="Times New Roman" panose="02020603050405020304" pitchFamily="18" charset="0"/>
+                      </a:rPr>
+                      <a:t>Energy (</a:t>
+                    </a:r>
+                    <a14:m>
+                      <m:oMath xmlns:m="http://schemas.openxmlformats.org/officeDocument/2006/math">
+                        <m:r>
+                          <m:rPr>
+                            <m:sty m:val="p"/>
+                          </m:rPr>
+                          <a:rPr lang="en-US" altLang="zh-TW" sz="1945" dirty="0">
+                            <a:latin typeface="Cambria Math" panose="02040503050406030204" pitchFamily="18" charset="0"/>
+                          </a:rPr>
+                          <m:t>eV</m:t>
+                        </m:r>
+                      </m:oMath>
+                    </a14:m>
+                    <a:r>
+                      <a:rPr lang="en-US" altLang="zh-TW" sz="1945" dirty="0">
+                        <a:latin typeface="Times New Roman" panose="02020603050405020304" pitchFamily="18" charset="0"/>
+                        <a:cs typeface="Times New Roman" panose="02020603050405020304" pitchFamily="18" charset="0"/>
+                      </a:rPr>
+                      <a:t>) </a:t>
+                    </a:r>
+                    <a:endParaRPr lang="zh-TW" altLang="en-US" sz="1945" dirty="0">
+                      <a:latin typeface="Times New Roman" panose="02020603050405020304" pitchFamily="18" charset="0"/>
+                      <a:cs typeface="Times New Roman" panose="02020603050405020304" pitchFamily="18" charset="0"/>
+                    </a:endParaRPr>
+                  </a:p>
+                </p:txBody>
+              </p:sp>
+            </mc:Choice>
+            <mc:Fallback>
+              <p:sp>
+                <p:nvSpPr>
+                  <p:cNvPr id="10" name="文字方塊 9">
+                    <a:extLst>
+                      <a:ext uri="{FF2B5EF4-FFF2-40B4-BE49-F238E27FC236}">
+                        <a16:creationId xmlns:a16="http://schemas.microsoft.com/office/drawing/2014/main" id="{7D6B8A5F-28B9-4F81-AFEA-3C220B3BE1F6}"/>
+                      </a:ext>
+                    </a:extLst>
+                  </p:cNvPr>
+                  <p:cNvSpPr txBox="1">
+                    <a:spLocks noRot="1" noChangeAspect="1" noMove="1" noResize="1" noEditPoints="1" noAdjustHandles="1" noChangeArrowheads="1" noChangeShapeType="1" noTextEdit="1"/>
+                  </p:cNvSpPr>
+                  <p:nvPr/>
+                </p:nvSpPr>
+                <p:spPr>
+                  <a:xfrm rot="16200000">
+                    <a:off x="350793" y="2606620"/>
+                    <a:ext cx="1555631" cy="317404"/>
+                  </a:xfrm>
+                  <a:prstGeom prst="rect">
+                    <a:avLst/>
+                  </a:prstGeom>
+                  <a:blipFill>
+                    <a:blip r:embed="rId3"/>
+                    <a:stretch>
+                      <a:fillRect l="-9375" r="-26563"/>
+                    </a:stretch>
+                  </a:blipFill>
+                </p:spPr>
+                <p:txBody>
+                  <a:bodyPr/>
+                  <a:lstStyle/>
+                  <a:p>
+                    <a:r>
+                      <a:rPr lang="zh-TW" altLang="en-US">
+                        <a:noFill/>
+                      </a:rPr>
+                      <a:t> </a:t>
+                    </a:r>
+                  </a:p>
+                </p:txBody>
+              </p:sp>
+            </mc:Fallback>
+          </mc:AlternateContent>
+        </p:grpSp>
+        <p:sp>
+          <p:nvSpPr>
+            <p:cNvPr id="2" name="文字方塊 1">
+              <a:extLst>
+                <a:ext uri="{FF2B5EF4-FFF2-40B4-BE49-F238E27FC236}">
+                  <a16:creationId xmlns:a16="http://schemas.microsoft.com/office/drawing/2014/main" id="{3A7E42C7-BC70-4BD7-AAA4-563593CF6A64}"/>
+                </a:ext>
+              </a:extLst>
+            </p:cNvPr>
+            <p:cNvSpPr txBox="1"/>
+            <p:nvPr/>
+          </p:nvSpPr>
+          <p:spPr>
+            <a:xfrm>
+              <a:off x="246707" y="57509"/>
+              <a:ext cx="466725" cy="362287"/>
+            </a:xfrm>
+            <a:prstGeom prst="rect">
+              <a:avLst/>
+            </a:prstGeom>
+            <a:noFill/>
+          </p:spPr>
+          <p:txBody>
+            <a:bodyPr wrap="square" rtlCol="0">
+              <a:spAutoFit/>
+            </a:bodyPr>
+            <a:lstStyle/>
+            <a:p>
+              <a:r>
+                <a:rPr lang="en-US" altLang="zh-TW" sz="1945" dirty="0">
+                  <a:latin typeface="Times New Roman" panose="02020603050405020304" pitchFamily="18" charset="0"/>
+                  <a:cs typeface="Times New Roman" panose="02020603050405020304" pitchFamily="18" charset="0"/>
+                </a:rPr>
+                <a:t>(a)</a:t>
+              </a:r>
+              <a:endParaRPr lang="zh-TW" altLang="en-US" sz="1945" dirty="0">
+                <a:latin typeface="Times New Roman" panose="02020603050405020304" pitchFamily="18" charset="0"/>
+                <a:cs typeface="Times New Roman" panose="02020603050405020304" pitchFamily="18" charset="0"/>
+              </a:endParaRPr>
+            </a:p>
+          </p:txBody>
+        </p:sp>
+        <p:sp>
+          <p:nvSpPr>
+            <p:cNvPr id="9" name="文字方塊 8">
+              <a:extLst>
+                <a:ext uri="{FF2B5EF4-FFF2-40B4-BE49-F238E27FC236}">
+                  <a16:creationId xmlns:a16="http://schemas.microsoft.com/office/drawing/2014/main" id="{BCA5F6C8-E1DF-47E3-8827-61588B9D1162}"/>
+                </a:ext>
+              </a:extLst>
+            </p:cNvPr>
+            <p:cNvSpPr txBox="1"/>
+            <p:nvPr/>
+          </p:nvSpPr>
+          <p:spPr>
+            <a:xfrm>
+              <a:off x="6909647" y="57509"/>
+              <a:ext cx="466725" cy="362287"/>
+            </a:xfrm>
+            <a:prstGeom prst="rect">
+              <a:avLst/>
+            </a:prstGeom>
+            <a:noFill/>
+          </p:spPr>
+          <p:txBody>
+            <a:bodyPr wrap="square" rtlCol="0">
+              <a:spAutoFit/>
+            </a:bodyPr>
+            <a:lstStyle/>
+            <a:p>
+              <a:r>
+                <a:rPr lang="en-US" altLang="zh-TW" sz="1945" dirty="0">
+                  <a:latin typeface="Times New Roman" panose="02020603050405020304" pitchFamily="18" charset="0"/>
+                  <a:cs typeface="Times New Roman" panose="02020603050405020304" pitchFamily="18" charset="0"/>
+                </a:rPr>
+                <a:t>(b)</a:t>
+              </a:r>
+              <a:endParaRPr lang="zh-TW" altLang="en-US" sz="1945" dirty="0">
+                <a:latin typeface="Times New Roman" panose="02020603050405020304" pitchFamily="18" charset="0"/>
+                <a:cs typeface="Times New Roman" panose="02020603050405020304" pitchFamily="18" charset="0"/>
+              </a:endParaRPr>
+            </a:p>
+          </p:txBody>
+        </p:sp>
+        <p:pic>
+          <p:nvPicPr>
+            <p:cNvPr id="3" name="圖片 2">
+              <a:extLst>
+                <a:ext uri="{FF2B5EF4-FFF2-40B4-BE49-F238E27FC236}">
+                  <a16:creationId xmlns:a16="http://schemas.microsoft.com/office/drawing/2014/main" id="{36FBA019-653B-49DF-B3D9-2522E9B1A400}"/>
+                </a:ext>
+              </a:extLst>
+            </p:cNvPr>
+            <p:cNvPicPr>
+              <a:picLocks noChangeAspect="1"/>
+            </p:cNvPicPr>
+            <p:nvPr/>
+          </p:nvPicPr>
+          <p:blipFill>
+            <a:blip r:embed="rId4"/>
+            <a:stretch>
+              <a:fillRect/>
+            </a:stretch>
+          </p:blipFill>
+          <p:spPr>
+            <a:xfrm>
+              <a:off x="7226299" y="235540"/>
+              <a:ext cx="6429829" cy="3167606"/>
+            </a:xfrm>
+            <a:prstGeom prst="rect">
+              <a:avLst/>
+            </a:prstGeom>
+          </p:spPr>
+        </p:pic>
+      </p:grpSp>
+    </p:spTree>
+    <p:extLst>
+      <p:ext uri="{BB962C8B-B14F-4D97-AF65-F5344CB8AC3E}">
+        <p14:creationId xmlns:p14="http://schemas.microsoft.com/office/powerpoint/2010/main" val="2609805055"/>
       </p:ext>
     </p:extLst>
   </p:cSld>

--- a/Final/Figures/SOI_structure.pptx
+++ b/Final/Figures/SOI_structure.pptx
@@ -2,7 +2,7 @@
 <file path=ppt/presentation.xml><?xml version="1.0" encoding="utf-8"?>
 <p:presentation xmlns:a="http://schemas.openxmlformats.org/drawingml/2006/main" xmlns:r="http://schemas.openxmlformats.org/officeDocument/2006/relationships" xmlns:p="http://schemas.openxmlformats.org/presentationml/2006/main" saveSubsetFonts="1">
   <p:sldMasterIdLst>
-    <p:sldMasterId id="2147483804" r:id="rId1"/>
+    <p:sldMasterId id="2147483840" r:id="rId1"/>
   </p:sldMasterIdLst>
   <p:sldIdLst>
     <p:sldId id="256" r:id="rId2"/>
@@ -10,7 +10,7 @@
     <p:sldId id="258" r:id="rId4"/>
     <p:sldId id="259" r:id="rId5"/>
   </p:sldIdLst>
-  <p:sldSz cx="14400213" cy="3600450"/>
+  <p:sldSz cx="9906000" cy="3060700"/>
   <p:notesSz cx="6858000" cy="9144000"/>
   <p:defaultTextStyle>
     <a:defPPr>
@@ -144,15 +144,15 @@
         </p:nvSpPr>
         <p:spPr>
           <a:xfrm>
-            <a:off x="1800027" y="589241"/>
-            <a:ext cx="10800160" cy="1253490"/>
+            <a:off x="1238250" y="500906"/>
+            <a:ext cx="7429500" cy="1065577"/>
           </a:xfrm>
         </p:spPr>
         <p:txBody>
           <a:bodyPr anchor="b"/>
           <a:lstStyle>
             <a:lvl1pPr algn="ctr">
-              <a:defRPr sz="3150"/>
+              <a:defRPr sz="2678"/>
             </a:lvl1pPr>
           </a:lstStyle>
           <a:p>
@@ -176,8 +176,8 @@
         </p:nvSpPr>
         <p:spPr>
           <a:xfrm>
-            <a:off x="1800027" y="1891070"/>
-            <a:ext cx="10800160" cy="869275"/>
+            <a:off x="1238250" y="1607576"/>
+            <a:ext cx="7429500" cy="738960"/>
           </a:xfrm>
         </p:spPr>
         <p:txBody>
@@ -185,39 +185,39 @@
           <a:lstStyle>
             <a:lvl1pPr marL="0" indent="0" algn="ctr">
               <a:buNone/>
-              <a:defRPr sz="1260"/>
+              <a:defRPr sz="1071"/>
             </a:lvl1pPr>
-            <a:lvl2pPr marL="240030" indent="0" algn="ctr">
+            <a:lvl2pPr marL="204048" indent="0" algn="ctr">
               <a:buNone/>
-              <a:defRPr sz="1050"/>
+              <a:defRPr sz="893"/>
             </a:lvl2pPr>
-            <a:lvl3pPr marL="480060" indent="0" algn="ctr">
+            <a:lvl3pPr marL="408097" indent="0" algn="ctr">
               <a:buNone/>
-              <a:defRPr sz="945"/>
+              <a:defRPr sz="803"/>
             </a:lvl3pPr>
-            <a:lvl4pPr marL="720090" indent="0" algn="ctr">
+            <a:lvl4pPr marL="612145" indent="0" algn="ctr">
               <a:buNone/>
-              <a:defRPr sz="840"/>
+              <a:defRPr sz="714"/>
             </a:lvl4pPr>
-            <a:lvl5pPr marL="960120" indent="0" algn="ctr">
+            <a:lvl5pPr marL="816193" indent="0" algn="ctr">
               <a:buNone/>
-              <a:defRPr sz="840"/>
+              <a:defRPr sz="714"/>
             </a:lvl5pPr>
-            <a:lvl6pPr marL="1200150" indent="0" algn="ctr">
+            <a:lvl6pPr marL="1020242" indent="0" algn="ctr">
               <a:buNone/>
-              <a:defRPr sz="840"/>
+              <a:defRPr sz="714"/>
             </a:lvl6pPr>
-            <a:lvl7pPr marL="1440180" indent="0" algn="ctr">
+            <a:lvl7pPr marL="1224290" indent="0" algn="ctr">
               <a:buNone/>
-              <a:defRPr sz="840"/>
+              <a:defRPr sz="714"/>
             </a:lvl7pPr>
-            <a:lvl8pPr marL="1680210" indent="0" algn="ctr">
+            <a:lvl8pPr marL="1428339" indent="0" algn="ctr">
               <a:buNone/>
-              <a:defRPr sz="840"/>
+              <a:defRPr sz="714"/>
             </a:lvl8pPr>
-            <a:lvl9pPr marL="1920240" indent="0" algn="ctr">
+            <a:lvl9pPr marL="1632387" indent="0" algn="ctr">
               <a:buNone/>
-              <a:defRPr sz="840"/>
+              <a:defRPr sz="714"/>
             </a:lvl9pPr>
           </a:lstStyle>
           <a:p>
@@ -246,7 +246,7 @@
           <a:p>
             <a:fld id="{C9965009-D4C9-4BD1-8D98-F9C892462EAE}" type="datetimeFigureOut">
               <a:rPr lang="zh-TW" altLang="en-US" smtClean="0"/>
-              <a:t>2026/4/1</a:t>
+              <a:t>2026/5/20</a:t>
             </a:fld>
             <a:endParaRPr lang="zh-TW" altLang="en-US"/>
           </a:p>
@@ -297,7 +297,7 @@
     </p:spTree>
     <p:extLst>
       <p:ext uri="{BB962C8B-B14F-4D97-AF65-F5344CB8AC3E}">
-        <p14:creationId xmlns:p14="http://schemas.microsoft.com/office/powerpoint/2010/main" val="2372095697"/>
+        <p14:creationId xmlns:p14="http://schemas.microsoft.com/office/powerpoint/2010/main" val="2767372734"/>
       </p:ext>
     </p:extLst>
   </p:cSld>
@@ -416,7 +416,7 @@
           <a:p>
             <a:fld id="{C9965009-D4C9-4BD1-8D98-F9C892462EAE}" type="datetimeFigureOut">
               <a:rPr lang="zh-TW" altLang="en-US" smtClean="0"/>
-              <a:t>2026/4/1</a:t>
+              <a:t>2026/5/20</a:t>
             </a:fld>
             <a:endParaRPr lang="zh-TW" altLang="en-US"/>
           </a:p>
@@ -467,7 +467,7 @@
     </p:spTree>
     <p:extLst>
       <p:ext uri="{BB962C8B-B14F-4D97-AF65-F5344CB8AC3E}">
-        <p14:creationId xmlns:p14="http://schemas.microsoft.com/office/powerpoint/2010/main" val="1739853409"/>
+        <p14:creationId xmlns:p14="http://schemas.microsoft.com/office/powerpoint/2010/main" val="1113475362"/>
       </p:ext>
     </p:extLst>
   </p:cSld>
@@ -506,8 +506,8 @@
         </p:nvSpPr>
         <p:spPr>
           <a:xfrm>
-            <a:off x="10305152" y="191691"/>
-            <a:ext cx="3105046" cy="3051215"/>
+            <a:off x="7088981" y="162954"/>
+            <a:ext cx="2135981" cy="2593802"/>
           </a:xfrm>
         </p:spPr>
         <p:txBody>
@@ -534,8 +534,8 @@
         </p:nvSpPr>
         <p:spPr>
           <a:xfrm>
-            <a:off x="990015" y="191691"/>
-            <a:ext cx="9135135" cy="3051215"/>
+            <a:off x="681037" y="162954"/>
+            <a:ext cx="6284119" cy="2593802"/>
           </a:xfrm>
         </p:spPr>
         <p:txBody>
@@ -596,7 +596,7 @@
           <a:p>
             <a:fld id="{C9965009-D4C9-4BD1-8D98-F9C892462EAE}" type="datetimeFigureOut">
               <a:rPr lang="zh-TW" altLang="en-US" smtClean="0"/>
-              <a:t>2026/4/1</a:t>
+              <a:t>2026/5/20</a:t>
             </a:fld>
             <a:endParaRPr lang="zh-TW" altLang="en-US"/>
           </a:p>
@@ -647,7 +647,7 @@
     </p:spTree>
     <p:extLst>
       <p:ext uri="{BB962C8B-B14F-4D97-AF65-F5344CB8AC3E}">
-        <p14:creationId xmlns:p14="http://schemas.microsoft.com/office/powerpoint/2010/main" val="4253345371"/>
+        <p14:creationId xmlns:p14="http://schemas.microsoft.com/office/powerpoint/2010/main" val="2890912618"/>
       </p:ext>
     </p:extLst>
   </p:cSld>
@@ -766,7 +766,7 @@
           <a:p>
             <a:fld id="{C9965009-D4C9-4BD1-8D98-F9C892462EAE}" type="datetimeFigureOut">
               <a:rPr lang="zh-TW" altLang="en-US" smtClean="0"/>
-              <a:t>2026/4/1</a:t>
+              <a:t>2026/5/20</a:t>
             </a:fld>
             <a:endParaRPr lang="zh-TW" altLang="en-US"/>
           </a:p>
@@ -817,7 +817,7 @@
     </p:spTree>
     <p:extLst>
       <p:ext uri="{BB962C8B-B14F-4D97-AF65-F5344CB8AC3E}">
-        <p14:creationId xmlns:p14="http://schemas.microsoft.com/office/powerpoint/2010/main" val="3938970197"/>
+        <p14:creationId xmlns:p14="http://schemas.microsoft.com/office/powerpoint/2010/main" val="2436116520"/>
       </p:ext>
     </p:extLst>
   </p:cSld>
@@ -856,15 +856,15 @@
         </p:nvSpPr>
         <p:spPr>
           <a:xfrm>
-            <a:off x="982514" y="897613"/>
-            <a:ext cx="12420184" cy="1497687"/>
+            <a:off x="675878" y="763050"/>
+            <a:ext cx="8543925" cy="1273166"/>
           </a:xfrm>
         </p:spPr>
         <p:txBody>
           <a:bodyPr anchor="b"/>
           <a:lstStyle>
             <a:lvl1pPr>
-              <a:defRPr sz="3150"/>
+              <a:defRPr sz="2678"/>
             </a:lvl1pPr>
           </a:lstStyle>
           <a:p>
@@ -888,8 +888,8 @@
         </p:nvSpPr>
         <p:spPr>
           <a:xfrm>
-            <a:off x="982514" y="2409468"/>
-            <a:ext cx="12420184" cy="787598"/>
+            <a:off x="675878" y="2048261"/>
+            <a:ext cx="8543925" cy="669528"/>
           </a:xfrm>
         </p:spPr>
         <p:txBody>
@@ -897,7 +897,7 @@
           <a:lstStyle>
             <a:lvl1pPr marL="0" indent="0">
               <a:buNone/>
-              <a:defRPr sz="1260">
+              <a:defRPr sz="1071">
                 <a:solidFill>
                   <a:schemeClr val="tx1">
                     <a:tint val="75000"/>
@@ -905,9 +905,9 @@
                 </a:solidFill>
               </a:defRPr>
             </a:lvl1pPr>
-            <a:lvl2pPr marL="240030" indent="0">
+            <a:lvl2pPr marL="204048" indent="0">
               <a:buNone/>
-              <a:defRPr sz="1050">
+              <a:defRPr sz="893">
                 <a:solidFill>
                   <a:schemeClr val="tx1">
                     <a:tint val="75000"/>
@@ -915,9 +915,9 @@
                 </a:solidFill>
               </a:defRPr>
             </a:lvl2pPr>
-            <a:lvl3pPr marL="480060" indent="0">
+            <a:lvl3pPr marL="408097" indent="0">
               <a:buNone/>
-              <a:defRPr sz="945">
+              <a:defRPr sz="803">
                 <a:solidFill>
                   <a:schemeClr val="tx1">
                     <a:tint val="75000"/>
@@ -925,9 +925,9 @@
                 </a:solidFill>
               </a:defRPr>
             </a:lvl3pPr>
-            <a:lvl4pPr marL="720090" indent="0">
+            <a:lvl4pPr marL="612145" indent="0">
               <a:buNone/>
-              <a:defRPr sz="840">
+              <a:defRPr sz="714">
                 <a:solidFill>
                   <a:schemeClr val="tx1">
                     <a:tint val="75000"/>
@@ -935,9 +935,9 @@
                 </a:solidFill>
               </a:defRPr>
             </a:lvl4pPr>
-            <a:lvl5pPr marL="960120" indent="0">
+            <a:lvl5pPr marL="816193" indent="0">
               <a:buNone/>
-              <a:defRPr sz="840">
+              <a:defRPr sz="714">
                 <a:solidFill>
                   <a:schemeClr val="tx1">
                     <a:tint val="75000"/>
@@ -945,9 +945,9 @@
                 </a:solidFill>
               </a:defRPr>
             </a:lvl5pPr>
-            <a:lvl6pPr marL="1200150" indent="0">
+            <a:lvl6pPr marL="1020242" indent="0">
               <a:buNone/>
-              <a:defRPr sz="840">
+              <a:defRPr sz="714">
                 <a:solidFill>
                   <a:schemeClr val="tx1">
                     <a:tint val="75000"/>
@@ -955,9 +955,9 @@
                 </a:solidFill>
               </a:defRPr>
             </a:lvl6pPr>
-            <a:lvl7pPr marL="1440180" indent="0">
+            <a:lvl7pPr marL="1224290" indent="0">
               <a:buNone/>
-              <a:defRPr sz="840">
+              <a:defRPr sz="714">
                 <a:solidFill>
                   <a:schemeClr val="tx1">
                     <a:tint val="75000"/>
@@ -965,9 +965,9 @@
                 </a:solidFill>
               </a:defRPr>
             </a:lvl7pPr>
-            <a:lvl8pPr marL="1680210" indent="0">
+            <a:lvl8pPr marL="1428339" indent="0">
               <a:buNone/>
-              <a:defRPr sz="840">
+              <a:defRPr sz="714">
                 <a:solidFill>
                   <a:schemeClr val="tx1">
                     <a:tint val="75000"/>
@@ -975,9 +975,9 @@
                 </a:solidFill>
               </a:defRPr>
             </a:lvl8pPr>
-            <a:lvl9pPr marL="1920240" indent="0">
+            <a:lvl9pPr marL="1632387" indent="0">
               <a:buNone/>
-              <a:defRPr sz="840">
+              <a:defRPr sz="714">
                 <a:solidFill>
                   <a:schemeClr val="tx1">
                     <a:tint val="75000"/>
@@ -1012,7 +1012,7 @@
           <a:p>
             <a:fld id="{C9965009-D4C9-4BD1-8D98-F9C892462EAE}" type="datetimeFigureOut">
               <a:rPr lang="zh-TW" altLang="en-US" smtClean="0"/>
-              <a:t>2026/4/1</a:t>
+              <a:t>2026/5/20</a:t>
             </a:fld>
             <a:endParaRPr lang="zh-TW" altLang="en-US"/>
           </a:p>
@@ -1063,7 +1063,7 @@
     </p:spTree>
     <p:extLst>
       <p:ext uri="{BB962C8B-B14F-4D97-AF65-F5344CB8AC3E}">
-        <p14:creationId xmlns:p14="http://schemas.microsoft.com/office/powerpoint/2010/main" val="1073751385"/>
+        <p14:creationId xmlns:p14="http://schemas.microsoft.com/office/powerpoint/2010/main" val="1152426936"/>
       </p:ext>
     </p:extLst>
   </p:cSld>
@@ -1125,8 +1125,8 @@
         </p:nvSpPr>
         <p:spPr>
           <a:xfrm>
-            <a:off x="990014" y="958453"/>
-            <a:ext cx="6120091" cy="2284452"/>
+            <a:off x="681038" y="814770"/>
+            <a:ext cx="4210050" cy="1941986"/>
           </a:xfrm>
         </p:spPr>
         <p:txBody>
@@ -1182,8 +1182,8 @@
         </p:nvSpPr>
         <p:spPr>
           <a:xfrm>
-            <a:off x="7290108" y="958453"/>
-            <a:ext cx="6120091" cy="2284452"/>
+            <a:off x="5014913" y="814770"/>
+            <a:ext cx="4210050" cy="1941986"/>
           </a:xfrm>
         </p:spPr>
         <p:txBody>
@@ -1244,7 +1244,7 @@
           <a:p>
             <a:fld id="{C9965009-D4C9-4BD1-8D98-F9C892462EAE}" type="datetimeFigureOut">
               <a:rPr lang="zh-TW" altLang="en-US" smtClean="0"/>
-              <a:t>2026/4/1</a:t>
+              <a:t>2026/5/20</a:t>
             </a:fld>
             <a:endParaRPr lang="zh-TW" altLang="en-US"/>
           </a:p>
@@ -1295,7 +1295,7 @@
     </p:spTree>
     <p:extLst>
       <p:ext uri="{BB962C8B-B14F-4D97-AF65-F5344CB8AC3E}">
-        <p14:creationId xmlns:p14="http://schemas.microsoft.com/office/powerpoint/2010/main" val="3894538146"/>
+        <p14:creationId xmlns:p14="http://schemas.microsoft.com/office/powerpoint/2010/main" val="3612534731"/>
       </p:ext>
     </p:extLst>
   </p:cSld>
@@ -1334,8 +1334,8 @@
         </p:nvSpPr>
         <p:spPr>
           <a:xfrm>
-            <a:off x="991890" y="191691"/>
-            <a:ext cx="12420184" cy="695921"/>
+            <a:off x="682328" y="162954"/>
+            <a:ext cx="8543925" cy="591594"/>
           </a:xfrm>
         </p:spPr>
         <p:txBody>
@@ -1362,8 +1362,8 @@
         </p:nvSpPr>
         <p:spPr>
           <a:xfrm>
-            <a:off x="991891" y="882610"/>
-            <a:ext cx="6091965" cy="432554"/>
+            <a:off x="682328" y="750297"/>
+            <a:ext cx="4190702" cy="367709"/>
           </a:xfrm>
         </p:spPr>
         <p:txBody>
@@ -1371,39 +1371,39 @@
           <a:lstStyle>
             <a:lvl1pPr marL="0" indent="0">
               <a:buNone/>
-              <a:defRPr sz="1260" b="1"/>
+              <a:defRPr sz="1071" b="1"/>
             </a:lvl1pPr>
-            <a:lvl2pPr marL="240030" indent="0">
+            <a:lvl2pPr marL="204048" indent="0">
               <a:buNone/>
-              <a:defRPr sz="1050" b="1"/>
+              <a:defRPr sz="893" b="1"/>
             </a:lvl2pPr>
-            <a:lvl3pPr marL="480060" indent="0">
+            <a:lvl3pPr marL="408097" indent="0">
               <a:buNone/>
-              <a:defRPr sz="945" b="1"/>
+              <a:defRPr sz="803" b="1"/>
             </a:lvl3pPr>
-            <a:lvl4pPr marL="720090" indent="0">
+            <a:lvl4pPr marL="612145" indent="0">
               <a:buNone/>
-              <a:defRPr sz="840" b="1"/>
+              <a:defRPr sz="714" b="1"/>
             </a:lvl4pPr>
-            <a:lvl5pPr marL="960120" indent="0">
+            <a:lvl5pPr marL="816193" indent="0">
               <a:buNone/>
-              <a:defRPr sz="840" b="1"/>
+              <a:defRPr sz="714" b="1"/>
             </a:lvl5pPr>
-            <a:lvl6pPr marL="1200150" indent="0">
+            <a:lvl6pPr marL="1020242" indent="0">
               <a:buNone/>
-              <a:defRPr sz="840" b="1"/>
+              <a:defRPr sz="714" b="1"/>
             </a:lvl6pPr>
-            <a:lvl7pPr marL="1440180" indent="0">
+            <a:lvl7pPr marL="1224290" indent="0">
               <a:buNone/>
-              <a:defRPr sz="840" b="1"/>
+              <a:defRPr sz="714" b="1"/>
             </a:lvl7pPr>
-            <a:lvl8pPr marL="1680210" indent="0">
+            <a:lvl8pPr marL="1428339" indent="0">
               <a:buNone/>
-              <a:defRPr sz="840" b="1"/>
+              <a:defRPr sz="714" b="1"/>
             </a:lvl8pPr>
-            <a:lvl9pPr marL="1920240" indent="0">
+            <a:lvl9pPr marL="1632387" indent="0">
               <a:buNone/>
-              <a:defRPr sz="840" b="1"/>
+              <a:defRPr sz="714" b="1"/>
             </a:lvl9pPr>
           </a:lstStyle>
           <a:p>
@@ -1427,8 +1427,8 @@
         </p:nvSpPr>
         <p:spPr>
           <a:xfrm>
-            <a:off x="991891" y="1315164"/>
-            <a:ext cx="6091965" cy="1934409"/>
+            <a:off x="682328" y="1118006"/>
+            <a:ext cx="4190702" cy="1644418"/>
           </a:xfrm>
         </p:spPr>
         <p:txBody>
@@ -1484,8 +1484,8 @@
         </p:nvSpPr>
         <p:spPr>
           <a:xfrm>
-            <a:off x="7290108" y="882610"/>
-            <a:ext cx="6121966" cy="432554"/>
+            <a:off x="5014913" y="750297"/>
+            <a:ext cx="4211340" cy="367709"/>
           </a:xfrm>
         </p:spPr>
         <p:txBody>
@@ -1493,39 +1493,39 @@
           <a:lstStyle>
             <a:lvl1pPr marL="0" indent="0">
               <a:buNone/>
-              <a:defRPr sz="1260" b="1"/>
+              <a:defRPr sz="1071" b="1"/>
             </a:lvl1pPr>
-            <a:lvl2pPr marL="240030" indent="0">
+            <a:lvl2pPr marL="204048" indent="0">
               <a:buNone/>
-              <a:defRPr sz="1050" b="1"/>
+              <a:defRPr sz="893" b="1"/>
             </a:lvl2pPr>
-            <a:lvl3pPr marL="480060" indent="0">
+            <a:lvl3pPr marL="408097" indent="0">
               <a:buNone/>
-              <a:defRPr sz="945" b="1"/>
+              <a:defRPr sz="803" b="1"/>
             </a:lvl3pPr>
-            <a:lvl4pPr marL="720090" indent="0">
+            <a:lvl4pPr marL="612145" indent="0">
               <a:buNone/>
-              <a:defRPr sz="840" b="1"/>
+              <a:defRPr sz="714" b="1"/>
             </a:lvl4pPr>
-            <a:lvl5pPr marL="960120" indent="0">
+            <a:lvl5pPr marL="816193" indent="0">
               <a:buNone/>
-              <a:defRPr sz="840" b="1"/>
+              <a:defRPr sz="714" b="1"/>
             </a:lvl5pPr>
-            <a:lvl6pPr marL="1200150" indent="0">
+            <a:lvl6pPr marL="1020242" indent="0">
               <a:buNone/>
-              <a:defRPr sz="840" b="1"/>
+              <a:defRPr sz="714" b="1"/>
             </a:lvl6pPr>
-            <a:lvl7pPr marL="1440180" indent="0">
+            <a:lvl7pPr marL="1224290" indent="0">
               <a:buNone/>
-              <a:defRPr sz="840" b="1"/>
+              <a:defRPr sz="714" b="1"/>
             </a:lvl7pPr>
-            <a:lvl8pPr marL="1680210" indent="0">
+            <a:lvl8pPr marL="1428339" indent="0">
               <a:buNone/>
-              <a:defRPr sz="840" b="1"/>
+              <a:defRPr sz="714" b="1"/>
             </a:lvl8pPr>
-            <a:lvl9pPr marL="1920240" indent="0">
+            <a:lvl9pPr marL="1632387" indent="0">
               <a:buNone/>
-              <a:defRPr sz="840" b="1"/>
+              <a:defRPr sz="714" b="1"/>
             </a:lvl9pPr>
           </a:lstStyle>
           <a:p>
@@ -1549,8 +1549,8 @@
         </p:nvSpPr>
         <p:spPr>
           <a:xfrm>
-            <a:off x="7290108" y="1315164"/>
-            <a:ext cx="6121966" cy="1934409"/>
+            <a:off x="5014913" y="1118006"/>
+            <a:ext cx="4211340" cy="1644418"/>
           </a:xfrm>
         </p:spPr>
         <p:txBody>
@@ -1611,7 +1611,7 @@
           <a:p>
             <a:fld id="{C9965009-D4C9-4BD1-8D98-F9C892462EAE}" type="datetimeFigureOut">
               <a:rPr lang="zh-TW" altLang="en-US" smtClean="0"/>
-              <a:t>2026/4/1</a:t>
+              <a:t>2026/5/20</a:t>
             </a:fld>
             <a:endParaRPr lang="zh-TW" altLang="en-US"/>
           </a:p>
@@ -1662,7 +1662,7 @@
     </p:spTree>
     <p:extLst>
       <p:ext uri="{BB962C8B-B14F-4D97-AF65-F5344CB8AC3E}">
-        <p14:creationId xmlns:p14="http://schemas.microsoft.com/office/powerpoint/2010/main" val="1699590958"/>
+        <p14:creationId xmlns:p14="http://schemas.microsoft.com/office/powerpoint/2010/main" val="3853823856"/>
       </p:ext>
     </p:extLst>
   </p:cSld>
@@ -1729,7 +1729,7 @@
           <a:p>
             <a:fld id="{C9965009-D4C9-4BD1-8D98-F9C892462EAE}" type="datetimeFigureOut">
               <a:rPr lang="zh-TW" altLang="en-US" smtClean="0"/>
-              <a:t>2026/4/1</a:t>
+              <a:t>2026/5/20</a:t>
             </a:fld>
             <a:endParaRPr lang="zh-TW" altLang="en-US"/>
           </a:p>
@@ -1780,7 +1780,7 @@
     </p:spTree>
     <p:extLst>
       <p:ext uri="{BB962C8B-B14F-4D97-AF65-F5344CB8AC3E}">
-        <p14:creationId xmlns:p14="http://schemas.microsoft.com/office/powerpoint/2010/main" val="2042147970"/>
+        <p14:creationId xmlns:p14="http://schemas.microsoft.com/office/powerpoint/2010/main" val="2155656472"/>
       </p:ext>
     </p:extLst>
   </p:cSld>
@@ -1824,7 +1824,7 @@
           <a:p>
             <a:fld id="{C9965009-D4C9-4BD1-8D98-F9C892462EAE}" type="datetimeFigureOut">
               <a:rPr lang="zh-TW" altLang="en-US" smtClean="0"/>
-              <a:t>2026/4/1</a:t>
+              <a:t>2026/5/20</a:t>
             </a:fld>
             <a:endParaRPr lang="zh-TW" altLang="en-US"/>
           </a:p>
@@ -1875,7 +1875,7 @@
     </p:spTree>
     <p:extLst>
       <p:ext uri="{BB962C8B-B14F-4D97-AF65-F5344CB8AC3E}">
-        <p14:creationId xmlns:p14="http://schemas.microsoft.com/office/powerpoint/2010/main" val="1424240174"/>
+        <p14:creationId xmlns:p14="http://schemas.microsoft.com/office/powerpoint/2010/main" val="3025727713"/>
       </p:ext>
     </p:extLst>
   </p:cSld>
@@ -1914,15 +1914,15 @@
         </p:nvSpPr>
         <p:spPr>
           <a:xfrm>
-            <a:off x="991891" y="240030"/>
-            <a:ext cx="4644443" cy="840105"/>
+            <a:off x="682328" y="204047"/>
+            <a:ext cx="3194943" cy="714163"/>
           </a:xfrm>
         </p:spPr>
         <p:txBody>
           <a:bodyPr anchor="b"/>
           <a:lstStyle>
             <a:lvl1pPr>
-              <a:defRPr sz="1680"/>
+              <a:defRPr sz="1428"/>
             </a:lvl1pPr>
           </a:lstStyle>
           <a:p>
@@ -1946,39 +1946,39 @@
         </p:nvSpPr>
         <p:spPr>
           <a:xfrm>
-            <a:off x="6121966" y="518398"/>
-            <a:ext cx="7290108" cy="2558653"/>
+            <a:off x="4211340" y="440684"/>
+            <a:ext cx="5014913" cy="2175081"/>
           </a:xfrm>
         </p:spPr>
         <p:txBody>
           <a:bodyPr/>
           <a:lstStyle>
             <a:lvl1pPr>
-              <a:defRPr sz="1680"/>
+              <a:defRPr sz="1428"/>
             </a:lvl1pPr>
             <a:lvl2pPr>
-              <a:defRPr sz="1470"/>
+              <a:defRPr sz="1250"/>
             </a:lvl2pPr>
             <a:lvl3pPr>
-              <a:defRPr sz="1260"/>
+              <a:defRPr sz="1071"/>
             </a:lvl3pPr>
             <a:lvl4pPr>
-              <a:defRPr sz="1050"/>
+              <a:defRPr sz="893"/>
             </a:lvl4pPr>
             <a:lvl5pPr>
-              <a:defRPr sz="1050"/>
+              <a:defRPr sz="893"/>
             </a:lvl5pPr>
             <a:lvl6pPr>
-              <a:defRPr sz="1050"/>
+              <a:defRPr sz="893"/>
             </a:lvl6pPr>
             <a:lvl7pPr>
-              <a:defRPr sz="1050"/>
+              <a:defRPr sz="893"/>
             </a:lvl7pPr>
             <a:lvl8pPr>
-              <a:defRPr sz="1050"/>
+              <a:defRPr sz="893"/>
             </a:lvl8pPr>
             <a:lvl9pPr>
-              <a:defRPr sz="1050"/>
+              <a:defRPr sz="893"/>
             </a:lvl9pPr>
           </a:lstStyle>
           <a:p>
@@ -2031,8 +2031,8 @@
         </p:nvSpPr>
         <p:spPr>
           <a:xfrm>
-            <a:off x="991891" y="1080135"/>
-            <a:ext cx="4644443" cy="2001084"/>
+            <a:off x="682328" y="918210"/>
+            <a:ext cx="3194943" cy="1701098"/>
           </a:xfrm>
         </p:spPr>
         <p:txBody>
@@ -2040,39 +2040,39 @@
           <a:lstStyle>
             <a:lvl1pPr marL="0" indent="0">
               <a:buNone/>
-              <a:defRPr sz="840"/>
+              <a:defRPr sz="714"/>
             </a:lvl1pPr>
-            <a:lvl2pPr marL="240030" indent="0">
+            <a:lvl2pPr marL="204048" indent="0">
               <a:buNone/>
-              <a:defRPr sz="735"/>
+              <a:defRPr sz="625"/>
             </a:lvl2pPr>
-            <a:lvl3pPr marL="480060" indent="0">
+            <a:lvl3pPr marL="408097" indent="0">
               <a:buNone/>
-              <a:defRPr sz="630"/>
+              <a:defRPr sz="536"/>
             </a:lvl3pPr>
-            <a:lvl4pPr marL="720090" indent="0">
+            <a:lvl4pPr marL="612145" indent="0">
               <a:buNone/>
-              <a:defRPr sz="525"/>
+              <a:defRPr sz="446"/>
             </a:lvl4pPr>
-            <a:lvl5pPr marL="960120" indent="0">
+            <a:lvl5pPr marL="816193" indent="0">
               <a:buNone/>
-              <a:defRPr sz="525"/>
+              <a:defRPr sz="446"/>
             </a:lvl5pPr>
-            <a:lvl6pPr marL="1200150" indent="0">
+            <a:lvl6pPr marL="1020242" indent="0">
               <a:buNone/>
-              <a:defRPr sz="525"/>
+              <a:defRPr sz="446"/>
             </a:lvl6pPr>
-            <a:lvl7pPr marL="1440180" indent="0">
+            <a:lvl7pPr marL="1224290" indent="0">
               <a:buNone/>
-              <a:defRPr sz="525"/>
+              <a:defRPr sz="446"/>
             </a:lvl7pPr>
-            <a:lvl8pPr marL="1680210" indent="0">
+            <a:lvl8pPr marL="1428339" indent="0">
               <a:buNone/>
-              <a:defRPr sz="525"/>
+              <a:defRPr sz="446"/>
             </a:lvl8pPr>
-            <a:lvl9pPr marL="1920240" indent="0">
+            <a:lvl9pPr marL="1632387" indent="0">
               <a:buNone/>
-              <a:defRPr sz="525"/>
+              <a:defRPr sz="446"/>
             </a:lvl9pPr>
           </a:lstStyle>
           <a:p>
@@ -2101,7 +2101,7 @@
           <a:p>
             <a:fld id="{C9965009-D4C9-4BD1-8D98-F9C892462EAE}" type="datetimeFigureOut">
               <a:rPr lang="zh-TW" altLang="en-US" smtClean="0"/>
-              <a:t>2026/4/1</a:t>
+              <a:t>2026/5/20</a:t>
             </a:fld>
             <a:endParaRPr lang="zh-TW" altLang="en-US"/>
           </a:p>
@@ -2152,7 +2152,7 @@
     </p:spTree>
     <p:extLst>
       <p:ext uri="{BB962C8B-B14F-4D97-AF65-F5344CB8AC3E}">
-        <p14:creationId xmlns:p14="http://schemas.microsoft.com/office/powerpoint/2010/main" val="3439990782"/>
+        <p14:creationId xmlns:p14="http://schemas.microsoft.com/office/powerpoint/2010/main" val="1380690586"/>
       </p:ext>
     </p:extLst>
   </p:cSld>
@@ -2191,15 +2191,15 @@
         </p:nvSpPr>
         <p:spPr>
           <a:xfrm>
-            <a:off x="991891" y="240030"/>
-            <a:ext cx="4644443" cy="840105"/>
+            <a:off x="682328" y="204047"/>
+            <a:ext cx="3194943" cy="714163"/>
           </a:xfrm>
         </p:spPr>
         <p:txBody>
           <a:bodyPr anchor="b"/>
           <a:lstStyle>
             <a:lvl1pPr>
-              <a:defRPr sz="1680"/>
+              <a:defRPr sz="1428"/>
             </a:lvl1pPr>
           </a:lstStyle>
           <a:p>
@@ -2223,8 +2223,8 @@
         </p:nvSpPr>
         <p:spPr>
           <a:xfrm>
-            <a:off x="6121966" y="518398"/>
-            <a:ext cx="7290108" cy="2558653"/>
+            <a:off x="4211340" y="440684"/>
+            <a:ext cx="5014913" cy="2175081"/>
           </a:xfrm>
         </p:spPr>
         <p:txBody>
@@ -2232,39 +2232,39 @@
           <a:lstStyle>
             <a:lvl1pPr marL="0" indent="0">
               <a:buNone/>
-              <a:defRPr sz="1680"/>
+              <a:defRPr sz="1428"/>
             </a:lvl1pPr>
-            <a:lvl2pPr marL="240030" indent="0">
+            <a:lvl2pPr marL="204048" indent="0">
               <a:buNone/>
-              <a:defRPr sz="1470"/>
+              <a:defRPr sz="1250"/>
             </a:lvl2pPr>
-            <a:lvl3pPr marL="480060" indent="0">
+            <a:lvl3pPr marL="408097" indent="0">
               <a:buNone/>
-              <a:defRPr sz="1260"/>
+              <a:defRPr sz="1071"/>
             </a:lvl3pPr>
-            <a:lvl4pPr marL="720090" indent="0">
+            <a:lvl4pPr marL="612145" indent="0">
               <a:buNone/>
-              <a:defRPr sz="1050"/>
+              <a:defRPr sz="893"/>
             </a:lvl4pPr>
-            <a:lvl5pPr marL="960120" indent="0">
+            <a:lvl5pPr marL="816193" indent="0">
               <a:buNone/>
-              <a:defRPr sz="1050"/>
+              <a:defRPr sz="893"/>
             </a:lvl5pPr>
-            <a:lvl6pPr marL="1200150" indent="0">
+            <a:lvl6pPr marL="1020242" indent="0">
               <a:buNone/>
-              <a:defRPr sz="1050"/>
+              <a:defRPr sz="893"/>
             </a:lvl6pPr>
-            <a:lvl7pPr marL="1440180" indent="0">
+            <a:lvl7pPr marL="1224290" indent="0">
               <a:buNone/>
-              <a:defRPr sz="1050"/>
+              <a:defRPr sz="893"/>
             </a:lvl7pPr>
-            <a:lvl8pPr marL="1680210" indent="0">
+            <a:lvl8pPr marL="1428339" indent="0">
               <a:buNone/>
-              <a:defRPr sz="1050"/>
+              <a:defRPr sz="893"/>
             </a:lvl8pPr>
-            <a:lvl9pPr marL="1920240" indent="0">
+            <a:lvl9pPr marL="1632387" indent="0">
               <a:buNone/>
-              <a:defRPr sz="1050"/>
+              <a:defRPr sz="893"/>
             </a:lvl9pPr>
           </a:lstStyle>
           <a:p>
@@ -2288,8 +2288,8 @@
         </p:nvSpPr>
         <p:spPr>
           <a:xfrm>
-            <a:off x="991891" y="1080135"/>
-            <a:ext cx="4644443" cy="2001084"/>
+            <a:off x="682328" y="918210"/>
+            <a:ext cx="3194943" cy="1701098"/>
           </a:xfrm>
         </p:spPr>
         <p:txBody>
@@ -2297,39 +2297,39 @@
           <a:lstStyle>
             <a:lvl1pPr marL="0" indent="0">
               <a:buNone/>
-              <a:defRPr sz="840"/>
+              <a:defRPr sz="714"/>
             </a:lvl1pPr>
-            <a:lvl2pPr marL="240030" indent="0">
+            <a:lvl2pPr marL="204048" indent="0">
               <a:buNone/>
-              <a:defRPr sz="735"/>
+              <a:defRPr sz="625"/>
             </a:lvl2pPr>
-            <a:lvl3pPr marL="480060" indent="0">
+            <a:lvl3pPr marL="408097" indent="0">
               <a:buNone/>
-              <a:defRPr sz="630"/>
+              <a:defRPr sz="536"/>
             </a:lvl3pPr>
-            <a:lvl4pPr marL="720090" indent="0">
+            <a:lvl4pPr marL="612145" indent="0">
               <a:buNone/>
-              <a:defRPr sz="525"/>
+              <a:defRPr sz="446"/>
             </a:lvl4pPr>
-            <a:lvl5pPr marL="960120" indent="0">
+            <a:lvl5pPr marL="816193" indent="0">
               <a:buNone/>
-              <a:defRPr sz="525"/>
+              <a:defRPr sz="446"/>
             </a:lvl5pPr>
-            <a:lvl6pPr marL="1200150" indent="0">
+            <a:lvl6pPr marL="1020242" indent="0">
               <a:buNone/>
-              <a:defRPr sz="525"/>
+              <a:defRPr sz="446"/>
             </a:lvl6pPr>
-            <a:lvl7pPr marL="1440180" indent="0">
+            <a:lvl7pPr marL="1224290" indent="0">
               <a:buNone/>
-              <a:defRPr sz="525"/>
+              <a:defRPr sz="446"/>
             </a:lvl7pPr>
-            <a:lvl8pPr marL="1680210" indent="0">
+            <a:lvl8pPr marL="1428339" indent="0">
               <a:buNone/>
-              <a:defRPr sz="525"/>
+              <a:defRPr sz="446"/>
             </a:lvl8pPr>
-            <a:lvl9pPr marL="1920240" indent="0">
+            <a:lvl9pPr marL="1632387" indent="0">
               <a:buNone/>
-              <a:defRPr sz="525"/>
+              <a:defRPr sz="446"/>
             </a:lvl9pPr>
           </a:lstStyle>
           <a:p>
@@ -2358,7 +2358,7 @@
           <a:p>
             <a:fld id="{C9965009-D4C9-4BD1-8D98-F9C892462EAE}" type="datetimeFigureOut">
               <a:rPr lang="zh-TW" altLang="en-US" smtClean="0"/>
-              <a:t>2026/4/1</a:t>
+              <a:t>2026/5/20</a:t>
             </a:fld>
             <a:endParaRPr lang="zh-TW" altLang="en-US"/>
           </a:p>
@@ -2409,7 +2409,7 @@
     </p:spTree>
     <p:extLst>
       <p:ext uri="{BB962C8B-B14F-4D97-AF65-F5344CB8AC3E}">
-        <p14:creationId xmlns:p14="http://schemas.microsoft.com/office/powerpoint/2010/main" val="1863831201"/>
+        <p14:creationId xmlns:p14="http://schemas.microsoft.com/office/powerpoint/2010/main" val="4149913872"/>
       </p:ext>
     </p:extLst>
   </p:cSld>
@@ -2453,8 +2453,8 @@
         </p:nvSpPr>
         <p:spPr>
           <a:xfrm>
-            <a:off x="990015" y="191691"/>
-            <a:ext cx="12420184" cy="695921"/>
+            <a:off x="681038" y="162954"/>
+            <a:ext cx="8543925" cy="591594"/>
           </a:xfrm>
           <a:prstGeom prst="rect">
             <a:avLst/>
@@ -2486,8 +2486,8 @@
         </p:nvSpPr>
         <p:spPr>
           <a:xfrm>
-            <a:off x="990015" y="958453"/>
-            <a:ext cx="12420184" cy="2284452"/>
+            <a:off x="681038" y="814770"/>
+            <a:ext cx="8543925" cy="1941986"/>
           </a:xfrm>
           <a:prstGeom prst="rect">
             <a:avLst/>
@@ -2548,8 +2548,8 @@
         </p:nvSpPr>
         <p:spPr>
           <a:xfrm>
-            <a:off x="990015" y="3337084"/>
-            <a:ext cx="3240048" cy="191691"/>
+            <a:off x="681038" y="2836816"/>
+            <a:ext cx="2228850" cy="162954"/>
           </a:xfrm>
           <a:prstGeom prst="rect">
             <a:avLst/>
@@ -2559,7 +2559,7 @@
           <a:bodyPr vert="horz" lIns="91440" tIns="45720" rIns="91440" bIns="45720" rtlCol="0" anchor="ctr"/>
           <a:lstStyle>
             <a:lvl1pPr algn="l">
-              <a:defRPr sz="630">
+              <a:defRPr sz="536">
                 <a:solidFill>
                   <a:schemeClr val="tx1">
                     <a:tint val="75000"/>
@@ -2571,7 +2571,7 @@
           <a:p>
             <a:fld id="{C9965009-D4C9-4BD1-8D98-F9C892462EAE}" type="datetimeFigureOut">
               <a:rPr lang="zh-TW" altLang="en-US" smtClean="0"/>
-              <a:t>2026/4/1</a:t>
+              <a:t>2026/5/20</a:t>
             </a:fld>
             <a:endParaRPr lang="zh-TW" altLang="en-US"/>
           </a:p>
@@ -2589,8 +2589,8 @@
         </p:nvSpPr>
         <p:spPr>
           <a:xfrm>
-            <a:off x="4770071" y="3337084"/>
-            <a:ext cx="4860072" cy="191691"/>
+            <a:off x="3281363" y="2836816"/>
+            <a:ext cx="3343275" cy="162954"/>
           </a:xfrm>
           <a:prstGeom prst="rect">
             <a:avLst/>
@@ -2600,7 +2600,7 @@
           <a:bodyPr vert="horz" lIns="91440" tIns="45720" rIns="91440" bIns="45720" rtlCol="0" anchor="ctr"/>
           <a:lstStyle>
             <a:lvl1pPr algn="ctr">
-              <a:defRPr sz="630">
+              <a:defRPr sz="536">
                 <a:solidFill>
                   <a:schemeClr val="tx1">
                     <a:tint val="75000"/>
@@ -2626,8 +2626,8 @@
         </p:nvSpPr>
         <p:spPr>
           <a:xfrm>
-            <a:off x="10170150" y="3337084"/>
-            <a:ext cx="3240048" cy="191691"/>
+            <a:off x="6996113" y="2836816"/>
+            <a:ext cx="2228850" cy="162954"/>
           </a:xfrm>
           <a:prstGeom prst="rect">
             <a:avLst/>
@@ -2637,7 +2637,7 @@
           <a:bodyPr vert="horz" lIns="91440" tIns="45720" rIns="91440" bIns="45720" rtlCol="0" anchor="ctr"/>
           <a:lstStyle>
             <a:lvl1pPr algn="r">
-              <a:defRPr sz="630">
+              <a:defRPr sz="536">
                 <a:solidFill>
                   <a:schemeClr val="tx1">
                     <a:tint val="75000"/>
@@ -2658,27 +2658,27 @@
     </p:spTree>
     <p:extLst>
       <p:ext uri="{BB962C8B-B14F-4D97-AF65-F5344CB8AC3E}">
-        <p14:creationId xmlns:p14="http://schemas.microsoft.com/office/powerpoint/2010/main" val="2240199972"/>
+        <p14:creationId xmlns:p14="http://schemas.microsoft.com/office/powerpoint/2010/main" val="3812727782"/>
       </p:ext>
     </p:extLst>
   </p:cSld>
   <p:clrMap bg1="lt1" tx1="dk1" bg2="lt2" tx2="dk2" accent1="accent1" accent2="accent2" accent3="accent3" accent4="accent4" accent5="accent5" accent6="accent6" hlink="hlink" folHlink="folHlink"/>
   <p:sldLayoutIdLst>
-    <p:sldLayoutId id="2147483805" r:id="rId1"/>
-    <p:sldLayoutId id="2147483806" r:id="rId2"/>
-    <p:sldLayoutId id="2147483807" r:id="rId3"/>
-    <p:sldLayoutId id="2147483808" r:id="rId4"/>
-    <p:sldLayoutId id="2147483809" r:id="rId5"/>
-    <p:sldLayoutId id="2147483810" r:id="rId6"/>
-    <p:sldLayoutId id="2147483811" r:id="rId7"/>
-    <p:sldLayoutId id="2147483812" r:id="rId8"/>
-    <p:sldLayoutId id="2147483813" r:id="rId9"/>
-    <p:sldLayoutId id="2147483814" r:id="rId10"/>
-    <p:sldLayoutId id="2147483815" r:id="rId11"/>
+    <p:sldLayoutId id="2147483841" r:id="rId1"/>
+    <p:sldLayoutId id="2147483842" r:id="rId2"/>
+    <p:sldLayoutId id="2147483843" r:id="rId3"/>
+    <p:sldLayoutId id="2147483844" r:id="rId4"/>
+    <p:sldLayoutId id="2147483845" r:id="rId5"/>
+    <p:sldLayoutId id="2147483846" r:id="rId6"/>
+    <p:sldLayoutId id="2147483847" r:id="rId7"/>
+    <p:sldLayoutId id="2147483848" r:id="rId8"/>
+    <p:sldLayoutId id="2147483849" r:id="rId9"/>
+    <p:sldLayoutId id="2147483850" r:id="rId10"/>
+    <p:sldLayoutId id="2147483851" r:id="rId11"/>
   </p:sldLayoutIdLst>
   <p:txStyles>
     <p:titleStyle>
-      <a:lvl1pPr algn="l" defTabSz="480060" rtl="0" eaLnBrk="1" latinLnBrk="0" hangingPunct="1">
+      <a:lvl1pPr algn="l" defTabSz="408097" rtl="0" eaLnBrk="1" latinLnBrk="0" hangingPunct="1">
         <a:lnSpc>
           <a:spcPct val="90000"/>
         </a:lnSpc>
@@ -2686,7 +2686,7 @@
           <a:spcPct val="0"/>
         </a:spcBef>
         <a:buNone/>
-        <a:defRPr sz="2310" kern="1200">
+        <a:defRPr sz="1964" kern="1200">
           <a:solidFill>
             <a:schemeClr val="tx1"/>
           </a:solidFill>
@@ -2697,16 +2697,16 @@
       </a:lvl1pPr>
     </p:titleStyle>
     <p:bodyStyle>
-      <a:lvl1pPr marL="120015" indent="-120015" algn="l" defTabSz="480060" rtl="0" eaLnBrk="1" latinLnBrk="0" hangingPunct="1">
+      <a:lvl1pPr marL="102024" indent="-102024" algn="l" defTabSz="408097" rtl="0" eaLnBrk="1" latinLnBrk="0" hangingPunct="1">
         <a:lnSpc>
           <a:spcPct val="90000"/>
         </a:lnSpc>
         <a:spcBef>
-          <a:spcPts val="525"/>
+          <a:spcPts val="446"/>
         </a:spcBef>
         <a:buFont typeface="Arial" panose="020B0604020202020204" pitchFamily="34" charset="0"/>
         <a:buChar char="•"/>
-        <a:defRPr sz="1470" kern="1200">
+        <a:defRPr sz="1250" kern="1200">
           <a:solidFill>
             <a:schemeClr val="tx1"/>
           </a:solidFill>
@@ -2715,16 +2715,16 @@
           <a:cs typeface="+mn-cs"/>
         </a:defRPr>
       </a:lvl1pPr>
-      <a:lvl2pPr marL="360045" indent="-120015" algn="l" defTabSz="480060" rtl="0" eaLnBrk="1" latinLnBrk="0" hangingPunct="1">
+      <a:lvl2pPr marL="306073" indent="-102024" algn="l" defTabSz="408097" rtl="0" eaLnBrk="1" latinLnBrk="0" hangingPunct="1">
         <a:lnSpc>
           <a:spcPct val="90000"/>
         </a:lnSpc>
         <a:spcBef>
-          <a:spcPts val="263"/>
+          <a:spcPts val="223"/>
         </a:spcBef>
         <a:buFont typeface="Arial" panose="020B0604020202020204" pitchFamily="34" charset="0"/>
         <a:buChar char="•"/>
-        <a:defRPr sz="1260" kern="1200">
+        <a:defRPr sz="1071" kern="1200">
           <a:solidFill>
             <a:schemeClr val="tx1"/>
           </a:solidFill>
@@ -2733,16 +2733,16 @@
           <a:cs typeface="+mn-cs"/>
         </a:defRPr>
       </a:lvl2pPr>
-      <a:lvl3pPr marL="600075" indent="-120015" algn="l" defTabSz="480060" rtl="0" eaLnBrk="1" latinLnBrk="0" hangingPunct="1">
+      <a:lvl3pPr marL="510121" indent="-102024" algn="l" defTabSz="408097" rtl="0" eaLnBrk="1" latinLnBrk="0" hangingPunct="1">
         <a:lnSpc>
           <a:spcPct val="90000"/>
         </a:lnSpc>
         <a:spcBef>
-          <a:spcPts val="263"/>
+          <a:spcPts val="223"/>
         </a:spcBef>
         <a:buFont typeface="Arial" panose="020B0604020202020204" pitchFamily="34" charset="0"/>
         <a:buChar char="•"/>
-        <a:defRPr sz="1050" kern="1200">
+        <a:defRPr sz="893" kern="1200">
           <a:solidFill>
             <a:schemeClr val="tx1"/>
           </a:solidFill>
@@ -2751,16 +2751,16 @@
           <a:cs typeface="+mn-cs"/>
         </a:defRPr>
       </a:lvl3pPr>
-      <a:lvl4pPr marL="840105" indent="-120015" algn="l" defTabSz="480060" rtl="0" eaLnBrk="1" latinLnBrk="0" hangingPunct="1">
+      <a:lvl4pPr marL="714169" indent="-102024" algn="l" defTabSz="408097" rtl="0" eaLnBrk="1" latinLnBrk="0" hangingPunct="1">
         <a:lnSpc>
           <a:spcPct val="90000"/>
         </a:lnSpc>
         <a:spcBef>
-          <a:spcPts val="263"/>
+          <a:spcPts val="223"/>
         </a:spcBef>
         <a:buFont typeface="Arial" panose="020B0604020202020204" pitchFamily="34" charset="0"/>
         <a:buChar char="•"/>
-        <a:defRPr sz="945" kern="1200">
+        <a:defRPr sz="803" kern="1200">
           <a:solidFill>
             <a:schemeClr val="tx1"/>
           </a:solidFill>
@@ -2769,16 +2769,16 @@
           <a:cs typeface="+mn-cs"/>
         </a:defRPr>
       </a:lvl4pPr>
-      <a:lvl5pPr marL="1080135" indent="-120015" algn="l" defTabSz="480060" rtl="0" eaLnBrk="1" latinLnBrk="0" hangingPunct="1">
+      <a:lvl5pPr marL="918218" indent="-102024" algn="l" defTabSz="408097" rtl="0" eaLnBrk="1" latinLnBrk="0" hangingPunct="1">
         <a:lnSpc>
           <a:spcPct val="90000"/>
         </a:lnSpc>
         <a:spcBef>
-          <a:spcPts val="263"/>
+          <a:spcPts val="223"/>
         </a:spcBef>
         <a:buFont typeface="Arial" panose="020B0604020202020204" pitchFamily="34" charset="0"/>
         <a:buChar char="•"/>
-        <a:defRPr sz="945" kern="1200">
+        <a:defRPr sz="803" kern="1200">
           <a:solidFill>
             <a:schemeClr val="tx1"/>
           </a:solidFill>
@@ -2787,16 +2787,16 @@
           <a:cs typeface="+mn-cs"/>
         </a:defRPr>
       </a:lvl5pPr>
-      <a:lvl6pPr marL="1320165" indent="-120015" algn="l" defTabSz="480060" rtl="0" eaLnBrk="1" latinLnBrk="0" hangingPunct="1">
+      <a:lvl6pPr marL="1122266" indent="-102024" algn="l" defTabSz="408097" rtl="0" eaLnBrk="1" latinLnBrk="0" hangingPunct="1">
         <a:lnSpc>
           <a:spcPct val="90000"/>
         </a:lnSpc>
         <a:spcBef>
-          <a:spcPts val="263"/>
+          <a:spcPts val="223"/>
         </a:spcBef>
         <a:buFont typeface="Arial" panose="020B0604020202020204" pitchFamily="34" charset="0"/>
         <a:buChar char="•"/>
-        <a:defRPr sz="945" kern="1200">
+        <a:defRPr sz="803" kern="1200">
           <a:solidFill>
             <a:schemeClr val="tx1"/>
           </a:solidFill>
@@ -2805,16 +2805,16 @@
           <a:cs typeface="+mn-cs"/>
         </a:defRPr>
       </a:lvl6pPr>
-      <a:lvl7pPr marL="1560195" indent="-120015" algn="l" defTabSz="480060" rtl="0" eaLnBrk="1" latinLnBrk="0" hangingPunct="1">
+      <a:lvl7pPr marL="1326314" indent="-102024" algn="l" defTabSz="408097" rtl="0" eaLnBrk="1" latinLnBrk="0" hangingPunct="1">
         <a:lnSpc>
           <a:spcPct val="90000"/>
         </a:lnSpc>
         <a:spcBef>
-          <a:spcPts val="263"/>
+          <a:spcPts val="223"/>
         </a:spcBef>
         <a:buFont typeface="Arial" panose="020B0604020202020204" pitchFamily="34" charset="0"/>
         <a:buChar char="•"/>
-        <a:defRPr sz="945" kern="1200">
+        <a:defRPr sz="803" kern="1200">
           <a:solidFill>
             <a:schemeClr val="tx1"/>
           </a:solidFill>
@@ -2823,16 +2823,16 @@
           <a:cs typeface="+mn-cs"/>
         </a:defRPr>
       </a:lvl7pPr>
-      <a:lvl8pPr marL="1800225" indent="-120015" algn="l" defTabSz="480060" rtl="0" eaLnBrk="1" latinLnBrk="0" hangingPunct="1">
+      <a:lvl8pPr marL="1530363" indent="-102024" algn="l" defTabSz="408097" rtl="0" eaLnBrk="1" latinLnBrk="0" hangingPunct="1">
         <a:lnSpc>
           <a:spcPct val="90000"/>
         </a:lnSpc>
         <a:spcBef>
-          <a:spcPts val="263"/>
+          <a:spcPts val="223"/>
         </a:spcBef>
         <a:buFont typeface="Arial" panose="020B0604020202020204" pitchFamily="34" charset="0"/>
         <a:buChar char="•"/>
-        <a:defRPr sz="945" kern="1200">
+        <a:defRPr sz="803" kern="1200">
           <a:solidFill>
             <a:schemeClr val="tx1"/>
           </a:solidFill>
@@ -2841,16 +2841,16 @@
           <a:cs typeface="+mn-cs"/>
         </a:defRPr>
       </a:lvl8pPr>
-      <a:lvl9pPr marL="2040255" indent="-120015" algn="l" defTabSz="480060" rtl="0" eaLnBrk="1" latinLnBrk="0" hangingPunct="1">
+      <a:lvl9pPr marL="1734411" indent="-102024" algn="l" defTabSz="408097" rtl="0" eaLnBrk="1" latinLnBrk="0" hangingPunct="1">
         <a:lnSpc>
           <a:spcPct val="90000"/>
         </a:lnSpc>
         <a:spcBef>
-          <a:spcPts val="263"/>
+          <a:spcPts val="223"/>
         </a:spcBef>
         <a:buFont typeface="Arial" panose="020B0604020202020204" pitchFamily="34" charset="0"/>
         <a:buChar char="•"/>
-        <a:defRPr sz="945" kern="1200">
+        <a:defRPr sz="803" kern="1200">
           <a:solidFill>
             <a:schemeClr val="tx1"/>
           </a:solidFill>
@@ -2864,8 +2864,8 @@
       <a:defPPr>
         <a:defRPr lang="en-US"/>
       </a:defPPr>
-      <a:lvl1pPr marL="0" algn="l" defTabSz="480060" rtl="0" eaLnBrk="1" latinLnBrk="0" hangingPunct="1">
-        <a:defRPr sz="945" kern="1200">
+      <a:lvl1pPr marL="0" algn="l" defTabSz="408097" rtl="0" eaLnBrk="1" latinLnBrk="0" hangingPunct="1">
+        <a:defRPr sz="803" kern="1200">
           <a:solidFill>
             <a:schemeClr val="tx1"/>
           </a:solidFill>
@@ -2874,8 +2874,8 @@
           <a:cs typeface="+mn-cs"/>
         </a:defRPr>
       </a:lvl1pPr>
-      <a:lvl2pPr marL="240030" algn="l" defTabSz="480060" rtl="0" eaLnBrk="1" latinLnBrk="0" hangingPunct="1">
-        <a:defRPr sz="945" kern="1200">
+      <a:lvl2pPr marL="204048" algn="l" defTabSz="408097" rtl="0" eaLnBrk="1" latinLnBrk="0" hangingPunct="1">
+        <a:defRPr sz="803" kern="1200">
           <a:solidFill>
             <a:schemeClr val="tx1"/>
           </a:solidFill>
@@ -2884,8 +2884,8 @@
           <a:cs typeface="+mn-cs"/>
         </a:defRPr>
       </a:lvl2pPr>
-      <a:lvl3pPr marL="480060" algn="l" defTabSz="480060" rtl="0" eaLnBrk="1" latinLnBrk="0" hangingPunct="1">
-        <a:defRPr sz="945" kern="1200">
+      <a:lvl3pPr marL="408097" algn="l" defTabSz="408097" rtl="0" eaLnBrk="1" latinLnBrk="0" hangingPunct="1">
+        <a:defRPr sz="803" kern="1200">
           <a:solidFill>
             <a:schemeClr val="tx1"/>
           </a:solidFill>
@@ -2894,8 +2894,8 @@
           <a:cs typeface="+mn-cs"/>
         </a:defRPr>
       </a:lvl3pPr>
-      <a:lvl4pPr marL="720090" algn="l" defTabSz="480060" rtl="0" eaLnBrk="1" latinLnBrk="0" hangingPunct="1">
-        <a:defRPr sz="945" kern="1200">
+      <a:lvl4pPr marL="612145" algn="l" defTabSz="408097" rtl="0" eaLnBrk="1" latinLnBrk="0" hangingPunct="1">
+        <a:defRPr sz="803" kern="1200">
           <a:solidFill>
             <a:schemeClr val="tx1"/>
           </a:solidFill>
@@ -2904,8 +2904,8 @@
           <a:cs typeface="+mn-cs"/>
         </a:defRPr>
       </a:lvl4pPr>
-      <a:lvl5pPr marL="960120" algn="l" defTabSz="480060" rtl="0" eaLnBrk="1" latinLnBrk="0" hangingPunct="1">
-        <a:defRPr sz="945" kern="1200">
+      <a:lvl5pPr marL="816193" algn="l" defTabSz="408097" rtl="0" eaLnBrk="1" latinLnBrk="0" hangingPunct="1">
+        <a:defRPr sz="803" kern="1200">
           <a:solidFill>
             <a:schemeClr val="tx1"/>
           </a:solidFill>
@@ -2914,8 +2914,8 @@
           <a:cs typeface="+mn-cs"/>
         </a:defRPr>
       </a:lvl5pPr>
-      <a:lvl6pPr marL="1200150" algn="l" defTabSz="480060" rtl="0" eaLnBrk="1" latinLnBrk="0" hangingPunct="1">
-        <a:defRPr sz="945" kern="1200">
+      <a:lvl6pPr marL="1020242" algn="l" defTabSz="408097" rtl="0" eaLnBrk="1" latinLnBrk="0" hangingPunct="1">
+        <a:defRPr sz="803" kern="1200">
           <a:solidFill>
             <a:schemeClr val="tx1"/>
           </a:solidFill>
@@ -2924,8 +2924,8 @@
           <a:cs typeface="+mn-cs"/>
         </a:defRPr>
       </a:lvl6pPr>
-      <a:lvl7pPr marL="1440180" algn="l" defTabSz="480060" rtl="0" eaLnBrk="1" latinLnBrk="0" hangingPunct="1">
-        <a:defRPr sz="945" kern="1200">
+      <a:lvl7pPr marL="1224290" algn="l" defTabSz="408097" rtl="0" eaLnBrk="1" latinLnBrk="0" hangingPunct="1">
+        <a:defRPr sz="803" kern="1200">
           <a:solidFill>
             <a:schemeClr val="tx1"/>
           </a:solidFill>
@@ -2934,8 +2934,8 @@
           <a:cs typeface="+mn-cs"/>
         </a:defRPr>
       </a:lvl7pPr>
-      <a:lvl8pPr marL="1680210" algn="l" defTabSz="480060" rtl="0" eaLnBrk="1" latinLnBrk="0" hangingPunct="1">
-        <a:defRPr sz="945" kern="1200">
+      <a:lvl8pPr marL="1428339" algn="l" defTabSz="408097" rtl="0" eaLnBrk="1" latinLnBrk="0" hangingPunct="1">
+        <a:defRPr sz="803" kern="1200">
           <a:solidFill>
             <a:schemeClr val="tx1"/>
           </a:solidFill>
@@ -2944,8 +2944,8 @@
           <a:cs typeface="+mn-cs"/>
         </a:defRPr>
       </a:lvl8pPr>
-      <a:lvl9pPr marL="1920240" algn="l" defTabSz="480060" rtl="0" eaLnBrk="1" latinLnBrk="0" hangingPunct="1">
-        <a:defRPr sz="945" kern="1200">
+      <a:lvl9pPr marL="1632387" algn="l" defTabSz="408097" rtl="0" eaLnBrk="1" latinLnBrk="0" hangingPunct="1">
+        <a:defRPr sz="803" kern="1200">
           <a:solidFill>
             <a:schemeClr val="tx1"/>
           </a:solidFill>
@@ -3004,8 +3004,8 @@
         </p:blipFill>
         <p:spPr>
           <a:xfrm>
-            <a:off x="2820232" y="-1860637"/>
-            <a:ext cx="9250889" cy="7311904"/>
+            <a:off x="1940058" y="-987981"/>
+            <a:ext cx="6363747" cy="5029906"/>
           </a:xfrm>
           <a:prstGeom prst="rect">
             <a:avLst/>
@@ -3056,8 +3056,8 @@
         </p:nvGrpSpPr>
         <p:grpSpPr>
           <a:xfrm>
-            <a:off x="184949" y="245405"/>
-            <a:ext cx="13618316" cy="3417016"/>
+            <a:off x="127228" y="460779"/>
+            <a:ext cx="9368128" cy="2350588"/>
             <a:chOff x="90306" y="1989107"/>
             <a:chExt cx="12145731" cy="3160863"/>
           </a:xfrm>
@@ -3106,7 +3106,7 @@
             </a:fontRef>
           </p:style>
           <p:txBody>
-            <a:bodyPr rot="0" spcFirstLastPara="0" vertOverflow="overflow" horzOverflow="overflow" vert="horz" wrap="square" lIns="98850" tIns="49425" rIns="98850" bIns="49425" numCol="1" spcCol="0" rtlCol="0" fromWordArt="0" anchor="ctr" anchorCtr="0" forceAA="0" compatLnSpc="1">
+            <a:bodyPr rot="0" spcFirstLastPara="0" vertOverflow="overflow" horzOverflow="overflow" vert="horz" wrap="square" lIns="68000" tIns="34000" rIns="68000" bIns="34000" numCol="1" spcCol="0" rtlCol="0" fromWordArt="0" anchor="ctr" anchorCtr="0" forceAA="0" compatLnSpc="1">
               <a:prstTxWarp prst="textNoShape">
                 <a:avLst/>
               </a:prstTxWarp>
@@ -3115,7 +3115,7 @@
             <a:lstStyle/>
             <a:p>
               <a:pPr algn="ctr"/>
-              <a:endParaRPr lang="zh-TW" altLang="en-US" sz="1945"/>
+              <a:endParaRPr lang="zh-TW" altLang="en-US" sz="1338"/>
             </a:p>
           </p:txBody>
         </p:sp>
@@ -3133,10 +3133,10 @@
           </p:nvGrpSpPr>
           <p:grpSpPr>
             <a:xfrm>
-              <a:off x="125678" y="1999164"/>
-              <a:ext cx="12110359" cy="3150806"/>
-              <a:chOff x="560923" y="1534239"/>
-              <a:chExt cx="10648403" cy="2770442"/>
+              <a:off x="107003" y="1999164"/>
+              <a:ext cx="12129034" cy="3150806"/>
+              <a:chOff x="544503" y="1534239"/>
+              <a:chExt cx="10664823" cy="2770442"/>
             </a:xfrm>
           </p:grpSpPr>
           <p:pic>
@@ -3225,8 +3225,8 @@
                 </p:nvSpPr>
                 <p:spPr>
                   <a:xfrm rot="16200000">
-                    <a:off x="-63328" y="2819159"/>
-                    <a:ext cx="1555631" cy="307129"/>
+                    <a:off x="-63328" y="2802739"/>
+                    <a:ext cx="1555631" cy="339969"/>
                   </a:xfrm>
                   <a:prstGeom prst="rect">
                     <a:avLst/>
@@ -3241,7 +3241,7 @@
                   <a:p>
                     <a:pPr algn="r"/>
                     <a:r>
-                      <a:rPr lang="en-US" altLang="zh-TW" sz="1945" dirty="0"/>
+                      <a:rPr lang="en-US" altLang="zh-TW" sz="1338" dirty="0"/>
                       <a:t>Energy (</a:t>
                     </a:r>
                     <a14:m>
@@ -3250,7 +3250,7 @@
                           <m:rPr>
                             <m:sty m:val="p"/>
                           </m:rPr>
-                          <a:rPr lang="en-US" altLang="zh-TW" sz="1945" dirty="0">
+                          <a:rPr lang="en-US" altLang="zh-TW" sz="1338" dirty="0">
                             <a:latin typeface="Cambria Math" panose="02040503050406030204" pitchFamily="18" charset="0"/>
                           </a:rPr>
                           <m:t>eV</m:t>
@@ -3258,10 +3258,10 @@
                       </m:oMath>
                     </a14:m>
                     <a:r>
-                      <a:rPr lang="en-US" altLang="zh-TW" sz="1945" dirty="0"/>
+                      <a:rPr lang="en-US" altLang="zh-TW" sz="1338" dirty="0"/>
                       <a:t>) </a:t>
                     </a:r>
-                    <a:endParaRPr lang="zh-TW" altLang="en-US" sz="1945" dirty="0"/>
+                    <a:endParaRPr lang="zh-TW" altLang="en-US" sz="1338" dirty="0"/>
                   </a:p>
                 </p:txBody>
               </p:sp>
@@ -3283,8 +3283,8 @@
                 </p:nvSpPr>
                 <p:spPr>
                   <a:xfrm rot="16200000">
-                    <a:off x="-63328" y="2819159"/>
-                    <a:ext cx="1555631" cy="307129"/>
+                    <a:off x="-63328" y="2802739"/>
+                    <a:ext cx="1555631" cy="339969"/>
                   </a:xfrm>
                   <a:prstGeom prst="rect">
                     <a:avLst/>
@@ -3292,7 +3292,7 @@
                   <a:blipFill>
                     <a:blip r:embed="rId3"/>
                     <a:stretch>
-                      <a:fillRect l="-7813" t="-6369" r="-26563"/>
+                      <a:fillRect l="-4082" t="-4167" r="-20408"/>
                     </a:stretch>
                   </a:blipFill>
                 </p:spPr>
@@ -3327,8 +3327,8 @@
                 </p:nvSpPr>
                 <p:spPr>
                   <a:xfrm rot="16200000">
-                    <a:off x="6098812" y="2819159"/>
-                    <a:ext cx="1555631" cy="307129"/>
+                    <a:off x="6098812" y="2802739"/>
+                    <a:ext cx="1555631" cy="339969"/>
                   </a:xfrm>
                   <a:prstGeom prst="rect">
                     <a:avLst/>
@@ -3343,7 +3343,7 @@
                   <a:p>
                     <a:pPr algn="r"/>
                     <a:r>
-                      <a:rPr lang="en-US" altLang="zh-TW" sz="1945" dirty="0"/>
+                      <a:rPr lang="en-US" altLang="zh-TW" sz="1338" dirty="0"/>
                       <a:t>Energy (</a:t>
                     </a:r>
                     <a14:m>
@@ -3352,7 +3352,7 @@
                           <m:rPr>
                             <m:sty m:val="p"/>
                           </m:rPr>
-                          <a:rPr lang="en-US" altLang="zh-TW" sz="1945" dirty="0">
+                          <a:rPr lang="en-US" altLang="zh-TW" sz="1338" dirty="0">
                             <a:latin typeface="Cambria Math" panose="02040503050406030204" pitchFamily="18" charset="0"/>
                           </a:rPr>
                           <m:t>eV</m:t>
@@ -3360,10 +3360,10 @@
                       </m:oMath>
                     </a14:m>
                     <a:r>
-                      <a:rPr lang="en-US" altLang="zh-TW" sz="1945" dirty="0"/>
+                      <a:rPr lang="en-US" altLang="zh-TW" sz="1338" dirty="0"/>
                       <a:t>) </a:t>
                     </a:r>
-                    <a:endParaRPr lang="zh-TW" altLang="en-US" sz="1945" dirty="0"/>
+                    <a:endParaRPr lang="zh-TW" altLang="en-US" sz="1338" dirty="0"/>
                   </a:p>
                 </p:txBody>
               </p:sp>
@@ -3385,8 +3385,8 @@
                 </p:nvSpPr>
                 <p:spPr>
                   <a:xfrm rot="16200000">
-                    <a:off x="6098812" y="2819159"/>
-                    <a:ext cx="1555631" cy="307129"/>
+                    <a:off x="6098812" y="2802739"/>
+                    <a:ext cx="1555631" cy="339969"/>
                   </a:xfrm>
                   <a:prstGeom prst="rect">
                     <a:avLst/>
@@ -3394,7 +3394,7 @@
                   <a:blipFill>
                     <a:blip r:embed="rId4"/>
                     <a:stretch>
-                      <a:fillRect l="-7813" t="-6369" r="-26563"/>
+                      <a:fillRect l="-4082" t="-4167" r="-20408"/>
                     </a:stretch>
                   </a:blipFill>
                 </p:spPr>
@@ -3467,8 +3467,8 @@
         </p:blipFill>
         <p:spPr>
           <a:xfrm>
-            <a:off x="1876927" y="228514"/>
-            <a:ext cx="10646361" cy="3143445"/>
+            <a:off x="1291153" y="449160"/>
+            <a:ext cx="7323701" cy="2162396"/>
           </a:xfrm>
           <a:prstGeom prst="rect">
             <a:avLst/>
@@ -3489,8 +3489,8 @@
         </p:nvSpPr>
         <p:spPr>
           <a:xfrm rot="10800000">
-            <a:off x="5288510" y="4692434"/>
-            <a:ext cx="1953163" cy="2599285"/>
+            <a:off x="3638001" y="3811883"/>
+            <a:ext cx="1343594" cy="1788065"/>
           </a:xfrm>
           <a:prstGeom prst="triangle">
             <a:avLst/>
@@ -3521,7 +3521,7 @@
           </a:fontRef>
         </p:style>
         <p:txBody>
-          <a:bodyPr rot="0" spcFirstLastPara="0" vertOverflow="overflow" horzOverflow="overflow" vert="horz" wrap="square" lIns="120198" tIns="60096" rIns="120198" bIns="60096" numCol="1" spcCol="0" rtlCol="0" fromWordArt="0" anchor="ctr" anchorCtr="0" forceAA="0" compatLnSpc="1">
+          <a:bodyPr rot="0" spcFirstLastPara="0" vertOverflow="overflow" horzOverflow="overflow" vert="horz" wrap="square" lIns="82685" tIns="41340" rIns="82685" bIns="41340" numCol="1" spcCol="0" rtlCol="0" fromWordArt="0" anchor="ctr" anchorCtr="0" forceAA="0" compatLnSpc="1">
             <a:prstTxWarp prst="textNoShape">
               <a:avLst/>
             </a:prstTxWarp>
@@ -3530,7 +3530,7 @@
           <a:lstStyle/>
           <a:p>
             <a:pPr algn="ctr"/>
-            <a:endParaRPr lang="zh-TW" altLang="en-US" sz="2369" dirty="0"/>
+            <a:endParaRPr lang="zh-TW" altLang="en-US" sz="1630" dirty="0"/>
           </a:p>
         </p:txBody>
       </p:sp>
@@ -3548,8 +3548,8 @@
         </p:nvSpPr>
         <p:spPr>
           <a:xfrm rot="10800000">
-            <a:off x="8516919" y="4692434"/>
-            <a:ext cx="1953163" cy="2599285"/>
+            <a:off x="5858844" y="3811883"/>
+            <a:ext cx="1343594" cy="1788065"/>
           </a:xfrm>
           <a:prstGeom prst="triangle">
             <a:avLst/>
@@ -3580,7 +3580,7 @@
           </a:fontRef>
         </p:style>
         <p:txBody>
-          <a:bodyPr rot="0" spcFirstLastPara="0" vertOverflow="overflow" horzOverflow="overflow" vert="horz" wrap="square" lIns="120198" tIns="60096" rIns="120198" bIns="60096" numCol="1" spcCol="0" rtlCol="0" fromWordArt="0" anchor="ctr" anchorCtr="0" forceAA="0" compatLnSpc="1">
+          <a:bodyPr rot="0" spcFirstLastPara="0" vertOverflow="overflow" horzOverflow="overflow" vert="horz" wrap="square" lIns="82685" tIns="41340" rIns="82685" bIns="41340" numCol="1" spcCol="0" rtlCol="0" fromWordArt="0" anchor="ctr" anchorCtr="0" forceAA="0" compatLnSpc="1">
             <a:prstTxWarp prst="textNoShape">
               <a:avLst/>
             </a:prstTxWarp>
@@ -3589,7 +3589,7 @@
           <a:lstStyle/>
           <a:p>
             <a:pPr algn="ctr"/>
-            <a:endParaRPr lang="zh-TW" altLang="en-US" sz="2369"/>
+            <a:endParaRPr lang="zh-TW" altLang="en-US" sz="1630"/>
           </a:p>
         </p:txBody>
       </p:sp>
@@ -3614,8 +3614,8 @@
         </p:blipFill>
         <p:spPr>
           <a:xfrm>
-            <a:off x="8059889" y="4919626"/>
-            <a:ext cx="2804949" cy="1222725"/>
+            <a:off x="5544453" y="3968170"/>
+            <a:ext cx="1929543" cy="841120"/>
           </a:xfrm>
           <a:prstGeom prst="rect">
             <a:avLst/>
@@ -3636,8 +3636,8 @@
         </p:nvSpPr>
         <p:spPr>
           <a:xfrm rot="10800000">
-            <a:off x="11791065" y="4692434"/>
-            <a:ext cx="1953163" cy="2599285"/>
+            <a:off x="8111151" y="3811883"/>
+            <a:ext cx="1343594" cy="1788065"/>
           </a:xfrm>
           <a:prstGeom prst="triangle">
             <a:avLst/>
@@ -3668,7 +3668,7 @@
           </a:fontRef>
         </p:style>
         <p:txBody>
-          <a:bodyPr rot="0" spcFirstLastPara="0" vertOverflow="overflow" horzOverflow="overflow" vert="horz" wrap="square" lIns="120198" tIns="60096" rIns="120198" bIns="60096" numCol="1" spcCol="0" rtlCol="0" fromWordArt="0" anchor="ctr" anchorCtr="0" forceAA="0" compatLnSpc="1">
+          <a:bodyPr rot="0" spcFirstLastPara="0" vertOverflow="overflow" horzOverflow="overflow" vert="horz" wrap="square" lIns="82685" tIns="41340" rIns="82685" bIns="41340" numCol="1" spcCol="0" rtlCol="0" fromWordArt="0" anchor="ctr" anchorCtr="0" forceAA="0" compatLnSpc="1">
             <a:prstTxWarp prst="textNoShape">
               <a:avLst/>
             </a:prstTxWarp>
@@ -3677,7 +3677,7 @@
           <a:lstStyle/>
           <a:p>
             <a:pPr algn="ctr"/>
-            <a:endParaRPr lang="zh-TW" altLang="en-US" sz="2369"/>
+            <a:endParaRPr lang="zh-TW" altLang="en-US" sz="1630"/>
           </a:p>
         </p:txBody>
       </p:sp>
@@ -3697,8 +3697,8 @@
         </p:nvCxnSpPr>
         <p:spPr>
           <a:xfrm flipV="1">
-            <a:off x="9499172" y="4990437"/>
-            <a:ext cx="1189278" cy="2329407"/>
+            <a:off x="6534543" y="4016881"/>
+            <a:ext cx="818112" cy="1602414"/>
           </a:xfrm>
           <a:prstGeom prst="straightConnector1">
             <a:avLst/>
@@ -3742,8 +3742,8 @@
         </p:nvCxnSpPr>
         <p:spPr>
           <a:xfrm flipV="1">
-            <a:off x="12783195" y="6198607"/>
-            <a:ext cx="74467" cy="1121235"/>
+            <a:off x="8793644" y="4847989"/>
+            <a:ext cx="51226" cy="771305"/>
           </a:xfrm>
           <a:prstGeom prst="straightConnector1">
             <a:avLst/>
@@ -3792,8 +3792,8 @@
         </p:blipFill>
         <p:spPr>
           <a:xfrm rot="10800000">
-            <a:off x="11350361" y="7258683"/>
-            <a:ext cx="2772340" cy="1198426"/>
+            <a:off x="7807989" y="5577222"/>
+            <a:ext cx="1907111" cy="824405"/>
           </a:xfrm>
           <a:prstGeom prst="rect">
             <a:avLst/>
@@ -3821,8 +3821,8 @@
         </p:blipFill>
         <p:spPr>
           <a:xfrm>
-            <a:off x="11334035" y="4919626"/>
-            <a:ext cx="2804949" cy="1222725"/>
+            <a:off x="7796759" y="3968170"/>
+            <a:ext cx="1929543" cy="841120"/>
           </a:xfrm>
           <a:prstGeom prst="rect">
             <a:avLst/>
@@ -3850,8 +3850,8 @@
         </p:blipFill>
         <p:spPr>
           <a:xfrm>
-            <a:off x="11339476" y="4397455"/>
-            <a:ext cx="2794085" cy="1198426"/>
+            <a:off x="7800502" y="3608965"/>
+            <a:ext cx="1922069" cy="824405"/>
           </a:xfrm>
           <a:prstGeom prst="rect">
             <a:avLst/>
@@ -3872,8 +3872,8 @@
         </p:nvSpPr>
         <p:spPr>
           <a:xfrm>
-            <a:off x="12646947" y="7192271"/>
-            <a:ext cx="236607" cy="236607"/>
+            <a:off x="8699920" y="5531537"/>
+            <a:ext cx="162763" cy="162763"/>
           </a:xfrm>
           <a:prstGeom prst="ellipse">
             <a:avLst/>
@@ -3908,7 +3908,7 @@
           <a:lstStyle/>
           <a:p>
             <a:pPr algn="ctr"/>
-            <a:endParaRPr lang="zh-TW" altLang="en-US" sz="2369" dirty="0"/>
+            <a:endParaRPr lang="zh-TW" altLang="en-US" sz="1630" dirty="0"/>
           </a:p>
         </p:txBody>
       </p:sp>
@@ -3926,8 +3926,8 @@
         </p:nvSpPr>
         <p:spPr>
           <a:xfrm>
-            <a:off x="12750468" y="5944386"/>
-            <a:ext cx="236607" cy="236607"/>
+            <a:off x="8771133" y="4673109"/>
+            <a:ext cx="162763" cy="162763"/>
           </a:xfrm>
           <a:prstGeom prst="ellipse">
             <a:avLst/>
@@ -3962,7 +3962,7 @@
           <a:lstStyle/>
           <a:p>
             <a:pPr algn="ctr"/>
-            <a:endParaRPr lang="zh-TW" altLang="en-US" sz="2369" dirty="0"/>
+            <a:endParaRPr lang="zh-TW" altLang="en-US" sz="1630" dirty="0"/>
           </a:p>
         </p:txBody>
       </p:sp>
@@ -3980,8 +3980,8 @@
         </p:nvSpPr>
         <p:spPr>
           <a:xfrm>
-            <a:off x="4809917" y="3746964"/>
-            <a:ext cx="2962561" cy="821507"/>
+            <a:off x="3308776" y="3161488"/>
+            <a:ext cx="2037965" cy="594009"/>
           </a:xfrm>
           <a:prstGeom prst="rect">
             <a:avLst/>
@@ -3996,7 +3996,7 @@
           <a:p>
             <a:pPr algn="ctr"/>
             <a:r>
-              <a:rPr lang="en-US" altLang="zh-TW" sz="2369" dirty="0">
+              <a:rPr lang="en-US" altLang="zh-TW" sz="1630" dirty="0">
                 <a:latin typeface="Times New Roman" panose="02020603050405020304" pitchFamily="18" charset="0"/>
                 <a:cs typeface="Times New Roman" panose="02020603050405020304" pitchFamily="18" charset="0"/>
               </a:rPr>
@@ -4006,7 +4006,7 @@
           <a:p>
             <a:pPr algn="ctr"/>
             <a:r>
-              <a:rPr lang="en-US" altLang="zh-TW" sz="2369" dirty="0">
+              <a:rPr lang="en-US" altLang="zh-TW" sz="1630" dirty="0">
                 <a:latin typeface="Times New Roman" panose="02020603050405020304" pitchFamily="18" charset="0"/>
                 <a:cs typeface="Times New Roman" panose="02020603050405020304" pitchFamily="18" charset="0"/>
               </a:rPr>
@@ -4029,8 +4029,8 @@
         </p:nvSpPr>
         <p:spPr>
           <a:xfrm>
-            <a:off x="11241711" y="3746964"/>
-            <a:ext cx="2962561" cy="821507"/>
+            <a:off x="7733249" y="3161488"/>
+            <a:ext cx="2037965" cy="594009"/>
           </a:xfrm>
           <a:prstGeom prst="rect">
             <a:avLst/>
@@ -4045,7 +4045,7 @@
           <a:p>
             <a:pPr algn="ctr"/>
             <a:r>
-              <a:rPr lang="en-US" altLang="zh-TW" sz="2369" dirty="0">
+              <a:rPr lang="en-US" altLang="zh-TW" sz="1630" dirty="0">
                 <a:latin typeface="Times New Roman" panose="02020603050405020304" pitchFamily="18" charset="0"/>
                 <a:cs typeface="Times New Roman" panose="02020603050405020304" pitchFamily="18" charset="0"/>
               </a:rPr>
@@ -4055,13 +4055,13 @@
           <a:p>
             <a:pPr algn="ctr"/>
             <a:r>
-              <a:rPr lang="en-US" altLang="zh-TW" sz="2369" dirty="0">
+              <a:rPr lang="en-US" altLang="zh-TW" sz="1630" dirty="0">
                 <a:latin typeface="Times New Roman" panose="02020603050405020304" pitchFamily="18" charset="0"/>
                 <a:cs typeface="Times New Roman" panose="02020603050405020304" pitchFamily="18" charset="0"/>
               </a:rPr>
               <a:t>DX </a:t>
             </a:r>
-            <a:endParaRPr lang="zh-TW" altLang="en-US" sz="2369" dirty="0">
+            <a:endParaRPr lang="zh-TW" altLang="en-US" sz="1630" dirty="0">
               <a:latin typeface="Times New Roman" panose="02020603050405020304" pitchFamily="18" charset="0"/>
               <a:cs typeface="Times New Roman" panose="02020603050405020304" pitchFamily="18" charset="0"/>
             </a:endParaRPr>
@@ -4089,8 +4089,8 @@
         </p:blipFill>
         <p:spPr>
           <a:xfrm rot="10800000">
-            <a:off x="8076213" y="7258683"/>
-            <a:ext cx="2772340" cy="1198426"/>
+            <a:off x="5555682" y="5577222"/>
+            <a:ext cx="1907111" cy="824405"/>
           </a:xfrm>
           <a:prstGeom prst="rect">
             <a:avLst/>
@@ -4118,8 +4118,8 @@
         </p:blipFill>
         <p:spPr>
           <a:xfrm>
-            <a:off x="8065328" y="4397455"/>
-            <a:ext cx="2794085" cy="1198426"/>
+            <a:off x="5548194" y="3608965"/>
+            <a:ext cx="1922069" cy="824405"/>
           </a:xfrm>
           <a:prstGeom prst="rect">
             <a:avLst/>
@@ -4140,8 +4140,8 @@
         </p:nvSpPr>
         <p:spPr>
           <a:xfrm>
-            <a:off x="9372798" y="7192271"/>
-            <a:ext cx="236607" cy="236607"/>
+            <a:off x="6447612" y="5531537"/>
+            <a:ext cx="162763" cy="162763"/>
           </a:xfrm>
           <a:prstGeom prst="ellipse">
             <a:avLst/>
@@ -4176,7 +4176,7 @@
           <a:lstStyle/>
           <a:p>
             <a:pPr algn="ctr"/>
-            <a:endParaRPr lang="zh-TW" altLang="en-US" sz="2369" dirty="0"/>
+            <a:endParaRPr lang="zh-TW" altLang="en-US" sz="1630" dirty="0"/>
           </a:p>
         </p:txBody>
       </p:sp>
@@ -4194,8 +4194,8 @@
         </p:nvSpPr>
         <p:spPr>
           <a:xfrm>
-            <a:off x="10579309" y="4700278"/>
-            <a:ext cx="236607" cy="236607"/>
+            <a:off x="7277578" y="3817279"/>
+            <a:ext cx="162763" cy="162763"/>
           </a:xfrm>
           <a:prstGeom prst="ellipse">
             <a:avLst/>
@@ -4230,7 +4230,7 @@
           <a:lstStyle/>
           <a:p>
             <a:pPr algn="ctr"/>
-            <a:endParaRPr lang="zh-TW" altLang="en-US" sz="2369" dirty="0"/>
+            <a:endParaRPr lang="zh-TW" altLang="en-US" sz="1630" dirty="0"/>
           </a:p>
         </p:txBody>
       </p:sp>
@@ -4248,8 +4248,8 @@
         </p:nvSpPr>
         <p:spPr>
           <a:xfrm>
-            <a:off x="7661112" y="3746964"/>
-            <a:ext cx="3575429" cy="821507"/>
+            <a:off x="5270131" y="3161488"/>
+            <a:ext cx="2459561" cy="594009"/>
           </a:xfrm>
           <a:prstGeom prst="rect">
             <a:avLst/>
@@ -4264,7 +4264,7 @@
           <a:p>
             <a:pPr algn="ctr"/>
             <a:r>
-              <a:rPr lang="en-US" altLang="zh-TW" sz="2369" dirty="0">
+              <a:rPr lang="en-US" altLang="zh-TW" sz="1630" dirty="0">
                 <a:latin typeface="Times New Roman" panose="02020603050405020304" pitchFamily="18" charset="0"/>
                 <a:cs typeface="Times New Roman" panose="02020603050405020304" pitchFamily="18" charset="0"/>
               </a:rPr>
@@ -4274,13 +4274,13 @@
           <a:p>
             <a:pPr algn="ctr"/>
             <a:r>
-              <a:rPr lang="en-US" altLang="zh-TW" sz="2369" dirty="0">
+              <a:rPr lang="en-US" altLang="zh-TW" sz="1630" dirty="0">
                 <a:latin typeface="Times New Roman" panose="02020603050405020304" pitchFamily="18" charset="0"/>
                 <a:cs typeface="Times New Roman" panose="02020603050405020304" pitchFamily="18" charset="0"/>
               </a:rPr>
               <a:t>DX </a:t>
             </a:r>
-            <a:endParaRPr lang="zh-TW" altLang="en-US" sz="2369" dirty="0">
+            <a:endParaRPr lang="zh-TW" altLang="en-US" sz="1630" dirty="0">
               <a:latin typeface="Times New Roman" panose="02020603050405020304" pitchFamily="18" charset="0"/>
               <a:cs typeface="Times New Roman" panose="02020603050405020304" pitchFamily="18" charset="0"/>
             </a:endParaRPr>
@@ -4303,8 +4303,8 @@
         </p:nvCxnSpPr>
         <p:spPr>
           <a:xfrm>
-            <a:off x="11271847" y="8542426"/>
-            <a:ext cx="3082661" cy="0"/>
+            <a:off x="7753979" y="6460317"/>
+            <a:ext cx="2120583" cy="0"/>
           </a:xfrm>
           <a:prstGeom prst="straightConnector1">
             <a:avLst/>
@@ -4344,8 +4344,8 @@
         </p:nvCxnSpPr>
         <p:spPr>
           <a:xfrm>
-            <a:off x="7984984" y="8542426"/>
-            <a:ext cx="3082661" cy="0"/>
+            <a:off x="5492925" y="6460317"/>
+            <a:ext cx="2120583" cy="0"/>
           </a:xfrm>
           <a:prstGeom prst="straightConnector1">
             <a:avLst/>
@@ -4385,8 +4385,8 @@
         </p:nvCxnSpPr>
         <p:spPr>
           <a:xfrm>
-            <a:off x="4569199" y="8542426"/>
-            <a:ext cx="3209467" cy="0"/>
+            <a:off x="3143184" y="6460317"/>
+            <a:ext cx="2207813" cy="0"/>
           </a:xfrm>
           <a:prstGeom prst="straightConnector1">
             <a:avLst/>
@@ -4424,8 +4424,8 @@
         </p:nvSpPr>
         <p:spPr>
           <a:xfrm>
-            <a:off x="4584665" y="4141184"/>
-            <a:ext cx="236362" cy="545307"/>
+            <a:off x="3153823" y="3432674"/>
+            <a:ext cx="162595" cy="375120"/>
           </a:xfrm>
           <a:prstGeom prst="upArrow">
             <a:avLst>
@@ -4461,7 +4461,7 @@
           <a:lstStyle/>
           <a:p>
             <a:pPr algn="ctr"/>
-            <a:endParaRPr lang="zh-TW" altLang="en-US" sz="2369" dirty="0"/>
+            <a:endParaRPr lang="zh-TW" altLang="en-US" sz="1630" dirty="0"/>
           </a:p>
         </p:txBody>
       </p:sp>
@@ -4479,8 +4479,8 @@
         </p:nvSpPr>
         <p:spPr>
           <a:xfrm rot="10800000">
-            <a:off x="4584665" y="4865698"/>
-            <a:ext cx="236362" cy="545307"/>
+            <a:off x="3153823" y="3931072"/>
+            <a:ext cx="162595" cy="375120"/>
           </a:xfrm>
           <a:prstGeom prst="upArrow">
             <a:avLst>
@@ -4516,7 +4516,7 @@
           <a:lstStyle/>
           <a:p>
             <a:pPr algn="ctr"/>
-            <a:endParaRPr lang="zh-TW" altLang="en-US" sz="2369"/>
+            <a:endParaRPr lang="zh-TW" altLang="en-US" sz="1630"/>
           </a:p>
         </p:txBody>
       </p:sp>
@@ -4534,8 +4534,8 @@
         </p:nvSpPr>
         <p:spPr>
           <a:xfrm>
-            <a:off x="4584665" y="7877926"/>
-            <a:ext cx="236362" cy="545307"/>
+            <a:off x="3153823" y="6003204"/>
+            <a:ext cx="162595" cy="375120"/>
           </a:xfrm>
           <a:prstGeom prst="upArrow">
             <a:avLst>
@@ -4571,7 +4571,7 @@
           <a:lstStyle/>
           <a:p>
             <a:pPr algn="ctr"/>
-            <a:endParaRPr lang="zh-TW" altLang="en-US" sz="2369"/>
+            <a:endParaRPr lang="zh-TW" altLang="en-US" sz="1630"/>
           </a:p>
         </p:txBody>
       </p:sp>
@@ -4596,8 +4596,8 @@
         </p:blipFill>
         <p:spPr>
           <a:xfrm>
-            <a:off x="4830496" y="4919626"/>
-            <a:ext cx="2804949" cy="1222725"/>
+            <a:off x="3322932" y="3968170"/>
+            <a:ext cx="1929543" cy="841120"/>
           </a:xfrm>
           <a:prstGeom prst="rect">
             <a:avLst/>
@@ -4625,8 +4625,8 @@
         </p:blipFill>
         <p:spPr>
           <a:xfrm rot="10800000">
-            <a:off x="4846819" y="7258683"/>
-            <a:ext cx="2772340" cy="1198426"/>
+            <a:off x="3334160" y="5577222"/>
+            <a:ext cx="1907111" cy="824405"/>
           </a:xfrm>
           <a:prstGeom prst="rect">
             <a:avLst/>
@@ -4654,8 +4654,8 @@
         </p:blipFill>
         <p:spPr>
           <a:xfrm>
-            <a:off x="4835936" y="4397455"/>
-            <a:ext cx="2794085" cy="1198426"/>
+            <a:off x="3326675" y="3608965"/>
+            <a:ext cx="1922069" cy="824405"/>
           </a:xfrm>
           <a:prstGeom prst="rect">
             <a:avLst/>
@@ -4676,8 +4676,8 @@
         </p:nvSpPr>
         <p:spPr>
           <a:xfrm>
-            <a:off x="6671434" y="5278014"/>
-            <a:ext cx="236607" cy="236607"/>
+            <a:off x="4589326" y="4214707"/>
+            <a:ext cx="162763" cy="162763"/>
           </a:xfrm>
           <a:prstGeom prst="ellipse">
             <a:avLst/>
@@ -4712,7 +4712,7 @@
           <a:lstStyle/>
           <a:p>
             <a:pPr algn="ctr"/>
-            <a:endParaRPr lang="zh-TW" altLang="en-US" sz="2369" dirty="0"/>
+            <a:endParaRPr lang="zh-TW" altLang="en-US" sz="1630" dirty="0"/>
           </a:p>
         </p:txBody>
       </p:sp>
@@ -4732,8 +4732,8 @@
         </p:nvCxnSpPr>
         <p:spPr>
           <a:xfrm flipV="1">
-            <a:off x="6260775" y="5491553"/>
-            <a:ext cx="507980" cy="1822552"/>
+            <a:off x="4306830" y="4361602"/>
+            <a:ext cx="349443" cy="1253745"/>
           </a:xfrm>
           <a:prstGeom prst="straightConnector1">
             <a:avLst/>
@@ -4775,8 +4775,8 @@
         </p:nvSpPr>
         <p:spPr>
           <a:xfrm>
-            <a:off x="6143404" y="7192271"/>
-            <a:ext cx="236607" cy="236607"/>
+            <a:off x="4226090" y="5531537"/>
+            <a:ext cx="162763" cy="162763"/>
           </a:xfrm>
           <a:prstGeom prst="ellipse">
             <a:avLst/>
@@ -4811,7 +4811,7 @@
           <a:lstStyle/>
           <a:p>
             <a:pPr algn="ctr"/>
-            <a:endParaRPr lang="zh-TW" altLang="en-US" sz="2369" dirty="0"/>
+            <a:endParaRPr lang="zh-TW" altLang="en-US" sz="1630" dirty="0"/>
           </a:p>
         </p:txBody>
       </p:sp>
@@ -4829,8 +4829,8 @@
         </p:nvSpPr>
         <p:spPr>
           <a:xfrm>
-            <a:off x="4208181" y="6328492"/>
-            <a:ext cx="1834236" cy="456920"/>
+            <a:off x="2894837" y="4937338"/>
+            <a:ext cx="1261783" cy="343171"/>
           </a:xfrm>
           <a:prstGeom prst="rect">
             <a:avLst/>
@@ -4845,13 +4845,13 @@
           <a:p>
             <a:pPr algn="ctr"/>
             <a:r>
-              <a:rPr lang="en-US" altLang="zh-TW" sz="2369" dirty="0">
+              <a:rPr lang="en-US" altLang="zh-TW" sz="1630" dirty="0">
                 <a:latin typeface="Times New Roman" panose="02020603050405020304" pitchFamily="18" charset="0"/>
                 <a:cs typeface="Times New Roman" panose="02020603050405020304" pitchFamily="18" charset="0"/>
               </a:rPr>
               <a:t>Light-cone</a:t>
             </a:r>
-            <a:endParaRPr lang="zh-TW" altLang="en-US" sz="2369" dirty="0">
+            <a:endParaRPr lang="zh-TW" altLang="en-US" sz="1630" dirty="0">
               <a:latin typeface="Times New Roman" panose="02020603050405020304" pitchFamily="18" charset="0"/>
               <a:cs typeface="Times New Roman" panose="02020603050405020304" pitchFamily="18" charset="0"/>
             </a:endParaRPr>
@@ -4874,8 +4874,8 @@
             </p:nvSpPr>
             <p:spPr>
               <a:xfrm>
-                <a:off x="4202943" y="8314071"/>
-                <a:ext cx="482563" cy="456920"/>
+                <a:off x="2891233" y="6303231"/>
+                <a:ext cx="331958" cy="343171"/>
               </a:xfrm>
               <a:prstGeom prst="rect">
                 <a:avLst/>
@@ -4896,7 +4896,7 @@
                     </m:oMathParaPr>
                     <m:oMath xmlns:m="http://schemas.openxmlformats.org/officeDocument/2006/math">
                       <m:r>
-                        <a:rPr lang="en-US" altLang="zh-TW" sz="2369" b="1" i="1" dirty="0">
+                        <a:rPr lang="en-US" altLang="zh-TW" sz="1630" b="1" i="1" dirty="0">
                           <a:latin typeface="Cambria Math" panose="02040503050406030204" pitchFamily="18" charset="0"/>
                           <a:cs typeface="Times New Roman" panose="02020603050405020304" pitchFamily="18" charset="0"/>
                         </a:rPr>
@@ -4905,7 +4905,7 @@
                     </m:oMath>
                   </m:oMathPara>
                 </a14:m>
-                <a:endParaRPr lang="zh-TW" altLang="en-US" sz="2369" b="1" dirty="0">
+                <a:endParaRPr lang="zh-TW" altLang="en-US" sz="1630" b="1" dirty="0">
                   <a:latin typeface="Times New Roman" panose="02020603050405020304" pitchFamily="18" charset="0"/>
                   <a:cs typeface="Times New Roman" panose="02020603050405020304" pitchFamily="18" charset="0"/>
                 </a:endParaRPr>
@@ -4930,8 +4930,8 @@
             </p:nvSpPr>
             <p:spPr>
               <a:xfrm>
-                <a:off x="4202943" y="8314071"/>
-                <a:ext cx="482563" cy="456920"/>
+                <a:off x="2891233" y="6303231"/>
+                <a:ext cx="331958" cy="343171"/>
               </a:xfrm>
               <a:prstGeom prst="rect">
                 <a:avLst/>
@@ -4990,10 +4990,10 @@
       </p:grpSpPr>
       <p:grpSp>
         <p:nvGrpSpPr>
-          <p:cNvPr id="4" name="群組 3">
+          <p:cNvPr id="5" name="群組 4">
             <a:extLst>
               <a:ext uri="{FF2B5EF4-FFF2-40B4-BE49-F238E27FC236}">
-                <a16:creationId xmlns:a16="http://schemas.microsoft.com/office/drawing/2014/main" id="{6051CA0F-F3E3-4612-9D81-94BAE86CB835}"/>
+                <a16:creationId xmlns:a16="http://schemas.microsoft.com/office/drawing/2014/main" id="{732034BB-93A0-4BCC-A054-6815B502CBAD}"/>
               </a:ext>
             </a:extLst>
           </p:cNvPr>
@@ -5002,10 +5002,10 @@
         </p:nvGrpSpPr>
         <p:grpSpPr>
           <a:xfrm>
-            <a:off x="-47949" y="-43981"/>
-            <a:ext cx="14496110" cy="3755087"/>
-            <a:chOff x="246707" y="57509"/>
-            <a:chExt cx="13409421" cy="3473589"/>
+            <a:off x="-60349" y="-13774"/>
+            <a:ext cx="9951773" cy="3088248"/>
+            <a:chOff x="-60349" y="2160359"/>
+            <a:chExt cx="9951773" cy="3088248"/>
           </a:xfrm>
         </p:grpSpPr>
         <p:sp>
@@ -5022,8 +5022,8 @@
           </p:nvSpPr>
           <p:spPr>
             <a:xfrm>
-              <a:off x="291061" y="69351"/>
-              <a:ext cx="13301113" cy="3461747"/>
+              <a:off x="-1" y="2169165"/>
+              <a:ext cx="9891425" cy="2574343"/>
             </a:xfrm>
             <a:prstGeom prst="rect">
               <a:avLst/>
@@ -5052,7 +5052,7 @@
             </a:fontRef>
           </p:style>
           <p:txBody>
-            <a:bodyPr rot="0" spcFirstLastPara="0" vertOverflow="overflow" horzOverflow="overflow" vert="horz" wrap="square" lIns="98850" tIns="49425" rIns="98850" bIns="49425" numCol="1" spcCol="0" rtlCol="0" fromWordArt="0" anchor="ctr" anchorCtr="0" forceAA="0" compatLnSpc="1">
+            <a:bodyPr rot="0" spcFirstLastPara="0" vertOverflow="overflow" horzOverflow="overflow" vert="horz" wrap="square" lIns="68000" tIns="34000" rIns="68000" bIns="34000" numCol="1" spcCol="0" rtlCol="0" fromWordArt="0" anchor="ctr" anchorCtr="0" forceAA="0" compatLnSpc="1">
               <a:prstTxWarp prst="textNoShape">
                 <a:avLst/>
               </a:prstTxWarp>
@@ -5061,7 +5061,7 @@
             <a:lstStyle/>
             <a:p>
               <a:pPr algn="ctr"/>
-              <a:endParaRPr lang="zh-TW" altLang="en-US" sz="1945" dirty="0"/>
+              <a:endParaRPr lang="zh-TW" altLang="en-US" sz="2000" dirty="0"/>
             </a:p>
           </p:txBody>
         </p:sp>
@@ -5079,10 +5079,10 @@
           </p:nvGrpSpPr>
           <p:grpSpPr>
             <a:xfrm>
-              <a:off x="419229" y="525279"/>
-              <a:ext cx="6623348" cy="2588128"/>
-              <a:chOff x="969907" y="1589412"/>
-              <a:chExt cx="5802804" cy="2351821"/>
+              <a:off x="-60349" y="2813019"/>
+              <a:ext cx="5069851" cy="1924672"/>
+              <a:chOff x="799820" y="1920474"/>
+              <a:chExt cx="5972891" cy="2351821"/>
             </a:xfrm>
           </p:grpSpPr>
           <p:pic>
@@ -5112,7 +5112,7 @@
             </p:blipFill>
             <p:spPr>
               <a:xfrm>
-                <a:off x="1197695" y="1589412"/>
+                <a:off x="1197695" y="1920474"/>
                 <a:ext cx="5575016" cy="2351821"/>
               </a:xfrm>
               <a:prstGeom prst="rect">
@@ -5136,8 +5136,8 @@
                 </p:nvSpPr>
                 <p:spPr>
                   <a:xfrm rot="16200000">
-                    <a:off x="350793" y="2606620"/>
-                    <a:ext cx="1555631" cy="317404"/>
+                    <a:off x="24997" y="2764137"/>
+                    <a:ext cx="2021024" cy="471377"/>
                   </a:xfrm>
                   <a:prstGeom prst="rect">
                     <a:avLst/>
@@ -5152,7 +5152,7 @@
                   <a:p>
                     <a:pPr algn="ctr"/>
                     <a:r>
-                      <a:rPr lang="en-US" altLang="zh-TW" sz="1945" dirty="0">
+                      <a:rPr lang="en-US" altLang="zh-TW" sz="2000" dirty="0">
                         <a:latin typeface="Times New Roman" panose="02020603050405020304" pitchFamily="18" charset="0"/>
                         <a:cs typeface="Times New Roman" panose="02020603050405020304" pitchFamily="18" charset="0"/>
                       </a:rPr>
@@ -5164,7 +5164,7 @@
                           <m:rPr>
                             <m:sty m:val="p"/>
                           </m:rPr>
-                          <a:rPr lang="en-US" altLang="zh-TW" sz="1945" dirty="0">
+                          <a:rPr lang="en-US" altLang="zh-TW" sz="2000" dirty="0">
                             <a:latin typeface="Cambria Math" panose="02040503050406030204" pitchFamily="18" charset="0"/>
                           </a:rPr>
                           <m:t>eV</m:t>
@@ -5172,13 +5172,13 @@
                       </m:oMath>
                     </a14:m>
                     <a:r>
-                      <a:rPr lang="en-US" altLang="zh-TW" sz="1945" dirty="0">
+                      <a:rPr lang="en-US" altLang="zh-TW" sz="2000" dirty="0">
                         <a:latin typeface="Times New Roman" panose="02020603050405020304" pitchFamily="18" charset="0"/>
                         <a:cs typeface="Times New Roman" panose="02020603050405020304" pitchFamily="18" charset="0"/>
                       </a:rPr>
                       <a:t>) </a:t>
                     </a:r>
-                    <a:endParaRPr lang="zh-TW" altLang="en-US" sz="1945" dirty="0">
+                    <a:endParaRPr lang="zh-TW" altLang="en-US" sz="2000" dirty="0">
                       <a:latin typeface="Times New Roman" panose="02020603050405020304" pitchFamily="18" charset="0"/>
                       <a:cs typeface="Times New Roman" panose="02020603050405020304" pitchFamily="18" charset="0"/>
                     </a:endParaRPr>
@@ -5203,8 +5203,8 @@
                 </p:nvSpPr>
                 <p:spPr>
                   <a:xfrm rot="16200000">
-                    <a:off x="350793" y="2606620"/>
-                    <a:ext cx="1555631" cy="317404"/>
+                    <a:off x="24997" y="2764137"/>
+                    <a:ext cx="2021024" cy="471377"/>
                   </a:xfrm>
                   <a:prstGeom prst="rect">
                     <a:avLst/>
@@ -5212,7 +5212,7 @@
                   <a:blipFill>
                     <a:blip r:embed="rId3"/>
                     <a:stretch>
-                      <a:fillRect l="-9375" r="-26563"/>
+                      <a:fillRect l="-7576" t="-369" r="-25758"/>
                     </a:stretch>
                   </a:blipFill>
                 </p:spPr>
@@ -5246,8 +5246,8 @@
           </p:nvSpPr>
           <p:spPr>
             <a:xfrm>
-              <a:off x="246707" y="57509"/>
-              <a:ext cx="466725" cy="362287"/>
+              <a:off x="-32986" y="2160359"/>
+              <a:ext cx="484541" cy="400110"/>
             </a:xfrm>
             <a:prstGeom prst="rect">
               <a:avLst/>
@@ -5261,13 +5261,13 @@
             <a:lstStyle/>
             <a:p>
               <a:r>
-                <a:rPr lang="en-US" altLang="zh-TW" sz="1945" dirty="0">
+                <a:rPr lang="en-US" altLang="zh-TW" sz="2000" dirty="0">
                   <a:latin typeface="Times New Roman" panose="02020603050405020304" pitchFamily="18" charset="0"/>
                   <a:cs typeface="Times New Roman" panose="02020603050405020304" pitchFamily="18" charset="0"/>
                 </a:rPr>
                 <a:t>(a)</a:t>
               </a:r>
-              <a:endParaRPr lang="zh-TW" altLang="en-US" sz="1945" dirty="0">
+              <a:endParaRPr lang="zh-TW" altLang="en-US" sz="2000" dirty="0">
                 <a:latin typeface="Times New Roman" panose="02020603050405020304" pitchFamily="18" charset="0"/>
                 <a:cs typeface="Times New Roman" panose="02020603050405020304" pitchFamily="18" charset="0"/>
               </a:endParaRPr>
@@ -5288,8 +5288,8 @@
           </p:nvSpPr>
           <p:spPr>
             <a:xfrm>
-              <a:off x="6909647" y="57509"/>
-              <a:ext cx="466725" cy="362287"/>
+              <a:off x="4741314" y="2160359"/>
+              <a:ext cx="484541" cy="400110"/>
             </a:xfrm>
             <a:prstGeom prst="rect">
               <a:avLst/>
@@ -5303,13 +5303,586 @@
             <a:lstStyle/>
             <a:p>
               <a:r>
-                <a:rPr lang="en-US" altLang="zh-TW" sz="1945" dirty="0">
+                <a:rPr lang="en-US" altLang="zh-TW" sz="2000" dirty="0">
                   <a:latin typeface="Times New Roman" panose="02020603050405020304" pitchFamily="18" charset="0"/>
                   <a:cs typeface="Times New Roman" panose="02020603050405020304" pitchFamily="18" charset="0"/>
                 </a:rPr>
                 <a:t>(b)</a:t>
               </a:r>
-              <a:endParaRPr lang="zh-TW" altLang="en-US" sz="1945" dirty="0">
+              <a:endParaRPr lang="zh-TW" altLang="en-US" sz="2000" dirty="0">
+                <a:latin typeface="Times New Roman" panose="02020603050405020304" pitchFamily="18" charset="0"/>
+                <a:cs typeface="Times New Roman" panose="02020603050405020304" pitchFamily="18" charset="0"/>
+              </a:endParaRPr>
+            </a:p>
+          </p:txBody>
+        </p:sp>
+        <p:sp>
+          <p:nvSpPr>
+            <p:cNvPr id="11" name="等腰三角形 10">
+              <a:extLst>
+                <a:ext uri="{FF2B5EF4-FFF2-40B4-BE49-F238E27FC236}">
+                  <a16:creationId xmlns:a16="http://schemas.microsoft.com/office/drawing/2014/main" id="{D4FD763D-E995-46EE-AB33-9DEFB5738E22}"/>
+                </a:ext>
+              </a:extLst>
+            </p:cNvPr>
+            <p:cNvSpPr/>
+            <p:nvPr/>
+          </p:nvSpPr>
+          <p:spPr>
+            <a:xfrm rot="10800000">
+              <a:off x="5321549" y="2932396"/>
+              <a:ext cx="981315" cy="1305939"/>
+            </a:xfrm>
+            <a:prstGeom prst="triangle">
+              <a:avLst/>
+            </a:prstGeom>
+            <a:solidFill>
+              <a:srgbClr val="FFC000">
+                <a:alpha val="30196"/>
+              </a:srgbClr>
+            </a:solidFill>
+            <a:ln>
+              <a:noFill/>
+            </a:ln>
+          </p:spPr>
+          <p:style>
+            <a:lnRef idx="2">
+              <a:schemeClr val="accent4">
+                <a:shade val="50000"/>
+              </a:schemeClr>
+            </a:lnRef>
+            <a:fillRef idx="1">
+              <a:schemeClr val="accent4"/>
+            </a:fillRef>
+            <a:effectRef idx="0">
+              <a:schemeClr val="accent4"/>
+            </a:effectRef>
+            <a:fontRef idx="minor">
+              <a:schemeClr val="lt1"/>
+            </a:fontRef>
+          </p:style>
+          <p:txBody>
+            <a:bodyPr rot="0" spcFirstLastPara="0" vertOverflow="overflow" horzOverflow="overflow" vert="horz" wrap="square" lIns="60391" tIns="30195" rIns="60391" bIns="30195" numCol="1" spcCol="0" rtlCol="0" fromWordArt="0" anchor="ctr" anchorCtr="0" forceAA="0" compatLnSpc="1">
+              <a:prstTxWarp prst="textNoShape">
+                <a:avLst/>
+              </a:prstTxWarp>
+              <a:noAutofit/>
+            </a:bodyPr>
+            <a:lstStyle/>
+            <a:p>
+              <a:pPr algn="ctr"/>
+              <a:endParaRPr lang="zh-TW" altLang="en-US" sz="2000" dirty="0"/>
+            </a:p>
+          </p:txBody>
+        </p:sp>
+        <p:sp>
+          <p:nvSpPr>
+            <p:cNvPr id="12" name="等腰三角形 11">
+              <a:extLst>
+                <a:ext uri="{FF2B5EF4-FFF2-40B4-BE49-F238E27FC236}">
+                  <a16:creationId xmlns:a16="http://schemas.microsoft.com/office/drawing/2014/main" id="{7D8D11FA-0869-4B5A-9E71-FB37126B003D}"/>
+                </a:ext>
+              </a:extLst>
+            </p:cNvPr>
+            <p:cNvSpPr/>
+            <p:nvPr/>
+          </p:nvSpPr>
+          <p:spPr>
+            <a:xfrm rot="10800000">
+              <a:off x="6943574" y="2932396"/>
+              <a:ext cx="981315" cy="1305939"/>
+            </a:xfrm>
+            <a:prstGeom prst="triangle">
+              <a:avLst/>
+            </a:prstGeom>
+            <a:solidFill>
+              <a:srgbClr val="FFC000">
+                <a:alpha val="30196"/>
+              </a:srgbClr>
+            </a:solidFill>
+            <a:ln>
+              <a:noFill/>
+            </a:ln>
+          </p:spPr>
+          <p:style>
+            <a:lnRef idx="2">
+              <a:schemeClr val="accent4">
+                <a:shade val="50000"/>
+              </a:schemeClr>
+            </a:lnRef>
+            <a:fillRef idx="1">
+              <a:schemeClr val="accent4"/>
+            </a:fillRef>
+            <a:effectRef idx="0">
+              <a:schemeClr val="accent4"/>
+            </a:effectRef>
+            <a:fontRef idx="minor">
+              <a:schemeClr val="lt1"/>
+            </a:fontRef>
+          </p:style>
+          <p:txBody>
+            <a:bodyPr rot="0" spcFirstLastPara="0" vertOverflow="overflow" horzOverflow="overflow" vert="horz" wrap="square" lIns="60391" tIns="30195" rIns="60391" bIns="30195" numCol="1" spcCol="0" rtlCol="0" fromWordArt="0" anchor="ctr" anchorCtr="0" forceAA="0" compatLnSpc="1">
+              <a:prstTxWarp prst="textNoShape">
+                <a:avLst/>
+              </a:prstTxWarp>
+              <a:noAutofit/>
+            </a:bodyPr>
+            <a:lstStyle/>
+            <a:p>
+              <a:pPr algn="ctr"/>
+              <a:endParaRPr lang="zh-TW" altLang="en-US" sz="2000"/>
+            </a:p>
+          </p:txBody>
+        </p:sp>
+        <p:pic>
+          <p:nvPicPr>
+            <p:cNvPr id="13" name="圖片 12">
+              <a:extLst>
+                <a:ext uri="{FF2B5EF4-FFF2-40B4-BE49-F238E27FC236}">
+                  <a16:creationId xmlns:a16="http://schemas.microsoft.com/office/drawing/2014/main" id="{A1A1D0E4-3113-4E04-BD2C-E84A9FD6B53A}"/>
+                </a:ext>
+              </a:extLst>
+            </p:cNvPr>
+            <p:cNvPicPr>
+              <a:picLocks noChangeAspect="1"/>
+            </p:cNvPicPr>
+            <p:nvPr/>
+          </p:nvPicPr>
+          <p:blipFill rotWithShape="1">
+            <a:blip r:embed="rId4"/>
+            <a:srcRect l="7992" t="38920" r="6883"/>
+            <a:stretch/>
+          </p:blipFill>
+          <p:spPr>
+            <a:xfrm>
+              <a:off x="6713953" y="3046536"/>
+              <a:ext cx="1409273" cy="614324"/>
+            </a:xfrm>
+            <a:prstGeom prst="rect">
+              <a:avLst/>
+            </a:prstGeom>
+          </p:spPr>
+        </p:pic>
+        <p:sp>
+          <p:nvSpPr>
+            <p:cNvPr id="14" name="等腰三角形 13">
+              <a:extLst>
+                <a:ext uri="{FF2B5EF4-FFF2-40B4-BE49-F238E27FC236}">
+                  <a16:creationId xmlns:a16="http://schemas.microsoft.com/office/drawing/2014/main" id="{37C85585-0A5E-471F-AB5D-12C07CE68314}"/>
+                </a:ext>
+              </a:extLst>
+            </p:cNvPr>
+            <p:cNvSpPr/>
+            <p:nvPr/>
+          </p:nvSpPr>
+          <p:spPr>
+            <a:xfrm rot="10800000">
+              <a:off x="8580648" y="2932392"/>
+              <a:ext cx="981315" cy="1305941"/>
+            </a:xfrm>
+            <a:prstGeom prst="triangle">
+              <a:avLst/>
+            </a:prstGeom>
+            <a:solidFill>
+              <a:srgbClr val="FFC000">
+                <a:alpha val="30196"/>
+              </a:srgbClr>
+            </a:solidFill>
+            <a:ln>
+              <a:noFill/>
+            </a:ln>
+          </p:spPr>
+          <p:style>
+            <a:lnRef idx="2">
+              <a:schemeClr val="accent4">
+                <a:shade val="50000"/>
+              </a:schemeClr>
+            </a:lnRef>
+            <a:fillRef idx="1">
+              <a:schemeClr val="accent4"/>
+            </a:fillRef>
+            <a:effectRef idx="0">
+              <a:schemeClr val="accent4"/>
+            </a:effectRef>
+            <a:fontRef idx="minor">
+              <a:schemeClr val="lt1"/>
+            </a:fontRef>
+          </p:style>
+          <p:txBody>
+            <a:bodyPr rot="0" spcFirstLastPara="0" vertOverflow="overflow" horzOverflow="overflow" vert="horz" wrap="square" lIns="60391" tIns="30195" rIns="60391" bIns="30195" numCol="1" spcCol="0" rtlCol="0" fromWordArt="0" anchor="ctr" anchorCtr="0" forceAA="0" compatLnSpc="1">
+              <a:prstTxWarp prst="textNoShape">
+                <a:avLst/>
+              </a:prstTxWarp>
+              <a:noAutofit/>
+            </a:bodyPr>
+            <a:lstStyle/>
+            <a:p>
+              <a:pPr algn="ctr"/>
+              <a:endParaRPr lang="zh-TW" altLang="en-US" sz="2000"/>
+            </a:p>
+          </p:txBody>
+        </p:sp>
+        <p:cxnSp>
+          <p:nvCxnSpPr>
+            <p:cNvPr id="15" name="直線單箭頭接點 14">
+              <a:extLst>
+                <a:ext uri="{FF2B5EF4-FFF2-40B4-BE49-F238E27FC236}">
+                  <a16:creationId xmlns:a16="http://schemas.microsoft.com/office/drawing/2014/main" id="{5A56791A-DF91-4039-AEDE-7494E99731B4}"/>
+                </a:ext>
+              </a:extLst>
+            </p:cNvPr>
+            <p:cNvCxnSpPr>
+              <a:cxnSpLocks/>
+            </p:cNvCxnSpPr>
+            <p:nvPr/>
+          </p:nvCxnSpPr>
+          <p:spPr>
+            <a:xfrm flipV="1">
+              <a:off x="7437077" y="3081122"/>
+              <a:ext cx="546524" cy="1171346"/>
+            </a:xfrm>
+            <a:prstGeom prst="straightConnector1">
+              <a:avLst/>
+            </a:prstGeom>
+            <a:ln w="57150">
+              <a:solidFill>
+                <a:srgbClr val="E1B037"/>
+              </a:solidFill>
+              <a:headEnd w="sm" len="sm"/>
+              <a:tailEnd type="triangle" w="med" len="lg"/>
+            </a:ln>
+          </p:spPr>
+          <p:style>
+            <a:lnRef idx="3">
+              <a:schemeClr val="accent4"/>
+            </a:lnRef>
+            <a:fillRef idx="0">
+              <a:schemeClr val="accent4"/>
+            </a:fillRef>
+            <a:effectRef idx="2">
+              <a:schemeClr val="accent4"/>
+            </a:effectRef>
+            <a:fontRef idx="minor">
+              <a:schemeClr val="tx1"/>
+            </a:fontRef>
+          </p:style>
+        </p:cxnSp>
+        <p:cxnSp>
+          <p:nvCxnSpPr>
+            <p:cNvPr id="16" name="直線單箭頭接點 15">
+              <a:extLst>
+                <a:ext uri="{FF2B5EF4-FFF2-40B4-BE49-F238E27FC236}">
+                  <a16:creationId xmlns:a16="http://schemas.microsoft.com/office/drawing/2014/main" id="{9217D97A-A881-407B-8FA1-85936A7A9F29}"/>
+                </a:ext>
+              </a:extLst>
+            </p:cNvPr>
+            <p:cNvCxnSpPr>
+              <a:cxnSpLocks/>
+            </p:cNvCxnSpPr>
+            <p:nvPr/>
+          </p:nvCxnSpPr>
+          <p:spPr>
+            <a:xfrm flipV="1">
+              <a:off x="9079114" y="3689126"/>
+              <a:ext cx="37414" cy="563335"/>
+            </a:xfrm>
+            <a:prstGeom prst="straightConnector1">
+              <a:avLst/>
+            </a:prstGeom>
+            <a:ln w="57150">
+              <a:solidFill>
+                <a:srgbClr val="E1B037"/>
+              </a:solidFill>
+              <a:headEnd w="sm" len="sm"/>
+              <a:tailEnd type="triangle" w="med" len="lg"/>
+            </a:ln>
+          </p:spPr>
+          <p:style>
+            <a:lnRef idx="3">
+              <a:schemeClr val="accent4"/>
+            </a:lnRef>
+            <a:fillRef idx="0">
+              <a:schemeClr val="accent4"/>
+            </a:fillRef>
+            <a:effectRef idx="2">
+              <a:schemeClr val="accent4"/>
+            </a:effectRef>
+            <a:fontRef idx="minor">
+              <a:schemeClr val="tx1"/>
+            </a:fontRef>
+          </p:style>
+        </p:cxnSp>
+        <p:pic>
+          <p:nvPicPr>
+            <p:cNvPr id="17" name="圖片 16">
+              <a:extLst>
+                <a:ext uri="{FF2B5EF4-FFF2-40B4-BE49-F238E27FC236}">
+                  <a16:creationId xmlns:a16="http://schemas.microsoft.com/office/drawing/2014/main" id="{C9538FA4-B484-4874-82E8-2AB2EBE57395}"/>
+                </a:ext>
+              </a:extLst>
+            </p:cNvPr>
+            <p:cNvPicPr>
+              <a:picLocks noChangeAspect="1"/>
+            </p:cNvPicPr>
+            <p:nvPr/>
+          </p:nvPicPr>
+          <p:blipFill rotWithShape="1">
+            <a:blip r:embed="rId5"/>
+            <a:srcRect l="7872" t="40135" r="7992" b="-2"/>
+            <a:stretch/>
+          </p:blipFill>
+          <p:spPr>
+            <a:xfrm rot="10800000">
+              <a:off x="8359225" y="4221735"/>
+              <a:ext cx="1392887" cy="602117"/>
+            </a:xfrm>
+            <a:prstGeom prst="rect">
+              <a:avLst/>
+            </a:prstGeom>
+          </p:spPr>
+        </p:pic>
+        <p:pic>
+          <p:nvPicPr>
+            <p:cNvPr id="18" name="圖片 17">
+              <a:extLst>
+                <a:ext uri="{FF2B5EF4-FFF2-40B4-BE49-F238E27FC236}">
+                  <a16:creationId xmlns:a16="http://schemas.microsoft.com/office/drawing/2014/main" id="{CDBB83D2-DB1E-44AD-B667-D7FF00814FAA}"/>
+                </a:ext>
+              </a:extLst>
+            </p:cNvPr>
+            <p:cNvPicPr>
+              <a:picLocks noChangeAspect="1"/>
+            </p:cNvPicPr>
+            <p:nvPr/>
+          </p:nvPicPr>
+          <p:blipFill rotWithShape="1">
+            <a:blip r:embed="rId4"/>
+            <a:srcRect l="7992" t="38920" r="6883"/>
+            <a:stretch/>
+          </p:blipFill>
+          <p:spPr>
+            <a:xfrm>
+              <a:off x="8351027" y="3046536"/>
+              <a:ext cx="1409271" cy="614325"/>
+            </a:xfrm>
+            <a:prstGeom prst="rect">
+              <a:avLst/>
+            </a:prstGeom>
+          </p:spPr>
+        </p:pic>
+        <p:pic>
+          <p:nvPicPr>
+            <p:cNvPr id="19" name="圖片 18">
+              <a:extLst>
+                <a:ext uri="{FF2B5EF4-FFF2-40B4-BE49-F238E27FC236}">
+                  <a16:creationId xmlns:a16="http://schemas.microsoft.com/office/drawing/2014/main" id="{E4C95218-112C-426D-B969-1129C726731F}"/>
+                </a:ext>
+              </a:extLst>
+            </p:cNvPr>
+            <p:cNvPicPr>
+              <a:picLocks noChangeAspect="1"/>
+            </p:cNvPicPr>
+            <p:nvPr/>
+          </p:nvPicPr>
+          <p:blipFill rotWithShape="1">
+            <a:blip r:embed="rId5"/>
+            <a:srcRect l="7663" t="40135" r="7542" b="-2"/>
+            <a:stretch/>
+          </p:blipFill>
+          <p:spPr>
+            <a:xfrm>
+              <a:off x="8353756" y="2784186"/>
+              <a:ext cx="1403813" cy="602117"/>
+            </a:xfrm>
+            <a:prstGeom prst="rect">
+              <a:avLst/>
+            </a:prstGeom>
+          </p:spPr>
+        </p:pic>
+        <p:sp>
+          <p:nvSpPr>
+            <p:cNvPr id="20" name="橢圓 19">
+              <a:extLst>
+                <a:ext uri="{FF2B5EF4-FFF2-40B4-BE49-F238E27FC236}">
+                  <a16:creationId xmlns:a16="http://schemas.microsoft.com/office/drawing/2014/main" id="{4A6C8352-5329-467E-BB19-769D6657AD37}"/>
+                </a:ext>
+              </a:extLst>
+            </p:cNvPr>
+            <p:cNvSpPr/>
+            <p:nvPr/>
+          </p:nvSpPr>
+          <p:spPr>
+            <a:xfrm>
+              <a:off x="9010663" y="4188367"/>
+              <a:ext cx="118877" cy="118877"/>
+            </a:xfrm>
+            <a:prstGeom prst="ellipse">
+              <a:avLst/>
+            </a:prstGeom>
+            <a:solidFill>
+              <a:schemeClr val="bg1"/>
+            </a:solidFill>
+            <a:ln>
+              <a:solidFill>
+                <a:schemeClr val="tx1"/>
+              </a:solidFill>
+            </a:ln>
+          </p:spPr>
+          <p:style>
+            <a:lnRef idx="2">
+              <a:schemeClr val="accent1">
+                <a:shade val="50000"/>
+              </a:schemeClr>
+            </a:lnRef>
+            <a:fillRef idx="1">
+              <a:schemeClr val="accent1"/>
+            </a:fillRef>
+            <a:effectRef idx="0">
+              <a:schemeClr val="accent1"/>
+            </a:effectRef>
+            <a:fontRef idx="minor">
+              <a:schemeClr val="lt1"/>
+            </a:fontRef>
+          </p:style>
+          <p:txBody>
+            <a:bodyPr rtlCol="0" anchor="ctr"/>
+            <a:lstStyle/>
+            <a:p>
+              <a:pPr algn="ctr"/>
+              <a:endParaRPr lang="zh-TW" altLang="en-US" sz="2000" dirty="0"/>
+            </a:p>
+          </p:txBody>
+        </p:sp>
+        <p:sp>
+          <p:nvSpPr>
+            <p:cNvPr id="21" name="橢圓 20">
+              <a:extLst>
+                <a:ext uri="{FF2B5EF4-FFF2-40B4-BE49-F238E27FC236}">
+                  <a16:creationId xmlns:a16="http://schemas.microsoft.com/office/drawing/2014/main" id="{038FB063-D3C1-40B6-A8F1-F9C76F9C09C9}"/>
+                </a:ext>
+              </a:extLst>
+            </p:cNvPr>
+            <p:cNvSpPr/>
+            <p:nvPr/>
+          </p:nvSpPr>
+          <p:spPr>
+            <a:xfrm>
+              <a:off x="9062674" y="3561401"/>
+              <a:ext cx="118877" cy="118877"/>
+            </a:xfrm>
+            <a:prstGeom prst="ellipse">
+              <a:avLst/>
+            </a:prstGeom>
+            <a:solidFill>
+              <a:schemeClr val="tx1"/>
+            </a:solidFill>
+            <a:ln>
+              <a:solidFill>
+                <a:schemeClr val="tx1"/>
+              </a:solidFill>
+            </a:ln>
+          </p:spPr>
+          <p:style>
+            <a:lnRef idx="2">
+              <a:schemeClr val="accent1">
+                <a:shade val="50000"/>
+              </a:schemeClr>
+            </a:lnRef>
+            <a:fillRef idx="1">
+              <a:schemeClr val="accent1"/>
+            </a:fillRef>
+            <a:effectRef idx="0">
+              <a:schemeClr val="accent1"/>
+            </a:effectRef>
+            <a:fontRef idx="minor">
+              <a:schemeClr val="lt1"/>
+            </a:fontRef>
+          </p:style>
+          <p:txBody>
+            <a:bodyPr rtlCol="0" anchor="ctr"/>
+            <a:lstStyle/>
+            <a:p>
+              <a:pPr algn="ctr"/>
+              <a:endParaRPr lang="zh-TW" altLang="en-US" sz="2000" dirty="0"/>
+            </a:p>
+          </p:txBody>
+        </p:sp>
+        <p:sp>
+          <p:nvSpPr>
+            <p:cNvPr id="22" name="文字方塊 21">
+              <a:extLst>
+                <a:ext uri="{FF2B5EF4-FFF2-40B4-BE49-F238E27FC236}">
+                  <a16:creationId xmlns:a16="http://schemas.microsoft.com/office/drawing/2014/main" id="{E79590F3-5E72-4E66-803A-FFF28D6BEA83}"/>
+                </a:ext>
+              </a:extLst>
+            </p:cNvPr>
+            <p:cNvSpPr txBox="1"/>
+            <p:nvPr/>
+          </p:nvSpPr>
+          <p:spPr>
+            <a:xfrm>
+              <a:off x="5081084" y="2292526"/>
+              <a:ext cx="1488460" cy="707886"/>
+            </a:xfrm>
+            <a:prstGeom prst="rect">
+              <a:avLst/>
+            </a:prstGeom>
+            <a:noFill/>
+          </p:spPr>
+          <p:txBody>
+            <a:bodyPr wrap="square" rtlCol="0">
+              <a:spAutoFit/>
+            </a:bodyPr>
+            <a:lstStyle/>
+            <a:p>
+              <a:pPr algn="ctr"/>
+              <a:r>
+                <a:rPr lang="en-US" altLang="zh-TW" sz="2000" dirty="0">
+                  <a:latin typeface="Times New Roman" panose="02020603050405020304" pitchFamily="18" charset="0"/>
+                  <a:cs typeface="Times New Roman" panose="02020603050405020304" pitchFamily="18" charset="0"/>
+                </a:rPr>
+                <a:t>Spin-allowed</a:t>
+              </a:r>
+            </a:p>
+          </p:txBody>
+        </p:sp>
+        <p:sp>
+          <p:nvSpPr>
+            <p:cNvPr id="23" name="文字方塊 22">
+              <a:extLst>
+                <a:ext uri="{FF2B5EF4-FFF2-40B4-BE49-F238E27FC236}">
+                  <a16:creationId xmlns:a16="http://schemas.microsoft.com/office/drawing/2014/main" id="{0EBB73C4-6A0F-453D-9FB7-127F4ED25713}"/>
+                </a:ext>
+              </a:extLst>
+            </p:cNvPr>
+            <p:cNvSpPr txBox="1"/>
+            <p:nvPr/>
+          </p:nvSpPr>
+          <p:spPr>
+            <a:xfrm>
+              <a:off x="8304636" y="2292528"/>
+              <a:ext cx="1488459" cy="707886"/>
+            </a:xfrm>
+            <a:prstGeom prst="rect">
+              <a:avLst/>
+            </a:prstGeom>
+            <a:noFill/>
+          </p:spPr>
+          <p:txBody>
+            <a:bodyPr wrap="square" rtlCol="0">
+              <a:spAutoFit/>
+            </a:bodyPr>
+            <a:lstStyle/>
+            <a:p>
+              <a:pPr algn="ctr"/>
+              <a:r>
+                <a:rPr lang="en-US" altLang="zh-TW" sz="2000" dirty="0">
+                  <a:latin typeface="Times New Roman" panose="02020603050405020304" pitchFamily="18" charset="0"/>
+                  <a:cs typeface="Times New Roman" panose="02020603050405020304" pitchFamily="18" charset="0"/>
+                </a:rPr>
+                <a:t>Spin-forbidden </a:t>
+              </a:r>
+              <a:endParaRPr lang="zh-TW" altLang="en-US" sz="2000" dirty="0">
                 <a:latin typeface="Times New Roman" panose="02020603050405020304" pitchFamily="18" charset="0"/>
                 <a:cs typeface="Times New Roman" panose="02020603050405020304" pitchFamily="18" charset="0"/>
               </a:endParaRPr>
@@ -5318,10 +5891,10 @@
         </p:sp>
         <p:pic>
           <p:nvPicPr>
-            <p:cNvPr id="3" name="圖片 2">
+            <p:cNvPr id="24" name="圖片 23">
               <a:extLst>
                 <a:ext uri="{FF2B5EF4-FFF2-40B4-BE49-F238E27FC236}">
-                  <a16:creationId xmlns:a16="http://schemas.microsoft.com/office/drawing/2014/main" id="{36FBA019-653B-49DF-B3D9-2522E9B1A400}"/>
+                  <a16:creationId xmlns:a16="http://schemas.microsoft.com/office/drawing/2014/main" id="{9144A5F0-4A70-4852-9F02-689D5C3B3FD8}"/>
                 </a:ext>
               </a:extLst>
             </p:cNvPr>
@@ -5330,22 +5903,872 @@
             </p:cNvPicPr>
             <p:nvPr/>
           </p:nvPicPr>
-          <p:blipFill>
-            <a:blip r:embed="rId4"/>
-            <a:stretch>
-              <a:fillRect/>
-            </a:stretch>
+          <p:blipFill rotWithShape="1">
+            <a:blip r:embed="rId5"/>
+            <a:srcRect l="7872" t="40135" r="7992" b="-2"/>
+            <a:stretch/>
           </p:blipFill>
           <p:spPr>
-            <a:xfrm>
-              <a:off x="7226299" y="235540"/>
-              <a:ext cx="6429829" cy="3167606"/>
+            <a:xfrm rot="10800000">
+              <a:off x="6722154" y="4221734"/>
+              <a:ext cx="1392887" cy="602118"/>
             </a:xfrm>
             <a:prstGeom prst="rect">
               <a:avLst/>
             </a:prstGeom>
           </p:spPr>
         </p:pic>
+        <p:pic>
+          <p:nvPicPr>
+            <p:cNvPr id="25" name="圖片 24">
+              <a:extLst>
+                <a:ext uri="{FF2B5EF4-FFF2-40B4-BE49-F238E27FC236}">
+                  <a16:creationId xmlns:a16="http://schemas.microsoft.com/office/drawing/2014/main" id="{90882F06-17D2-4687-B05F-BFAC111F0479}"/>
+                </a:ext>
+              </a:extLst>
+            </p:cNvPr>
+            <p:cNvPicPr>
+              <a:picLocks noChangeAspect="1"/>
+            </p:cNvPicPr>
+            <p:nvPr/>
+          </p:nvPicPr>
+          <p:blipFill rotWithShape="1">
+            <a:blip r:embed="rId5"/>
+            <a:srcRect l="7663" t="40135" r="7542" b="-2"/>
+            <a:stretch/>
+          </p:blipFill>
+          <p:spPr>
+            <a:xfrm>
+              <a:off x="6716683" y="2784184"/>
+              <a:ext cx="1403813" cy="602118"/>
+            </a:xfrm>
+            <a:prstGeom prst="rect">
+              <a:avLst/>
+            </a:prstGeom>
+          </p:spPr>
+        </p:pic>
+        <p:sp>
+          <p:nvSpPr>
+            <p:cNvPr id="26" name="橢圓 25">
+              <a:extLst>
+                <a:ext uri="{FF2B5EF4-FFF2-40B4-BE49-F238E27FC236}">
+                  <a16:creationId xmlns:a16="http://schemas.microsoft.com/office/drawing/2014/main" id="{DDA108E7-61F8-4D64-839E-C696759D9A20}"/>
+                </a:ext>
+              </a:extLst>
+            </p:cNvPr>
+            <p:cNvSpPr/>
+            <p:nvPr/>
+          </p:nvSpPr>
+          <p:spPr>
+            <a:xfrm>
+              <a:off x="7373591" y="4188369"/>
+              <a:ext cx="118879" cy="118879"/>
+            </a:xfrm>
+            <a:prstGeom prst="ellipse">
+              <a:avLst/>
+            </a:prstGeom>
+            <a:solidFill>
+              <a:schemeClr val="bg1"/>
+            </a:solidFill>
+            <a:ln>
+              <a:solidFill>
+                <a:schemeClr val="tx1"/>
+              </a:solidFill>
+            </a:ln>
+          </p:spPr>
+          <p:style>
+            <a:lnRef idx="2">
+              <a:schemeClr val="accent1">
+                <a:shade val="50000"/>
+              </a:schemeClr>
+            </a:lnRef>
+            <a:fillRef idx="1">
+              <a:schemeClr val="accent1"/>
+            </a:fillRef>
+            <a:effectRef idx="0">
+              <a:schemeClr val="accent1"/>
+            </a:effectRef>
+            <a:fontRef idx="minor">
+              <a:schemeClr val="lt1"/>
+            </a:fontRef>
+          </p:style>
+          <p:txBody>
+            <a:bodyPr rtlCol="0" anchor="ctr"/>
+            <a:lstStyle/>
+            <a:p>
+              <a:pPr algn="ctr"/>
+              <a:endParaRPr lang="zh-TW" altLang="en-US" sz="2000" dirty="0"/>
+            </a:p>
+          </p:txBody>
+        </p:sp>
+        <p:sp>
+          <p:nvSpPr>
+            <p:cNvPr id="27" name="橢圓 26">
+              <a:extLst>
+                <a:ext uri="{FF2B5EF4-FFF2-40B4-BE49-F238E27FC236}">
+                  <a16:creationId xmlns:a16="http://schemas.microsoft.com/office/drawing/2014/main" id="{DFA2CD90-8F7D-4D98-901E-434B027FB1AA}"/>
+                </a:ext>
+              </a:extLst>
+            </p:cNvPr>
+            <p:cNvSpPr/>
+            <p:nvPr/>
+          </p:nvSpPr>
+          <p:spPr>
+            <a:xfrm>
+              <a:off x="7951738" y="2936332"/>
+              <a:ext cx="118877" cy="118877"/>
+            </a:xfrm>
+            <a:prstGeom prst="ellipse">
+              <a:avLst/>
+            </a:prstGeom>
+            <a:solidFill>
+              <a:schemeClr val="tx1"/>
+            </a:solidFill>
+            <a:ln>
+              <a:solidFill>
+                <a:schemeClr val="tx1"/>
+              </a:solidFill>
+            </a:ln>
+          </p:spPr>
+          <p:style>
+            <a:lnRef idx="2">
+              <a:schemeClr val="accent1">
+                <a:shade val="50000"/>
+              </a:schemeClr>
+            </a:lnRef>
+            <a:fillRef idx="1">
+              <a:schemeClr val="accent1"/>
+            </a:fillRef>
+            <a:effectRef idx="0">
+              <a:schemeClr val="accent1"/>
+            </a:effectRef>
+            <a:fontRef idx="minor">
+              <a:schemeClr val="lt1"/>
+            </a:fontRef>
+          </p:style>
+          <p:txBody>
+            <a:bodyPr rtlCol="0" anchor="ctr"/>
+            <a:lstStyle/>
+            <a:p>
+              <a:pPr algn="ctr"/>
+              <a:endParaRPr lang="zh-TW" altLang="en-US" sz="2000" dirty="0"/>
+            </a:p>
+          </p:txBody>
+        </p:sp>
+        <p:sp>
+          <p:nvSpPr>
+            <p:cNvPr id="28" name="文字方塊 27">
+              <a:extLst>
+                <a:ext uri="{FF2B5EF4-FFF2-40B4-BE49-F238E27FC236}">
+                  <a16:creationId xmlns:a16="http://schemas.microsoft.com/office/drawing/2014/main" id="{554DDEA1-971F-41C9-87F7-5D8F553925A7}"/>
+                </a:ext>
+              </a:extLst>
+            </p:cNvPr>
+            <p:cNvSpPr txBox="1"/>
+            <p:nvPr/>
+          </p:nvSpPr>
+          <p:spPr>
+            <a:xfrm>
+              <a:off x="6513598" y="2292526"/>
+              <a:ext cx="1796377" cy="707886"/>
+            </a:xfrm>
+            <a:prstGeom prst="rect">
+              <a:avLst/>
+            </a:prstGeom>
+            <a:noFill/>
+          </p:spPr>
+          <p:txBody>
+            <a:bodyPr wrap="square" rtlCol="0">
+              <a:spAutoFit/>
+            </a:bodyPr>
+            <a:lstStyle/>
+            <a:p>
+              <a:pPr algn="ctr"/>
+              <a:r>
+                <a:rPr lang="en-US" altLang="zh-TW" sz="2000" dirty="0">
+                  <a:latin typeface="Times New Roman" panose="02020603050405020304" pitchFamily="18" charset="0"/>
+                  <a:cs typeface="Times New Roman" panose="02020603050405020304" pitchFamily="18" charset="0"/>
+                </a:rPr>
+                <a:t>Momentum-forbidden </a:t>
+              </a:r>
+              <a:endParaRPr lang="zh-TW" altLang="en-US" sz="2000" dirty="0">
+                <a:latin typeface="Times New Roman" panose="02020603050405020304" pitchFamily="18" charset="0"/>
+                <a:cs typeface="Times New Roman" panose="02020603050405020304" pitchFamily="18" charset="0"/>
+              </a:endParaRPr>
+            </a:p>
+          </p:txBody>
+        </p:sp>
+        <p:cxnSp>
+          <p:nvCxnSpPr>
+            <p:cNvPr id="29" name="直線單箭頭接點 28">
+              <a:extLst>
+                <a:ext uri="{FF2B5EF4-FFF2-40B4-BE49-F238E27FC236}">
+                  <a16:creationId xmlns:a16="http://schemas.microsoft.com/office/drawing/2014/main" id="{70C3CD04-9E2F-4659-AD6C-545B20981E20}"/>
+                </a:ext>
+              </a:extLst>
+            </p:cNvPr>
+            <p:cNvCxnSpPr>
+              <a:cxnSpLocks/>
+            </p:cNvCxnSpPr>
+            <p:nvPr/>
+          </p:nvCxnSpPr>
+          <p:spPr>
+            <a:xfrm>
+              <a:off x="8319781" y="4866711"/>
+              <a:ext cx="1548800" cy="0"/>
+            </a:xfrm>
+            <a:prstGeom prst="straightConnector1">
+              <a:avLst/>
+            </a:prstGeom>
+            <a:ln>
+              <a:tailEnd type="triangle" w="lg" len="lg"/>
+            </a:ln>
+          </p:spPr>
+          <p:style>
+            <a:lnRef idx="3">
+              <a:schemeClr val="dk1"/>
+            </a:lnRef>
+            <a:fillRef idx="0">
+              <a:schemeClr val="dk1"/>
+            </a:fillRef>
+            <a:effectRef idx="2">
+              <a:schemeClr val="dk1"/>
+            </a:effectRef>
+            <a:fontRef idx="minor">
+              <a:schemeClr val="tx1"/>
+            </a:fontRef>
+          </p:style>
+        </p:cxnSp>
+        <p:cxnSp>
+          <p:nvCxnSpPr>
+            <p:cNvPr id="30" name="直線單箭頭接點 29">
+              <a:extLst>
+                <a:ext uri="{FF2B5EF4-FFF2-40B4-BE49-F238E27FC236}">
+                  <a16:creationId xmlns:a16="http://schemas.microsoft.com/office/drawing/2014/main" id="{718782EF-F4FE-4BE6-9A8B-2D354FEEFED6}"/>
+                </a:ext>
+              </a:extLst>
+            </p:cNvPr>
+            <p:cNvCxnSpPr>
+              <a:cxnSpLocks/>
+            </p:cNvCxnSpPr>
+            <p:nvPr/>
+          </p:nvCxnSpPr>
+          <p:spPr>
+            <a:xfrm>
+              <a:off x="6676313" y="4866713"/>
+              <a:ext cx="1548802" cy="0"/>
+            </a:xfrm>
+            <a:prstGeom prst="straightConnector1">
+              <a:avLst/>
+            </a:prstGeom>
+            <a:ln>
+              <a:tailEnd type="triangle" w="lg" len="lg"/>
+            </a:ln>
+          </p:spPr>
+          <p:style>
+            <a:lnRef idx="3">
+              <a:schemeClr val="dk1"/>
+            </a:lnRef>
+            <a:fillRef idx="0">
+              <a:schemeClr val="dk1"/>
+            </a:fillRef>
+            <a:effectRef idx="2">
+              <a:schemeClr val="dk1"/>
+            </a:effectRef>
+            <a:fontRef idx="minor">
+              <a:schemeClr val="tx1"/>
+            </a:fontRef>
+          </p:style>
+        </p:cxnSp>
+        <p:cxnSp>
+          <p:nvCxnSpPr>
+            <p:cNvPr id="31" name="直線單箭頭接點 30">
+              <a:extLst>
+                <a:ext uri="{FF2B5EF4-FFF2-40B4-BE49-F238E27FC236}">
+                  <a16:creationId xmlns:a16="http://schemas.microsoft.com/office/drawing/2014/main" id="{463E0AB0-DB4E-43F6-9729-954DEC745AFE}"/>
+                </a:ext>
+              </a:extLst>
+            </p:cNvPr>
+            <p:cNvCxnSpPr>
+              <a:cxnSpLocks/>
+            </p:cNvCxnSpPr>
+            <p:nvPr/>
+          </p:nvCxnSpPr>
+          <p:spPr>
+            <a:xfrm>
+              <a:off x="4960154" y="4866713"/>
+              <a:ext cx="1612513" cy="0"/>
+            </a:xfrm>
+            <a:prstGeom prst="straightConnector1">
+              <a:avLst/>
+            </a:prstGeom>
+            <a:ln>
+              <a:tailEnd type="triangle" w="lg" len="lg"/>
+            </a:ln>
+          </p:spPr>
+          <p:style>
+            <a:lnRef idx="3">
+              <a:schemeClr val="dk1"/>
+            </a:lnRef>
+            <a:fillRef idx="0">
+              <a:schemeClr val="dk1"/>
+            </a:fillRef>
+            <a:effectRef idx="2">
+              <a:schemeClr val="dk1"/>
+            </a:effectRef>
+            <a:fontRef idx="minor">
+              <a:schemeClr val="tx1"/>
+            </a:fontRef>
+          </p:style>
+        </p:cxnSp>
+        <p:sp>
+          <p:nvSpPr>
+            <p:cNvPr id="32" name="箭號: 向上 31">
+              <a:extLst>
+                <a:ext uri="{FF2B5EF4-FFF2-40B4-BE49-F238E27FC236}">
+                  <a16:creationId xmlns:a16="http://schemas.microsoft.com/office/drawing/2014/main" id="{5960BB8F-ACA6-4450-9DCA-B86E71C7B61B}"/>
+                </a:ext>
+              </a:extLst>
+            </p:cNvPr>
+            <p:cNvSpPr/>
+            <p:nvPr/>
+          </p:nvSpPr>
+          <p:spPr>
+            <a:xfrm>
+              <a:off x="4967917" y="2647488"/>
+              <a:ext cx="118753" cy="273974"/>
+            </a:xfrm>
+            <a:prstGeom prst="upArrow">
+              <a:avLst>
+                <a:gd name="adj1" fmla="val 30192"/>
+                <a:gd name="adj2" fmla="val 76408"/>
+              </a:avLst>
+            </a:prstGeom>
+            <a:solidFill>
+              <a:srgbClr val="FF0000"/>
+            </a:solidFill>
+            <a:ln>
+              <a:noFill/>
+            </a:ln>
+          </p:spPr>
+          <p:style>
+            <a:lnRef idx="2">
+              <a:schemeClr val="accent1">
+                <a:shade val="50000"/>
+              </a:schemeClr>
+            </a:lnRef>
+            <a:fillRef idx="1">
+              <a:schemeClr val="accent1"/>
+            </a:fillRef>
+            <a:effectRef idx="0">
+              <a:schemeClr val="accent1"/>
+            </a:effectRef>
+            <a:fontRef idx="minor">
+              <a:schemeClr val="lt1"/>
+            </a:fontRef>
+          </p:style>
+          <p:txBody>
+            <a:bodyPr rtlCol="0" anchor="ctr"/>
+            <a:lstStyle/>
+            <a:p>
+              <a:pPr algn="ctr"/>
+              <a:endParaRPr lang="zh-TW" altLang="en-US" sz="2000" dirty="0"/>
+            </a:p>
+          </p:txBody>
+        </p:sp>
+        <p:sp>
+          <p:nvSpPr>
+            <p:cNvPr id="33" name="箭號: 向上 32">
+              <a:extLst>
+                <a:ext uri="{FF2B5EF4-FFF2-40B4-BE49-F238E27FC236}">
+                  <a16:creationId xmlns:a16="http://schemas.microsoft.com/office/drawing/2014/main" id="{3DC1E270-1674-4CD5-84FC-5910226CC46D}"/>
+                </a:ext>
+              </a:extLst>
+            </p:cNvPr>
+            <p:cNvSpPr/>
+            <p:nvPr/>
+          </p:nvSpPr>
+          <p:spPr>
+            <a:xfrm rot="10800000">
+              <a:off x="4967919" y="3019438"/>
+              <a:ext cx="118753" cy="273974"/>
+            </a:xfrm>
+            <a:prstGeom prst="upArrow">
+              <a:avLst>
+                <a:gd name="adj1" fmla="val 30192"/>
+                <a:gd name="adj2" fmla="val 76408"/>
+              </a:avLst>
+            </a:prstGeom>
+            <a:solidFill>
+              <a:srgbClr val="0070C0"/>
+            </a:solidFill>
+            <a:ln>
+              <a:noFill/>
+            </a:ln>
+          </p:spPr>
+          <p:style>
+            <a:lnRef idx="2">
+              <a:schemeClr val="accent1">
+                <a:shade val="50000"/>
+              </a:schemeClr>
+            </a:lnRef>
+            <a:fillRef idx="1">
+              <a:schemeClr val="accent1"/>
+            </a:fillRef>
+            <a:effectRef idx="0">
+              <a:schemeClr val="accent1"/>
+            </a:effectRef>
+            <a:fontRef idx="minor">
+              <a:schemeClr val="lt1"/>
+            </a:fontRef>
+          </p:style>
+          <p:txBody>
+            <a:bodyPr rtlCol="0" anchor="ctr"/>
+            <a:lstStyle/>
+            <a:p>
+              <a:pPr algn="ctr"/>
+              <a:endParaRPr lang="zh-TW" altLang="en-US" sz="2000"/>
+            </a:p>
+          </p:txBody>
+        </p:sp>
+        <p:sp>
+          <p:nvSpPr>
+            <p:cNvPr id="34" name="箭號: 向上 33">
+              <a:extLst>
+                <a:ext uri="{FF2B5EF4-FFF2-40B4-BE49-F238E27FC236}">
+                  <a16:creationId xmlns:a16="http://schemas.microsoft.com/office/drawing/2014/main" id="{B2EB9341-CA68-4189-A533-F1D7101C98EB}"/>
+                </a:ext>
+              </a:extLst>
+            </p:cNvPr>
+            <p:cNvSpPr/>
+            <p:nvPr/>
+          </p:nvSpPr>
+          <p:spPr>
+            <a:xfrm>
+              <a:off x="4967919" y="4532854"/>
+              <a:ext cx="118753" cy="273974"/>
+            </a:xfrm>
+            <a:prstGeom prst="upArrow">
+              <a:avLst>
+                <a:gd name="adj1" fmla="val 30192"/>
+                <a:gd name="adj2" fmla="val 76408"/>
+              </a:avLst>
+            </a:prstGeom>
+            <a:solidFill>
+              <a:srgbClr val="FF0000"/>
+            </a:solidFill>
+            <a:ln>
+              <a:noFill/>
+            </a:ln>
+          </p:spPr>
+          <p:style>
+            <a:lnRef idx="2">
+              <a:schemeClr val="accent1">
+                <a:shade val="50000"/>
+              </a:schemeClr>
+            </a:lnRef>
+            <a:fillRef idx="1">
+              <a:schemeClr val="accent1"/>
+            </a:fillRef>
+            <a:effectRef idx="0">
+              <a:schemeClr val="accent1"/>
+            </a:effectRef>
+            <a:fontRef idx="minor">
+              <a:schemeClr val="lt1"/>
+            </a:fontRef>
+          </p:style>
+          <p:txBody>
+            <a:bodyPr rtlCol="0" anchor="ctr"/>
+            <a:lstStyle/>
+            <a:p>
+              <a:pPr algn="ctr"/>
+              <a:endParaRPr lang="zh-TW" altLang="en-US" sz="2000"/>
+            </a:p>
+          </p:txBody>
+        </p:sp>
+        <p:pic>
+          <p:nvPicPr>
+            <p:cNvPr id="35" name="圖片 34">
+              <a:extLst>
+                <a:ext uri="{FF2B5EF4-FFF2-40B4-BE49-F238E27FC236}">
+                  <a16:creationId xmlns:a16="http://schemas.microsoft.com/office/drawing/2014/main" id="{4C8C1008-E062-454B-81A1-48B46279BD49}"/>
+                </a:ext>
+              </a:extLst>
+            </p:cNvPr>
+            <p:cNvPicPr>
+              <a:picLocks noChangeAspect="1"/>
+            </p:cNvPicPr>
+            <p:nvPr/>
+          </p:nvPicPr>
+          <p:blipFill rotWithShape="1">
+            <a:blip r:embed="rId4"/>
+            <a:srcRect l="7992" t="38920" r="6883"/>
+            <a:stretch/>
+          </p:blipFill>
+          <p:spPr>
+            <a:xfrm>
+              <a:off x="5091432" y="3046536"/>
+              <a:ext cx="1409273" cy="614324"/>
+            </a:xfrm>
+            <a:prstGeom prst="rect">
+              <a:avLst/>
+            </a:prstGeom>
+          </p:spPr>
+        </p:pic>
+        <p:pic>
+          <p:nvPicPr>
+            <p:cNvPr id="36" name="圖片 35">
+              <a:extLst>
+                <a:ext uri="{FF2B5EF4-FFF2-40B4-BE49-F238E27FC236}">
+                  <a16:creationId xmlns:a16="http://schemas.microsoft.com/office/drawing/2014/main" id="{8BB3FEA9-F254-46DC-A5C6-9C5E50CE8892}"/>
+                </a:ext>
+              </a:extLst>
+            </p:cNvPr>
+            <p:cNvPicPr>
+              <a:picLocks noChangeAspect="1"/>
+            </p:cNvPicPr>
+            <p:nvPr/>
+          </p:nvPicPr>
+          <p:blipFill rotWithShape="1">
+            <a:blip r:embed="rId5"/>
+            <a:srcRect l="7872" t="40135" r="7992" b="-2"/>
+            <a:stretch/>
+          </p:blipFill>
+          <p:spPr>
+            <a:xfrm rot="10800000">
+              <a:off x="5099633" y="4221734"/>
+              <a:ext cx="1392887" cy="602118"/>
+            </a:xfrm>
+            <a:prstGeom prst="rect">
+              <a:avLst/>
+            </a:prstGeom>
+          </p:spPr>
+        </p:pic>
+        <p:pic>
+          <p:nvPicPr>
+            <p:cNvPr id="37" name="圖片 36">
+              <a:extLst>
+                <a:ext uri="{FF2B5EF4-FFF2-40B4-BE49-F238E27FC236}">
+                  <a16:creationId xmlns:a16="http://schemas.microsoft.com/office/drawing/2014/main" id="{C69D8C0D-B726-4BE8-A062-FE2CC106B535}"/>
+                </a:ext>
+              </a:extLst>
+            </p:cNvPr>
+            <p:cNvPicPr>
+              <a:picLocks noChangeAspect="1"/>
+            </p:cNvPicPr>
+            <p:nvPr/>
+          </p:nvPicPr>
+          <p:blipFill rotWithShape="1">
+            <a:blip r:embed="rId5"/>
+            <a:srcRect l="7663" t="40135" r="7542" b="-2"/>
+            <a:stretch/>
+          </p:blipFill>
+          <p:spPr>
+            <a:xfrm>
+              <a:off x="5094165" y="2784184"/>
+              <a:ext cx="1403813" cy="602118"/>
+            </a:xfrm>
+            <a:prstGeom prst="rect">
+              <a:avLst/>
+            </a:prstGeom>
+          </p:spPr>
+        </p:pic>
+        <p:sp>
+          <p:nvSpPr>
+            <p:cNvPr id="38" name="橢圓 37">
+              <a:extLst>
+                <a:ext uri="{FF2B5EF4-FFF2-40B4-BE49-F238E27FC236}">
+                  <a16:creationId xmlns:a16="http://schemas.microsoft.com/office/drawing/2014/main" id="{D2A2C652-E0EB-404A-9B8D-03C4C663D54D}"/>
+                </a:ext>
+              </a:extLst>
+            </p:cNvPr>
+            <p:cNvSpPr/>
+            <p:nvPr/>
+          </p:nvSpPr>
+          <p:spPr>
+            <a:xfrm>
+              <a:off x="6016361" y="3226604"/>
+              <a:ext cx="118879" cy="118879"/>
+            </a:xfrm>
+            <a:prstGeom prst="ellipse">
+              <a:avLst/>
+            </a:prstGeom>
+            <a:solidFill>
+              <a:schemeClr val="tx1"/>
+            </a:solidFill>
+            <a:ln>
+              <a:solidFill>
+                <a:schemeClr val="tx1"/>
+              </a:solidFill>
+            </a:ln>
+          </p:spPr>
+          <p:style>
+            <a:lnRef idx="2">
+              <a:schemeClr val="accent1">
+                <a:shade val="50000"/>
+              </a:schemeClr>
+            </a:lnRef>
+            <a:fillRef idx="1">
+              <a:schemeClr val="accent1"/>
+            </a:fillRef>
+            <a:effectRef idx="0">
+              <a:schemeClr val="accent1"/>
+            </a:effectRef>
+            <a:fontRef idx="minor">
+              <a:schemeClr val="lt1"/>
+            </a:fontRef>
+          </p:style>
+          <p:txBody>
+            <a:bodyPr rtlCol="0" anchor="ctr"/>
+            <a:lstStyle/>
+            <a:p>
+              <a:pPr algn="ctr"/>
+              <a:endParaRPr lang="zh-TW" altLang="en-US" sz="2000" dirty="0"/>
+            </a:p>
+          </p:txBody>
+        </p:sp>
+        <p:cxnSp>
+          <p:nvCxnSpPr>
+            <p:cNvPr id="39" name="直線單箭頭接點 38">
+              <a:extLst>
+                <a:ext uri="{FF2B5EF4-FFF2-40B4-BE49-F238E27FC236}">
+                  <a16:creationId xmlns:a16="http://schemas.microsoft.com/office/drawing/2014/main" id="{4F6336AC-ABF1-43F7-8D14-5F0F8CA9DFAE}"/>
+                </a:ext>
+              </a:extLst>
+            </p:cNvPr>
+            <p:cNvCxnSpPr>
+              <a:cxnSpLocks/>
+            </p:cNvCxnSpPr>
+            <p:nvPr/>
+          </p:nvCxnSpPr>
+          <p:spPr>
+            <a:xfrm flipV="1">
+              <a:off x="5810033" y="3333882"/>
+              <a:ext cx="255222" cy="915694"/>
+            </a:xfrm>
+            <a:prstGeom prst="straightConnector1">
+              <a:avLst/>
+            </a:prstGeom>
+            <a:ln w="57150">
+              <a:solidFill>
+                <a:srgbClr val="E1B037"/>
+              </a:solidFill>
+              <a:headEnd w="sm" len="sm"/>
+              <a:tailEnd type="triangle" w="med" len="lg"/>
+            </a:ln>
+          </p:spPr>
+          <p:style>
+            <a:lnRef idx="3">
+              <a:schemeClr val="accent4"/>
+            </a:lnRef>
+            <a:fillRef idx="0">
+              <a:schemeClr val="accent4"/>
+            </a:fillRef>
+            <a:effectRef idx="2">
+              <a:schemeClr val="accent4"/>
+            </a:effectRef>
+            <a:fontRef idx="minor">
+              <a:schemeClr val="tx1"/>
+            </a:fontRef>
+          </p:style>
+        </p:cxnSp>
+        <p:sp>
+          <p:nvSpPr>
+            <p:cNvPr id="40" name="橢圓 39">
+              <a:extLst>
+                <a:ext uri="{FF2B5EF4-FFF2-40B4-BE49-F238E27FC236}">
+                  <a16:creationId xmlns:a16="http://schemas.microsoft.com/office/drawing/2014/main" id="{FFFF96C8-E573-4F31-AA36-EE9B47C5F562}"/>
+                </a:ext>
+              </a:extLst>
+            </p:cNvPr>
+            <p:cNvSpPr/>
+            <p:nvPr/>
+          </p:nvSpPr>
+          <p:spPr>
+            <a:xfrm>
+              <a:off x="5751069" y="4188369"/>
+              <a:ext cx="118879" cy="118879"/>
+            </a:xfrm>
+            <a:prstGeom prst="ellipse">
+              <a:avLst/>
+            </a:prstGeom>
+            <a:solidFill>
+              <a:schemeClr val="bg1"/>
+            </a:solidFill>
+            <a:ln>
+              <a:solidFill>
+                <a:schemeClr val="tx1"/>
+              </a:solidFill>
+            </a:ln>
+          </p:spPr>
+          <p:style>
+            <a:lnRef idx="2">
+              <a:schemeClr val="accent1">
+                <a:shade val="50000"/>
+              </a:schemeClr>
+            </a:lnRef>
+            <a:fillRef idx="1">
+              <a:schemeClr val="accent1"/>
+            </a:fillRef>
+            <a:effectRef idx="0">
+              <a:schemeClr val="accent1"/>
+            </a:effectRef>
+            <a:fontRef idx="minor">
+              <a:schemeClr val="lt1"/>
+            </a:fontRef>
+          </p:style>
+          <p:txBody>
+            <a:bodyPr rtlCol="0" anchor="ctr"/>
+            <a:lstStyle/>
+            <a:p>
+              <a:pPr algn="ctr"/>
+              <a:endParaRPr lang="zh-TW" altLang="en-US" sz="2000" dirty="0"/>
+            </a:p>
+          </p:txBody>
+        </p:sp>
+        <p:sp>
+          <p:nvSpPr>
+            <p:cNvPr id="41" name="文字方塊 40">
+              <a:extLst>
+                <a:ext uri="{FF2B5EF4-FFF2-40B4-BE49-F238E27FC236}">
+                  <a16:creationId xmlns:a16="http://schemas.microsoft.com/office/drawing/2014/main" id="{B088AF2C-62FA-44D3-9352-4075C7BA55C7}"/>
+                </a:ext>
+              </a:extLst>
+            </p:cNvPr>
+            <p:cNvSpPr txBox="1"/>
+            <p:nvPr/>
+          </p:nvSpPr>
+          <p:spPr>
+            <a:xfrm>
+              <a:off x="4650574" y="3777943"/>
+              <a:ext cx="1403813" cy="338554"/>
+            </a:xfrm>
+            <a:prstGeom prst="rect">
+              <a:avLst/>
+            </a:prstGeom>
+            <a:noFill/>
+          </p:spPr>
+          <p:txBody>
+            <a:bodyPr wrap="square" rtlCol="0">
+              <a:spAutoFit/>
+            </a:bodyPr>
+            <a:lstStyle/>
+            <a:p>
+              <a:pPr algn="ctr"/>
+              <a:r>
+                <a:rPr lang="en-US" altLang="zh-TW" sz="1600" dirty="0">
+                  <a:latin typeface="Times New Roman" panose="02020603050405020304" pitchFamily="18" charset="0"/>
+                  <a:cs typeface="Times New Roman" panose="02020603050405020304" pitchFamily="18" charset="0"/>
+                </a:rPr>
+                <a:t>Light-cone</a:t>
+              </a:r>
+              <a:endParaRPr lang="zh-TW" altLang="en-US" sz="1600" dirty="0">
+                <a:latin typeface="Times New Roman" panose="02020603050405020304" pitchFamily="18" charset="0"/>
+                <a:cs typeface="Times New Roman" panose="02020603050405020304" pitchFamily="18" charset="0"/>
+              </a:endParaRPr>
+            </a:p>
+          </p:txBody>
+        </p:sp>
+        <mc:AlternateContent xmlns:mc="http://schemas.openxmlformats.org/markup-compatibility/2006">
+          <mc:Choice xmlns:a14="http://schemas.microsoft.com/office/drawing/2010/main" Requires="a14">
+            <p:sp>
+              <p:nvSpPr>
+                <p:cNvPr id="42" name="文字方塊 41">
+                  <a:extLst>
+                    <a:ext uri="{FF2B5EF4-FFF2-40B4-BE49-F238E27FC236}">
+                      <a16:creationId xmlns:a16="http://schemas.microsoft.com/office/drawing/2014/main" id="{2AE40D80-7245-4D10-949D-D68A9F97FFCD}"/>
+                    </a:ext>
+                  </a:extLst>
+                </p:cNvPr>
+                <p:cNvSpPr txBox="1"/>
+                <p:nvPr/>
+              </p:nvSpPr>
+              <p:spPr>
+                <a:xfrm>
+                  <a:off x="4932933" y="4848497"/>
+                  <a:ext cx="242450" cy="400110"/>
+                </a:xfrm>
+                <a:prstGeom prst="rect">
+                  <a:avLst/>
+                </a:prstGeom>
+                <a:noFill/>
+              </p:spPr>
+              <p:txBody>
+                <a:bodyPr wrap="square" rtlCol="0">
+                  <a:spAutoFit/>
+                </a:bodyPr>
+                <a:lstStyle/>
+                <a:p>
+                  <a:pPr algn="ctr"/>
+                  <a14:m>
+                    <m:oMathPara xmlns:m="http://schemas.openxmlformats.org/officeDocument/2006/math">
+                      <m:oMathParaPr>
+                        <m:jc m:val="centerGroup"/>
+                      </m:oMathParaPr>
+                      <m:oMath xmlns:m="http://schemas.openxmlformats.org/officeDocument/2006/math">
+                        <m:r>
+                          <a:rPr lang="en-US" altLang="zh-TW" sz="2000" b="1" i="1" dirty="0">
+                            <a:latin typeface="Cambria Math" panose="02040503050406030204" pitchFamily="18" charset="0"/>
+                            <a:cs typeface="Times New Roman" panose="02020603050405020304" pitchFamily="18" charset="0"/>
+                          </a:rPr>
+                          <m:t>𝒌</m:t>
+                        </m:r>
+                      </m:oMath>
+                    </m:oMathPara>
+                  </a14:m>
+                  <a:endParaRPr lang="zh-TW" altLang="en-US" sz="2000" b="1" dirty="0">
+                    <a:latin typeface="Times New Roman" panose="02020603050405020304" pitchFamily="18" charset="0"/>
+                    <a:cs typeface="Times New Roman" panose="02020603050405020304" pitchFamily="18" charset="0"/>
+                  </a:endParaRPr>
+                </a:p>
+              </p:txBody>
+            </p:sp>
+          </mc:Choice>
+          <mc:Fallback>
+            <p:sp>
+              <p:nvSpPr>
+                <p:cNvPr id="42" name="文字方塊 41">
+                  <a:extLst>
+                    <a:ext uri="{FF2B5EF4-FFF2-40B4-BE49-F238E27FC236}">
+                      <a16:creationId xmlns:a16="http://schemas.microsoft.com/office/drawing/2014/main" id="{2AE40D80-7245-4D10-949D-D68A9F97FFCD}"/>
+                    </a:ext>
+                  </a:extLst>
+                </p:cNvPr>
+                <p:cNvSpPr txBox="1">
+                  <a:spLocks noRot="1" noChangeAspect="1" noMove="1" noResize="1" noEditPoints="1" noAdjustHandles="1" noChangeArrowheads="1" noChangeShapeType="1" noTextEdit="1"/>
+                </p:cNvSpPr>
+                <p:nvPr/>
+              </p:nvSpPr>
+              <p:spPr>
+                <a:xfrm>
+                  <a:off x="4932933" y="4848497"/>
+                  <a:ext cx="242450" cy="400110"/>
+                </a:xfrm>
+                <a:prstGeom prst="rect">
+                  <a:avLst/>
+                </a:prstGeom>
+                <a:blipFill>
+                  <a:blip r:embed="rId6"/>
+                  <a:stretch>
+                    <a:fillRect l="-32500" r="-10000"/>
+                  </a:stretch>
+                </a:blipFill>
+              </p:spPr>
+              <p:txBody>
+                <a:bodyPr/>
+                <a:lstStyle/>
+                <a:p>
+                  <a:r>
+                    <a:rPr lang="zh-TW" altLang="en-US">
+                      <a:noFill/>
+                    </a:rPr>
+                    <a:t> </a:t>
+                  </a:r>
+                </a:p>
+              </p:txBody>
+            </p:sp>
+          </mc:Fallback>
+        </mc:AlternateContent>
       </p:grpSp>
     </p:spTree>
     <p:extLst>

--- a/Final/Figures/SOI_structure.pptx
+++ b/Final/Figures/SOI_structure.pptx
@@ -9,6 +9,7 @@
     <p:sldId id="257" r:id="rId3"/>
     <p:sldId id="258" r:id="rId4"/>
     <p:sldId id="259" r:id="rId5"/>
+    <p:sldId id="260" r:id="rId6"/>
   </p:sldIdLst>
   <p:sldSz cx="9906000" cy="3060700"/>
   <p:notesSz cx="6858000" cy="9144000"/>
@@ -246,7 +247,7 @@
           <a:p>
             <a:fld id="{C9965009-D4C9-4BD1-8D98-F9C892462EAE}" type="datetimeFigureOut">
               <a:rPr lang="zh-TW" altLang="en-US" smtClean="0"/>
-              <a:t>2026/5/20</a:t>
+              <a:t>2026/7/4</a:t>
             </a:fld>
             <a:endParaRPr lang="zh-TW" altLang="en-US"/>
           </a:p>
@@ -416,7 +417,7 @@
           <a:p>
             <a:fld id="{C9965009-D4C9-4BD1-8D98-F9C892462EAE}" type="datetimeFigureOut">
               <a:rPr lang="zh-TW" altLang="en-US" smtClean="0"/>
-              <a:t>2026/5/20</a:t>
+              <a:t>2026/7/4</a:t>
             </a:fld>
             <a:endParaRPr lang="zh-TW" altLang="en-US"/>
           </a:p>
@@ -596,7 +597,7 @@
           <a:p>
             <a:fld id="{C9965009-D4C9-4BD1-8D98-F9C892462EAE}" type="datetimeFigureOut">
               <a:rPr lang="zh-TW" altLang="en-US" smtClean="0"/>
-              <a:t>2026/5/20</a:t>
+              <a:t>2026/7/4</a:t>
             </a:fld>
             <a:endParaRPr lang="zh-TW" altLang="en-US"/>
           </a:p>
@@ -766,7 +767,7 @@
           <a:p>
             <a:fld id="{C9965009-D4C9-4BD1-8D98-F9C892462EAE}" type="datetimeFigureOut">
               <a:rPr lang="zh-TW" altLang="en-US" smtClean="0"/>
-              <a:t>2026/5/20</a:t>
+              <a:t>2026/7/4</a:t>
             </a:fld>
             <a:endParaRPr lang="zh-TW" altLang="en-US"/>
           </a:p>
@@ -1012,7 +1013,7 @@
           <a:p>
             <a:fld id="{C9965009-D4C9-4BD1-8D98-F9C892462EAE}" type="datetimeFigureOut">
               <a:rPr lang="zh-TW" altLang="en-US" smtClean="0"/>
-              <a:t>2026/5/20</a:t>
+              <a:t>2026/7/4</a:t>
             </a:fld>
             <a:endParaRPr lang="zh-TW" altLang="en-US"/>
           </a:p>
@@ -1244,7 +1245,7 @@
           <a:p>
             <a:fld id="{C9965009-D4C9-4BD1-8D98-F9C892462EAE}" type="datetimeFigureOut">
               <a:rPr lang="zh-TW" altLang="en-US" smtClean="0"/>
-              <a:t>2026/5/20</a:t>
+              <a:t>2026/7/4</a:t>
             </a:fld>
             <a:endParaRPr lang="zh-TW" altLang="en-US"/>
           </a:p>
@@ -1611,7 +1612,7 @@
           <a:p>
             <a:fld id="{C9965009-D4C9-4BD1-8D98-F9C892462EAE}" type="datetimeFigureOut">
               <a:rPr lang="zh-TW" altLang="en-US" smtClean="0"/>
-              <a:t>2026/5/20</a:t>
+              <a:t>2026/7/4</a:t>
             </a:fld>
             <a:endParaRPr lang="zh-TW" altLang="en-US"/>
           </a:p>
@@ -1729,7 +1730,7 @@
           <a:p>
             <a:fld id="{C9965009-D4C9-4BD1-8D98-F9C892462EAE}" type="datetimeFigureOut">
               <a:rPr lang="zh-TW" altLang="en-US" smtClean="0"/>
-              <a:t>2026/5/20</a:t>
+              <a:t>2026/7/4</a:t>
             </a:fld>
             <a:endParaRPr lang="zh-TW" altLang="en-US"/>
           </a:p>
@@ -1824,7 +1825,7 @@
           <a:p>
             <a:fld id="{C9965009-D4C9-4BD1-8D98-F9C892462EAE}" type="datetimeFigureOut">
               <a:rPr lang="zh-TW" altLang="en-US" smtClean="0"/>
-              <a:t>2026/5/20</a:t>
+              <a:t>2026/7/4</a:t>
             </a:fld>
             <a:endParaRPr lang="zh-TW" altLang="en-US"/>
           </a:p>
@@ -2101,7 +2102,7 @@
           <a:p>
             <a:fld id="{C9965009-D4C9-4BD1-8D98-F9C892462EAE}" type="datetimeFigureOut">
               <a:rPr lang="zh-TW" altLang="en-US" smtClean="0"/>
-              <a:t>2026/5/20</a:t>
+              <a:t>2026/7/4</a:t>
             </a:fld>
             <a:endParaRPr lang="zh-TW" altLang="en-US"/>
           </a:p>
@@ -2358,7 +2359,7 @@
           <a:p>
             <a:fld id="{C9965009-D4C9-4BD1-8D98-F9C892462EAE}" type="datetimeFigureOut">
               <a:rPr lang="zh-TW" altLang="en-US" smtClean="0"/>
-              <a:t>2026/5/20</a:t>
+              <a:t>2026/7/4</a:t>
             </a:fld>
             <a:endParaRPr lang="zh-TW" altLang="en-US"/>
           </a:p>
@@ -2571,7 +2572,7 @@
           <a:p>
             <a:fld id="{C9965009-D4C9-4BD1-8D98-F9C892462EAE}" type="datetimeFigureOut">
               <a:rPr lang="zh-TW" altLang="en-US" smtClean="0"/>
-              <a:t>2026/5/20</a:t>
+              <a:t>2026/7/4</a:t>
             </a:fld>
             <a:endParaRPr lang="zh-TW" altLang="en-US"/>
           </a:p>
@@ -3209,8 +3210,8 @@
               </a:prstGeom>
             </p:spPr>
           </p:pic>
-          <mc:AlternateContent xmlns:mc="http://schemas.openxmlformats.org/markup-compatibility/2006">
-            <mc:Choice xmlns:a14="http://schemas.microsoft.com/office/drawing/2010/main" Requires="a14">
+          <mc:AlternateContent xmlns:mc="http://schemas.openxmlformats.org/markup-compatibility/2006" xmlns:a14="http://schemas.microsoft.com/office/drawing/2010/main">
+            <mc:Choice Requires="a14">
               <p:sp>
                 <p:nvSpPr>
                   <p:cNvPr id="8" name="文字方塊 7">
@@ -3266,7 +3267,7 @@
                 </p:txBody>
               </p:sp>
             </mc:Choice>
-            <mc:Fallback>
+            <mc:Fallback xmlns="">
               <p:sp>
                 <p:nvSpPr>
                   <p:cNvPr id="8" name="文字方塊 7">
@@ -3311,8 +3312,8 @@
               </p:sp>
             </mc:Fallback>
           </mc:AlternateContent>
-          <mc:AlternateContent xmlns:mc="http://schemas.openxmlformats.org/markup-compatibility/2006">
-            <mc:Choice xmlns:a14="http://schemas.microsoft.com/office/drawing/2010/main" Requires="a14">
+          <mc:AlternateContent xmlns:mc="http://schemas.openxmlformats.org/markup-compatibility/2006" xmlns:a14="http://schemas.microsoft.com/office/drawing/2010/main">
+            <mc:Choice Requires="a14">
               <p:sp>
                 <p:nvSpPr>
                   <p:cNvPr id="9" name="文字方塊 8">
@@ -3368,7 +3369,7 @@
                 </p:txBody>
               </p:sp>
             </mc:Choice>
-            <mc:Fallback>
+            <mc:Fallback xmlns="">
               <p:sp>
                 <p:nvSpPr>
                   <p:cNvPr id="9" name="文字方塊 8">
@@ -4858,8 +4859,8 @@
           </a:p>
         </p:txBody>
       </p:sp>
-      <mc:AlternateContent xmlns:mc="http://schemas.openxmlformats.org/markup-compatibility/2006">
-        <mc:Choice xmlns:a14="http://schemas.microsoft.com/office/drawing/2010/main" Requires="a14">
+      <mc:AlternateContent xmlns:mc="http://schemas.openxmlformats.org/markup-compatibility/2006" xmlns:a14="http://schemas.microsoft.com/office/drawing/2010/main">
+        <mc:Choice Requires="a14">
           <p:sp>
             <p:nvSpPr>
               <p:cNvPr id="108" name="文字方塊 107">
@@ -4913,7 +4914,7 @@
             </p:txBody>
           </p:sp>
         </mc:Choice>
-        <mc:Fallback>
+        <mc:Fallback xmlns="">
           <p:sp>
             <p:nvSpPr>
               <p:cNvPr id="108" name="文字方塊 107">
@@ -5120,8 +5121,8 @@
               </a:prstGeom>
             </p:spPr>
           </p:pic>
-          <mc:AlternateContent xmlns:mc="http://schemas.openxmlformats.org/markup-compatibility/2006">
-            <mc:Choice xmlns:a14="http://schemas.microsoft.com/office/drawing/2010/main" Requires="a14">
+          <mc:AlternateContent xmlns:mc="http://schemas.openxmlformats.org/markup-compatibility/2006" xmlns:a14="http://schemas.microsoft.com/office/drawing/2010/main">
+            <mc:Choice Requires="a14">
               <p:sp>
                 <p:nvSpPr>
                   <p:cNvPr id="10" name="文字方塊 9">
@@ -5186,7 +5187,7 @@
                 </p:txBody>
               </p:sp>
             </mc:Choice>
-            <mc:Fallback>
+            <mc:Fallback xmlns="">
               <p:sp>
                 <p:nvSpPr>
                   <p:cNvPr id="10" name="文字方塊 9">
@@ -6669,8 +6670,8 @@
             </a:p>
           </p:txBody>
         </p:sp>
-        <mc:AlternateContent xmlns:mc="http://schemas.openxmlformats.org/markup-compatibility/2006">
-          <mc:Choice xmlns:a14="http://schemas.microsoft.com/office/drawing/2010/main" Requires="a14">
+        <mc:AlternateContent xmlns:mc="http://schemas.openxmlformats.org/markup-compatibility/2006" xmlns:a14="http://schemas.microsoft.com/office/drawing/2010/main">
+          <mc:Choice Requires="a14">
             <p:sp>
               <p:nvSpPr>
                 <p:cNvPr id="42" name="文字方塊 41">
@@ -6724,7 +6725,7 @@
               </p:txBody>
             </p:sp>
           </mc:Choice>
-          <mc:Fallback>
+          <mc:Fallback xmlns="">
             <p:sp>
               <p:nvSpPr>
                 <p:cNvPr id="42" name="文字方塊 41">
@@ -6774,6 +6775,1734 @@
     <p:extLst>
       <p:ext uri="{BB962C8B-B14F-4D97-AF65-F5344CB8AC3E}">
         <p14:creationId xmlns:p14="http://schemas.microsoft.com/office/powerpoint/2010/main" val="2609805055"/>
+      </p:ext>
+    </p:extLst>
+  </p:cSld>
+  <p:clrMapOvr>
+    <a:masterClrMapping/>
+  </p:clrMapOvr>
+</p:sld>
+</file>
+
+<file path=ppt/slides/slide5.xml><?xml version="1.0" encoding="utf-8"?>
+<p:sld xmlns:a="http://schemas.openxmlformats.org/drawingml/2006/main" xmlns:r="http://schemas.openxmlformats.org/officeDocument/2006/relationships" xmlns:p="http://schemas.openxmlformats.org/presentationml/2006/main" show="0">
+  <p:cSld>
+    <p:spTree>
+      <p:nvGrpSpPr>
+        <p:cNvPr id="1" name=""/>
+        <p:cNvGrpSpPr/>
+        <p:nvPr/>
+      </p:nvGrpSpPr>
+      <p:grpSpPr>
+        <a:xfrm>
+          <a:off x="0" y="0"/>
+          <a:ext cx="0" cy="0"/>
+          <a:chOff x="0" y="0"/>
+          <a:chExt cx="0" cy="0"/>
+        </a:xfrm>
+      </p:grpSpPr>
+      <p:grpSp>
+        <p:nvGrpSpPr>
+          <p:cNvPr id="5" name="群組 4">
+            <a:extLst>
+              <a:ext uri="{FF2B5EF4-FFF2-40B4-BE49-F238E27FC236}">
+                <a16:creationId xmlns:a16="http://schemas.microsoft.com/office/drawing/2014/main" id="{732034BB-93A0-4BCC-A054-6815B502CBAD}"/>
+              </a:ext>
+            </a:extLst>
+          </p:cNvPr>
+          <p:cNvGrpSpPr/>
+          <p:nvPr/>
+        </p:nvGrpSpPr>
+        <p:grpSpPr>
+          <a:xfrm>
+            <a:off x="-60349" y="-4968"/>
+            <a:ext cx="9951773" cy="3079442"/>
+            <a:chOff x="-60349" y="2169165"/>
+            <a:chExt cx="9951773" cy="3079442"/>
+          </a:xfrm>
+        </p:grpSpPr>
+        <p:sp>
+          <p:nvSpPr>
+            <p:cNvPr id="122" name="矩形 121">
+              <a:extLst>
+                <a:ext uri="{FF2B5EF4-FFF2-40B4-BE49-F238E27FC236}">
+                  <a16:creationId xmlns:a16="http://schemas.microsoft.com/office/drawing/2014/main" id="{3AD9E2E4-BE1A-40F0-912D-43E87B0D9634}"/>
+                </a:ext>
+              </a:extLst>
+            </p:cNvPr>
+            <p:cNvSpPr/>
+            <p:nvPr/>
+          </p:nvSpPr>
+          <p:spPr>
+            <a:xfrm>
+              <a:off x="-1" y="2169165"/>
+              <a:ext cx="9891425" cy="2574343"/>
+            </a:xfrm>
+            <a:prstGeom prst="rect">
+              <a:avLst/>
+            </a:prstGeom>
+            <a:solidFill>
+              <a:schemeClr val="bg1"/>
+            </a:solidFill>
+            <a:ln>
+              <a:noFill/>
+            </a:ln>
+          </p:spPr>
+          <p:style>
+            <a:lnRef idx="2">
+              <a:schemeClr val="accent1">
+                <a:shade val="50000"/>
+              </a:schemeClr>
+            </a:lnRef>
+            <a:fillRef idx="1">
+              <a:schemeClr val="accent1"/>
+            </a:fillRef>
+            <a:effectRef idx="0">
+              <a:schemeClr val="accent1"/>
+            </a:effectRef>
+            <a:fontRef idx="minor">
+              <a:schemeClr val="lt1"/>
+            </a:fontRef>
+          </p:style>
+          <p:txBody>
+            <a:bodyPr rot="0" spcFirstLastPara="0" vertOverflow="overflow" horzOverflow="overflow" vert="horz" wrap="square" lIns="68000" tIns="34000" rIns="68000" bIns="34000" numCol="1" spcCol="0" rtlCol="0" fromWordArt="0" anchor="ctr" anchorCtr="0" forceAA="0" compatLnSpc="1">
+              <a:prstTxWarp prst="textNoShape">
+                <a:avLst/>
+              </a:prstTxWarp>
+              <a:noAutofit/>
+            </a:bodyPr>
+            <a:lstStyle/>
+            <a:p>
+              <a:pPr algn="ctr"/>
+              <a:endParaRPr lang="zh-TW" altLang="en-US" sz="2000" dirty="0"/>
+            </a:p>
+          </p:txBody>
+        </p:sp>
+        <p:grpSp>
+          <p:nvGrpSpPr>
+            <p:cNvPr id="7" name="群組 6">
+              <a:extLst>
+                <a:ext uri="{FF2B5EF4-FFF2-40B4-BE49-F238E27FC236}">
+                  <a16:creationId xmlns:a16="http://schemas.microsoft.com/office/drawing/2014/main" id="{21E48CAA-B7E4-48A7-893D-0B819B444661}"/>
+                </a:ext>
+              </a:extLst>
+            </p:cNvPr>
+            <p:cNvGrpSpPr/>
+            <p:nvPr/>
+          </p:nvGrpSpPr>
+          <p:grpSpPr>
+            <a:xfrm>
+              <a:off x="-60349" y="2813019"/>
+              <a:ext cx="5069851" cy="1924672"/>
+              <a:chOff x="799820" y="1920474"/>
+              <a:chExt cx="5972891" cy="2351821"/>
+            </a:xfrm>
+          </p:grpSpPr>
+          <p:pic>
+            <p:nvPicPr>
+              <p:cNvPr id="8" name="圖片 7">
+                <a:extLst>
+                  <a:ext uri="{FF2B5EF4-FFF2-40B4-BE49-F238E27FC236}">
+                    <a16:creationId xmlns:a16="http://schemas.microsoft.com/office/drawing/2014/main" id="{5BAB739D-EF50-4AFB-9988-CC198712CD3B}"/>
+                  </a:ext>
+                </a:extLst>
+              </p:cNvPr>
+              <p:cNvPicPr>
+                <a:picLocks noChangeAspect="1"/>
+              </p:cNvPicPr>
+              <p:nvPr/>
+            </p:nvPicPr>
+            <p:blipFill rotWithShape="1">
+              <a:blip r:embed="rId2">
+                <a:extLst>
+                  <a:ext uri="{28A0092B-C50C-407E-A947-70E740481C1C}">
+                    <a14:useLocalDpi xmlns:a14="http://schemas.microsoft.com/office/drawing/2010/main" val="0"/>
+                  </a:ext>
+                </a:extLst>
+              </a:blip>
+              <a:srcRect l="8223" b="51017"/>
+              <a:stretch/>
+            </p:blipFill>
+            <p:spPr>
+              <a:xfrm>
+                <a:off x="1197695" y="1920474"/>
+                <a:ext cx="5575016" cy="2351821"/>
+              </a:xfrm>
+              <a:prstGeom prst="rect">
+                <a:avLst/>
+              </a:prstGeom>
+            </p:spPr>
+          </p:pic>
+          <mc:AlternateContent xmlns:mc="http://schemas.openxmlformats.org/markup-compatibility/2006" xmlns:a14="http://schemas.microsoft.com/office/drawing/2010/main">
+            <mc:Choice Requires="a14">
+              <p:sp>
+                <p:nvSpPr>
+                  <p:cNvPr id="10" name="文字方塊 9">
+                    <a:extLst>
+                      <a:ext uri="{FF2B5EF4-FFF2-40B4-BE49-F238E27FC236}">
+                        <a16:creationId xmlns:a16="http://schemas.microsoft.com/office/drawing/2014/main" id="{7D6B8A5F-28B9-4F81-AFEA-3C220B3BE1F6}"/>
+                      </a:ext>
+                    </a:extLst>
+                  </p:cNvPr>
+                  <p:cNvSpPr txBox="1"/>
+                  <p:nvPr/>
+                </p:nvSpPr>
+                <p:spPr>
+                  <a:xfrm rot="16200000">
+                    <a:off x="24997" y="2764137"/>
+                    <a:ext cx="2021024" cy="471377"/>
+                  </a:xfrm>
+                  <a:prstGeom prst="rect">
+                    <a:avLst/>
+                  </a:prstGeom>
+                  <a:noFill/>
+                </p:spPr>
+                <p:txBody>
+                  <a:bodyPr wrap="square" rtlCol="0">
+                    <a:spAutoFit/>
+                  </a:bodyPr>
+                  <a:lstStyle/>
+                  <a:p>
+                    <a:pPr algn="ctr"/>
+                    <a:r>
+                      <a:rPr lang="en-US" altLang="zh-TW" sz="2000" dirty="0">
+                        <a:latin typeface="Times New Roman" panose="02020603050405020304" pitchFamily="18" charset="0"/>
+                        <a:cs typeface="Times New Roman" panose="02020603050405020304" pitchFamily="18" charset="0"/>
+                      </a:rPr>
+                      <a:t>Energy (</a:t>
+                    </a:r>
+                    <a14:m>
+                      <m:oMath xmlns:m="http://schemas.openxmlformats.org/officeDocument/2006/math">
+                        <m:r>
+                          <m:rPr>
+                            <m:sty m:val="p"/>
+                          </m:rPr>
+                          <a:rPr lang="en-US" altLang="zh-TW" sz="2000" dirty="0">
+                            <a:latin typeface="Cambria Math" panose="02040503050406030204" pitchFamily="18" charset="0"/>
+                          </a:rPr>
+                          <m:t>eV</m:t>
+                        </m:r>
+                      </m:oMath>
+                    </a14:m>
+                    <a:r>
+                      <a:rPr lang="en-US" altLang="zh-TW" sz="2000" dirty="0">
+                        <a:latin typeface="Times New Roman" panose="02020603050405020304" pitchFamily="18" charset="0"/>
+                        <a:cs typeface="Times New Roman" panose="02020603050405020304" pitchFamily="18" charset="0"/>
+                      </a:rPr>
+                      <a:t>) </a:t>
+                    </a:r>
+                    <a:endParaRPr lang="zh-TW" altLang="en-US" sz="2000" dirty="0">
+                      <a:latin typeface="Times New Roman" panose="02020603050405020304" pitchFamily="18" charset="0"/>
+                      <a:cs typeface="Times New Roman" panose="02020603050405020304" pitchFamily="18" charset="0"/>
+                    </a:endParaRPr>
+                  </a:p>
+                </p:txBody>
+              </p:sp>
+            </mc:Choice>
+            <mc:Fallback xmlns="">
+              <p:sp>
+                <p:nvSpPr>
+                  <p:cNvPr id="10" name="文字方塊 9">
+                    <a:extLst>
+                      <a:ext uri="{FF2B5EF4-FFF2-40B4-BE49-F238E27FC236}">
+                        <a16:creationId xmlns:a16="http://schemas.microsoft.com/office/drawing/2014/main" id="{7D6B8A5F-28B9-4F81-AFEA-3C220B3BE1F6}"/>
+                      </a:ext>
+                    </a:extLst>
+                  </p:cNvPr>
+                  <p:cNvSpPr txBox="1">
+                    <a:spLocks noRot="1" noChangeAspect="1" noMove="1" noResize="1" noEditPoints="1" noAdjustHandles="1" noChangeArrowheads="1" noChangeShapeType="1" noTextEdit="1"/>
+                  </p:cNvSpPr>
+                  <p:nvPr/>
+                </p:nvSpPr>
+                <p:spPr>
+                  <a:xfrm rot="16200000">
+                    <a:off x="24997" y="2764137"/>
+                    <a:ext cx="2021024" cy="471377"/>
+                  </a:xfrm>
+                  <a:prstGeom prst="rect">
+                    <a:avLst/>
+                  </a:prstGeom>
+                  <a:blipFill>
+                    <a:blip r:embed="rId3"/>
+                    <a:stretch>
+                      <a:fillRect l="-7576" t="-369" r="-25758"/>
+                    </a:stretch>
+                  </a:blipFill>
+                </p:spPr>
+                <p:txBody>
+                  <a:bodyPr/>
+                  <a:lstStyle/>
+                  <a:p>
+                    <a:r>
+                      <a:rPr lang="zh-TW" altLang="en-US">
+                        <a:noFill/>
+                      </a:rPr>
+                      <a:t> </a:t>
+                    </a:r>
+                  </a:p>
+                </p:txBody>
+              </p:sp>
+            </mc:Fallback>
+          </mc:AlternateContent>
+        </p:grpSp>
+        <p:sp>
+          <p:nvSpPr>
+            <p:cNvPr id="11" name="等腰三角形 10">
+              <a:extLst>
+                <a:ext uri="{FF2B5EF4-FFF2-40B4-BE49-F238E27FC236}">
+                  <a16:creationId xmlns:a16="http://schemas.microsoft.com/office/drawing/2014/main" id="{D4FD763D-E995-46EE-AB33-9DEFB5738E22}"/>
+                </a:ext>
+              </a:extLst>
+            </p:cNvPr>
+            <p:cNvSpPr/>
+            <p:nvPr/>
+          </p:nvSpPr>
+          <p:spPr>
+            <a:xfrm rot="10800000">
+              <a:off x="5321549" y="2932396"/>
+              <a:ext cx="981315" cy="1305939"/>
+            </a:xfrm>
+            <a:prstGeom prst="triangle">
+              <a:avLst/>
+            </a:prstGeom>
+            <a:solidFill>
+              <a:srgbClr val="FFC000">
+                <a:alpha val="30196"/>
+              </a:srgbClr>
+            </a:solidFill>
+            <a:ln>
+              <a:noFill/>
+            </a:ln>
+          </p:spPr>
+          <p:style>
+            <a:lnRef idx="2">
+              <a:schemeClr val="accent4">
+                <a:shade val="50000"/>
+              </a:schemeClr>
+            </a:lnRef>
+            <a:fillRef idx="1">
+              <a:schemeClr val="accent4"/>
+            </a:fillRef>
+            <a:effectRef idx="0">
+              <a:schemeClr val="accent4"/>
+            </a:effectRef>
+            <a:fontRef idx="minor">
+              <a:schemeClr val="lt1"/>
+            </a:fontRef>
+          </p:style>
+          <p:txBody>
+            <a:bodyPr rot="0" spcFirstLastPara="0" vertOverflow="overflow" horzOverflow="overflow" vert="horz" wrap="square" lIns="60391" tIns="30195" rIns="60391" bIns="30195" numCol="1" spcCol="0" rtlCol="0" fromWordArt="0" anchor="ctr" anchorCtr="0" forceAA="0" compatLnSpc="1">
+              <a:prstTxWarp prst="textNoShape">
+                <a:avLst/>
+              </a:prstTxWarp>
+              <a:noAutofit/>
+            </a:bodyPr>
+            <a:lstStyle/>
+            <a:p>
+              <a:pPr algn="ctr"/>
+              <a:endParaRPr lang="zh-TW" altLang="en-US" sz="2000" dirty="0"/>
+            </a:p>
+          </p:txBody>
+        </p:sp>
+        <p:sp>
+          <p:nvSpPr>
+            <p:cNvPr id="12" name="等腰三角形 11">
+              <a:extLst>
+                <a:ext uri="{FF2B5EF4-FFF2-40B4-BE49-F238E27FC236}">
+                  <a16:creationId xmlns:a16="http://schemas.microsoft.com/office/drawing/2014/main" id="{7D8D11FA-0869-4B5A-9E71-FB37126B003D}"/>
+                </a:ext>
+              </a:extLst>
+            </p:cNvPr>
+            <p:cNvSpPr/>
+            <p:nvPr/>
+          </p:nvSpPr>
+          <p:spPr>
+            <a:xfrm rot="10800000">
+              <a:off x="6943574" y="2932396"/>
+              <a:ext cx="981315" cy="1305939"/>
+            </a:xfrm>
+            <a:prstGeom prst="triangle">
+              <a:avLst/>
+            </a:prstGeom>
+            <a:solidFill>
+              <a:srgbClr val="FFC000">
+                <a:alpha val="30196"/>
+              </a:srgbClr>
+            </a:solidFill>
+            <a:ln>
+              <a:noFill/>
+            </a:ln>
+          </p:spPr>
+          <p:style>
+            <a:lnRef idx="2">
+              <a:schemeClr val="accent4">
+                <a:shade val="50000"/>
+              </a:schemeClr>
+            </a:lnRef>
+            <a:fillRef idx="1">
+              <a:schemeClr val="accent4"/>
+            </a:fillRef>
+            <a:effectRef idx="0">
+              <a:schemeClr val="accent4"/>
+            </a:effectRef>
+            <a:fontRef idx="minor">
+              <a:schemeClr val="lt1"/>
+            </a:fontRef>
+          </p:style>
+          <p:txBody>
+            <a:bodyPr rot="0" spcFirstLastPara="0" vertOverflow="overflow" horzOverflow="overflow" vert="horz" wrap="square" lIns="60391" tIns="30195" rIns="60391" bIns="30195" numCol="1" spcCol="0" rtlCol="0" fromWordArt="0" anchor="ctr" anchorCtr="0" forceAA="0" compatLnSpc="1">
+              <a:prstTxWarp prst="textNoShape">
+                <a:avLst/>
+              </a:prstTxWarp>
+              <a:noAutofit/>
+            </a:bodyPr>
+            <a:lstStyle/>
+            <a:p>
+              <a:pPr algn="ctr"/>
+              <a:endParaRPr lang="zh-TW" altLang="en-US" sz="2000"/>
+            </a:p>
+          </p:txBody>
+        </p:sp>
+        <p:pic>
+          <p:nvPicPr>
+            <p:cNvPr id="13" name="圖片 12">
+              <a:extLst>
+                <a:ext uri="{FF2B5EF4-FFF2-40B4-BE49-F238E27FC236}">
+                  <a16:creationId xmlns:a16="http://schemas.microsoft.com/office/drawing/2014/main" id="{A1A1D0E4-3113-4E04-BD2C-E84A9FD6B53A}"/>
+                </a:ext>
+              </a:extLst>
+            </p:cNvPr>
+            <p:cNvPicPr>
+              <a:picLocks noChangeAspect="1"/>
+            </p:cNvPicPr>
+            <p:nvPr/>
+          </p:nvPicPr>
+          <p:blipFill rotWithShape="1">
+            <a:blip r:embed="rId4"/>
+            <a:srcRect l="7992" t="38920" r="6883"/>
+            <a:stretch/>
+          </p:blipFill>
+          <p:spPr>
+            <a:xfrm>
+              <a:off x="6713953" y="3046536"/>
+              <a:ext cx="1409273" cy="614324"/>
+            </a:xfrm>
+            <a:prstGeom prst="rect">
+              <a:avLst/>
+            </a:prstGeom>
+          </p:spPr>
+        </p:pic>
+        <p:sp>
+          <p:nvSpPr>
+            <p:cNvPr id="14" name="等腰三角形 13">
+              <a:extLst>
+                <a:ext uri="{FF2B5EF4-FFF2-40B4-BE49-F238E27FC236}">
+                  <a16:creationId xmlns:a16="http://schemas.microsoft.com/office/drawing/2014/main" id="{37C85585-0A5E-471F-AB5D-12C07CE68314}"/>
+                </a:ext>
+              </a:extLst>
+            </p:cNvPr>
+            <p:cNvSpPr/>
+            <p:nvPr/>
+          </p:nvSpPr>
+          <p:spPr>
+            <a:xfrm rot="10800000">
+              <a:off x="8580648" y="2932392"/>
+              <a:ext cx="981315" cy="1305941"/>
+            </a:xfrm>
+            <a:prstGeom prst="triangle">
+              <a:avLst/>
+            </a:prstGeom>
+            <a:solidFill>
+              <a:srgbClr val="FFC000">
+                <a:alpha val="30196"/>
+              </a:srgbClr>
+            </a:solidFill>
+            <a:ln>
+              <a:noFill/>
+            </a:ln>
+          </p:spPr>
+          <p:style>
+            <a:lnRef idx="2">
+              <a:schemeClr val="accent4">
+                <a:shade val="50000"/>
+              </a:schemeClr>
+            </a:lnRef>
+            <a:fillRef idx="1">
+              <a:schemeClr val="accent4"/>
+            </a:fillRef>
+            <a:effectRef idx="0">
+              <a:schemeClr val="accent4"/>
+            </a:effectRef>
+            <a:fontRef idx="minor">
+              <a:schemeClr val="lt1"/>
+            </a:fontRef>
+          </p:style>
+          <p:txBody>
+            <a:bodyPr rot="0" spcFirstLastPara="0" vertOverflow="overflow" horzOverflow="overflow" vert="horz" wrap="square" lIns="60391" tIns="30195" rIns="60391" bIns="30195" numCol="1" spcCol="0" rtlCol="0" fromWordArt="0" anchor="ctr" anchorCtr="0" forceAA="0" compatLnSpc="1">
+              <a:prstTxWarp prst="textNoShape">
+                <a:avLst/>
+              </a:prstTxWarp>
+              <a:noAutofit/>
+            </a:bodyPr>
+            <a:lstStyle/>
+            <a:p>
+              <a:pPr algn="ctr"/>
+              <a:endParaRPr lang="zh-TW" altLang="en-US" sz="2000"/>
+            </a:p>
+          </p:txBody>
+        </p:sp>
+        <p:cxnSp>
+          <p:nvCxnSpPr>
+            <p:cNvPr id="15" name="直線單箭頭接點 14">
+              <a:extLst>
+                <a:ext uri="{FF2B5EF4-FFF2-40B4-BE49-F238E27FC236}">
+                  <a16:creationId xmlns:a16="http://schemas.microsoft.com/office/drawing/2014/main" id="{5A56791A-DF91-4039-AEDE-7494E99731B4}"/>
+                </a:ext>
+              </a:extLst>
+            </p:cNvPr>
+            <p:cNvCxnSpPr>
+              <a:cxnSpLocks/>
+            </p:cNvCxnSpPr>
+            <p:nvPr/>
+          </p:nvCxnSpPr>
+          <p:spPr>
+            <a:xfrm flipV="1">
+              <a:off x="7437077" y="3081122"/>
+              <a:ext cx="546524" cy="1171346"/>
+            </a:xfrm>
+            <a:prstGeom prst="straightConnector1">
+              <a:avLst/>
+            </a:prstGeom>
+            <a:ln w="57150">
+              <a:solidFill>
+                <a:srgbClr val="E1B037"/>
+              </a:solidFill>
+              <a:headEnd w="sm" len="sm"/>
+              <a:tailEnd type="triangle" w="med" len="lg"/>
+            </a:ln>
+          </p:spPr>
+          <p:style>
+            <a:lnRef idx="3">
+              <a:schemeClr val="accent4"/>
+            </a:lnRef>
+            <a:fillRef idx="0">
+              <a:schemeClr val="accent4"/>
+            </a:fillRef>
+            <a:effectRef idx="2">
+              <a:schemeClr val="accent4"/>
+            </a:effectRef>
+            <a:fontRef idx="minor">
+              <a:schemeClr val="tx1"/>
+            </a:fontRef>
+          </p:style>
+        </p:cxnSp>
+        <p:cxnSp>
+          <p:nvCxnSpPr>
+            <p:cNvPr id="16" name="直線單箭頭接點 15">
+              <a:extLst>
+                <a:ext uri="{FF2B5EF4-FFF2-40B4-BE49-F238E27FC236}">
+                  <a16:creationId xmlns:a16="http://schemas.microsoft.com/office/drawing/2014/main" id="{9217D97A-A881-407B-8FA1-85936A7A9F29}"/>
+                </a:ext>
+              </a:extLst>
+            </p:cNvPr>
+            <p:cNvCxnSpPr>
+              <a:cxnSpLocks/>
+            </p:cNvCxnSpPr>
+            <p:nvPr/>
+          </p:nvCxnSpPr>
+          <p:spPr>
+            <a:xfrm flipV="1">
+              <a:off x="9079114" y="3689126"/>
+              <a:ext cx="37414" cy="563335"/>
+            </a:xfrm>
+            <a:prstGeom prst="straightConnector1">
+              <a:avLst/>
+            </a:prstGeom>
+            <a:ln w="57150">
+              <a:solidFill>
+                <a:srgbClr val="E1B037"/>
+              </a:solidFill>
+              <a:headEnd w="sm" len="sm"/>
+              <a:tailEnd type="triangle" w="med" len="lg"/>
+            </a:ln>
+          </p:spPr>
+          <p:style>
+            <a:lnRef idx="3">
+              <a:schemeClr val="accent4"/>
+            </a:lnRef>
+            <a:fillRef idx="0">
+              <a:schemeClr val="accent4"/>
+            </a:fillRef>
+            <a:effectRef idx="2">
+              <a:schemeClr val="accent4"/>
+            </a:effectRef>
+            <a:fontRef idx="minor">
+              <a:schemeClr val="tx1"/>
+            </a:fontRef>
+          </p:style>
+        </p:cxnSp>
+        <p:pic>
+          <p:nvPicPr>
+            <p:cNvPr id="17" name="圖片 16">
+              <a:extLst>
+                <a:ext uri="{FF2B5EF4-FFF2-40B4-BE49-F238E27FC236}">
+                  <a16:creationId xmlns:a16="http://schemas.microsoft.com/office/drawing/2014/main" id="{C9538FA4-B484-4874-82E8-2AB2EBE57395}"/>
+                </a:ext>
+              </a:extLst>
+            </p:cNvPr>
+            <p:cNvPicPr>
+              <a:picLocks noChangeAspect="1"/>
+            </p:cNvPicPr>
+            <p:nvPr/>
+          </p:nvPicPr>
+          <p:blipFill rotWithShape="1">
+            <a:blip r:embed="rId5"/>
+            <a:srcRect l="7872" t="40135" r="7992" b="-2"/>
+            <a:stretch/>
+          </p:blipFill>
+          <p:spPr>
+            <a:xfrm rot="10800000">
+              <a:off x="8359225" y="4221735"/>
+              <a:ext cx="1392887" cy="602117"/>
+            </a:xfrm>
+            <a:prstGeom prst="rect">
+              <a:avLst/>
+            </a:prstGeom>
+          </p:spPr>
+        </p:pic>
+        <p:pic>
+          <p:nvPicPr>
+            <p:cNvPr id="18" name="圖片 17">
+              <a:extLst>
+                <a:ext uri="{FF2B5EF4-FFF2-40B4-BE49-F238E27FC236}">
+                  <a16:creationId xmlns:a16="http://schemas.microsoft.com/office/drawing/2014/main" id="{CDBB83D2-DB1E-44AD-B667-D7FF00814FAA}"/>
+                </a:ext>
+              </a:extLst>
+            </p:cNvPr>
+            <p:cNvPicPr>
+              <a:picLocks noChangeAspect="1"/>
+            </p:cNvPicPr>
+            <p:nvPr/>
+          </p:nvPicPr>
+          <p:blipFill rotWithShape="1">
+            <a:blip r:embed="rId4"/>
+            <a:srcRect l="7992" t="38920" r="6883"/>
+            <a:stretch/>
+          </p:blipFill>
+          <p:spPr>
+            <a:xfrm>
+              <a:off x="8351027" y="3046536"/>
+              <a:ext cx="1409271" cy="614325"/>
+            </a:xfrm>
+            <a:prstGeom prst="rect">
+              <a:avLst/>
+            </a:prstGeom>
+          </p:spPr>
+        </p:pic>
+        <p:pic>
+          <p:nvPicPr>
+            <p:cNvPr id="19" name="圖片 18">
+              <a:extLst>
+                <a:ext uri="{FF2B5EF4-FFF2-40B4-BE49-F238E27FC236}">
+                  <a16:creationId xmlns:a16="http://schemas.microsoft.com/office/drawing/2014/main" id="{E4C95218-112C-426D-B969-1129C726731F}"/>
+                </a:ext>
+              </a:extLst>
+            </p:cNvPr>
+            <p:cNvPicPr>
+              <a:picLocks noChangeAspect="1"/>
+            </p:cNvPicPr>
+            <p:nvPr/>
+          </p:nvPicPr>
+          <p:blipFill rotWithShape="1">
+            <a:blip r:embed="rId5"/>
+            <a:srcRect l="7663" t="40135" r="7542" b="-2"/>
+            <a:stretch/>
+          </p:blipFill>
+          <p:spPr>
+            <a:xfrm>
+              <a:off x="8353756" y="2784186"/>
+              <a:ext cx="1403813" cy="602117"/>
+            </a:xfrm>
+            <a:prstGeom prst="rect">
+              <a:avLst/>
+            </a:prstGeom>
+          </p:spPr>
+        </p:pic>
+        <p:sp>
+          <p:nvSpPr>
+            <p:cNvPr id="20" name="橢圓 19">
+              <a:extLst>
+                <a:ext uri="{FF2B5EF4-FFF2-40B4-BE49-F238E27FC236}">
+                  <a16:creationId xmlns:a16="http://schemas.microsoft.com/office/drawing/2014/main" id="{4A6C8352-5329-467E-BB19-769D6657AD37}"/>
+                </a:ext>
+              </a:extLst>
+            </p:cNvPr>
+            <p:cNvSpPr/>
+            <p:nvPr/>
+          </p:nvSpPr>
+          <p:spPr>
+            <a:xfrm>
+              <a:off x="9010663" y="4188367"/>
+              <a:ext cx="118877" cy="118877"/>
+            </a:xfrm>
+            <a:prstGeom prst="ellipse">
+              <a:avLst/>
+            </a:prstGeom>
+            <a:solidFill>
+              <a:schemeClr val="bg1"/>
+            </a:solidFill>
+            <a:ln>
+              <a:solidFill>
+                <a:schemeClr val="tx1"/>
+              </a:solidFill>
+            </a:ln>
+          </p:spPr>
+          <p:style>
+            <a:lnRef idx="2">
+              <a:schemeClr val="accent1">
+                <a:shade val="50000"/>
+              </a:schemeClr>
+            </a:lnRef>
+            <a:fillRef idx="1">
+              <a:schemeClr val="accent1"/>
+            </a:fillRef>
+            <a:effectRef idx="0">
+              <a:schemeClr val="accent1"/>
+            </a:effectRef>
+            <a:fontRef idx="minor">
+              <a:schemeClr val="lt1"/>
+            </a:fontRef>
+          </p:style>
+          <p:txBody>
+            <a:bodyPr rtlCol="0" anchor="ctr"/>
+            <a:lstStyle/>
+            <a:p>
+              <a:pPr algn="ctr"/>
+              <a:endParaRPr lang="zh-TW" altLang="en-US" sz="2000" dirty="0"/>
+            </a:p>
+          </p:txBody>
+        </p:sp>
+        <p:sp>
+          <p:nvSpPr>
+            <p:cNvPr id="21" name="橢圓 20">
+              <a:extLst>
+                <a:ext uri="{FF2B5EF4-FFF2-40B4-BE49-F238E27FC236}">
+                  <a16:creationId xmlns:a16="http://schemas.microsoft.com/office/drawing/2014/main" id="{038FB063-D3C1-40B6-A8F1-F9C76F9C09C9}"/>
+                </a:ext>
+              </a:extLst>
+            </p:cNvPr>
+            <p:cNvSpPr/>
+            <p:nvPr/>
+          </p:nvSpPr>
+          <p:spPr>
+            <a:xfrm>
+              <a:off x="9062674" y="3561401"/>
+              <a:ext cx="118877" cy="118877"/>
+            </a:xfrm>
+            <a:prstGeom prst="ellipse">
+              <a:avLst/>
+            </a:prstGeom>
+            <a:solidFill>
+              <a:schemeClr val="tx1"/>
+            </a:solidFill>
+            <a:ln>
+              <a:solidFill>
+                <a:schemeClr val="tx1"/>
+              </a:solidFill>
+            </a:ln>
+          </p:spPr>
+          <p:style>
+            <a:lnRef idx="2">
+              <a:schemeClr val="accent1">
+                <a:shade val="50000"/>
+              </a:schemeClr>
+            </a:lnRef>
+            <a:fillRef idx="1">
+              <a:schemeClr val="accent1"/>
+            </a:fillRef>
+            <a:effectRef idx="0">
+              <a:schemeClr val="accent1"/>
+            </a:effectRef>
+            <a:fontRef idx="minor">
+              <a:schemeClr val="lt1"/>
+            </a:fontRef>
+          </p:style>
+          <p:txBody>
+            <a:bodyPr rtlCol="0" anchor="ctr"/>
+            <a:lstStyle/>
+            <a:p>
+              <a:pPr algn="ctr"/>
+              <a:endParaRPr lang="zh-TW" altLang="en-US" sz="2000" dirty="0"/>
+            </a:p>
+          </p:txBody>
+        </p:sp>
+        <p:sp>
+          <p:nvSpPr>
+            <p:cNvPr id="22" name="文字方塊 21">
+              <a:extLst>
+                <a:ext uri="{FF2B5EF4-FFF2-40B4-BE49-F238E27FC236}">
+                  <a16:creationId xmlns:a16="http://schemas.microsoft.com/office/drawing/2014/main" id="{E79590F3-5E72-4E66-803A-FFF28D6BEA83}"/>
+                </a:ext>
+              </a:extLst>
+            </p:cNvPr>
+            <p:cNvSpPr txBox="1"/>
+            <p:nvPr/>
+          </p:nvSpPr>
+          <p:spPr>
+            <a:xfrm>
+              <a:off x="5081084" y="2292526"/>
+              <a:ext cx="1488460" cy="707886"/>
+            </a:xfrm>
+            <a:prstGeom prst="rect">
+              <a:avLst/>
+            </a:prstGeom>
+            <a:noFill/>
+          </p:spPr>
+          <p:txBody>
+            <a:bodyPr wrap="square" rtlCol="0">
+              <a:spAutoFit/>
+            </a:bodyPr>
+            <a:lstStyle/>
+            <a:p>
+              <a:pPr algn="ctr"/>
+              <a:r>
+                <a:rPr lang="en-US" altLang="zh-TW" sz="2000" dirty="0">
+                  <a:latin typeface="Times New Roman" panose="02020603050405020304" pitchFamily="18" charset="0"/>
+                  <a:cs typeface="Times New Roman" panose="02020603050405020304" pitchFamily="18" charset="0"/>
+                </a:rPr>
+                <a:t>Spin-allowed</a:t>
+              </a:r>
+            </a:p>
+          </p:txBody>
+        </p:sp>
+        <p:sp>
+          <p:nvSpPr>
+            <p:cNvPr id="23" name="文字方塊 22">
+              <a:extLst>
+                <a:ext uri="{FF2B5EF4-FFF2-40B4-BE49-F238E27FC236}">
+                  <a16:creationId xmlns:a16="http://schemas.microsoft.com/office/drawing/2014/main" id="{0EBB73C4-6A0F-453D-9FB7-127F4ED25713}"/>
+                </a:ext>
+              </a:extLst>
+            </p:cNvPr>
+            <p:cNvSpPr txBox="1"/>
+            <p:nvPr/>
+          </p:nvSpPr>
+          <p:spPr>
+            <a:xfrm>
+              <a:off x="8304636" y="2292528"/>
+              <a:ext cx="1488459" cy="707886"/>
+            </a:xfrm>
+            <a:prstGeom prst="rect">
+              <a:avLst/>
+            </a:prstGeom>
+            <a:noFill/>
+          </p:spPr>
+          <p:txBody>
+            <a:bodyPr wrap="square" rtlCol="0">
+              <a:spAutoFit/>
+            </a:bodyPr>
+            <a:lstStyle/>
+            <a:p>
+              <a:pPr algn="ctr"/>
+              <a:r>
+                <a:rPr lang="en-US" altLang="zh-TW" sz="2000" dirty="0">
+                  <a:latin typeface="Times New Roman" panose="02020603050405020304" pitchFamily="18" charset="0"/>
+                  <a:cs typeface="Times New Roman" panose="02020603050405020304" pitchFamily="18" charset="0"/>
+                </a:rPr>
+                <a:t>Spin-forbidden </a:t>
+              </a:r>
+              <a:endParaRPr lang="zh-TW" altLang="en-US" sz="2000" dirty="0">
+                <a:latin typeface="Times New Roman" panose="02020603050405020304" pitchFamily="18" charset="0"/>
+                <a:cs typeface="Times New Roman" panose="02020603050405020304" pitchFamily="18" charset="0"/>
+              </a:endParaRPr>
+            </a:p>
+          </p:txBody>
+        </p:sp>
+        <p:pic>
+          <p:nvPicPr>
+            <p:cNvPr id="24" name="圖片 23">
+              <a:extLst>
+                <a:ext uri="{FF2B5EF4-FFF2-40B4-BE49-F238E27FC236}">
+                  <a16:creationId xmlns:a16="http://schemas.microsoft.com/office/drawing/2014/main" id="{9144A5F0-4A70-4852-9F02-689D5C3B3FD8}"/>
+                </a:ext>
+              </a:extLst>
+            </p:cNvPr>
+            <p:cNvPicPr>
+              <a:picLocks noChangeAspect="1"/>
+            </p:cNvPicPr>
+            <p:nvPr/>
+          </p:nvPicPr>
+          <p:blipFill rotWithShape="1">
+            <a:blip r:embed="rId5"/>
+            <a:srcRect l="7872" t="40135" r="7992" b="-2"/>
+            <a:stretch/>
+          </p:blipFill>
+          <p:spPr>
+            <a:xfrm rot="10800000">
+              <a:off x="6722154" y="4221734"/>
+              <a:ext cx="1392887" cy="602118"/>
+            </a:xfrm>
+            <a:prstGeom prst="rect">
+              <a:avLst/>
+            </a:prstGeom>
+          </p:spPr>
+        </p:pic>
+        <p:pic>
+          <p:nvPicPr>
+            <p:cNvPr id="25" name="圖片 24">
+              <a:extLst>
+                <a:ext uri="{FF2B5EF4-FFF2-40B4-BE49-F238E27FC236}">
+                  <a16:creationId xmlns:a16="http://schemas.microsoft.com/office/drawing/2014/main" id="{90882F06-17D2-4687-B05F-BFAC111F0479}"/>
+                </a:ext>
+              </a:extLst>
+            </p:cNvPr>
+            <p:cNvPicPr>
+              <a:picLocks noChangeAspect="1"/>
+            </p:cNvPicPr>
+            <p:nvPr/>
+          </p:nvPicPr>
+          <p:blipFill rotWithShape="1">
+            <a:blip r:embed="rId5"/>
+            <a:srcRect l="7663" t="40135" r="7542" b="-2"/>
+            <a:stretch/>
+          </p:blipFill>
+          <p:spPr>
+            <a:xfrm>
+              <a:off x="6716683" y="2784184"/>
+              <a:ext cx="1403813" cy="602118"/>
+            </a:xfrm>
+            <a:prstGeom prst="rect">
+              <a:avLst/>
+            </a:prstGeom>
+          </p:spPr>
+        </p:pic>
+        <p:sp>
+          <p:nvSpPr>
+            <p:cNvPr id="26" name="橢圓 25">
+              <a:extLst>
+                <a:ext uri="{FF2B5EF4-FFF2-40B4-BE49-F238E27FC236}">
+                  <a16:creationId xmlns:a16="http://schemas.microsoft.com/office/drawing/2014/main" id="{DDA108E7-61F8-4D64-839E-C696759D9A20}"/>
+                </a:ext>
+              </a:extLst>
+            </p:cNvPr>
+            <p:cNvSpPr/>
+            <p:nvPr/>
+          </p:nvSpPr>
+          <p:spPr>
+            <a:xfrm>
+              <a:off x="7373591" y="4188369"/>
+              <a:ext cx="118879" cy="118879"/>
+            </a:xfrm>
+            <a:prstGeom prst="ellipse">
+              <a:avLst/>
+            </a:prstGeom>
+            <a:solidFill>
+              <a:schemeClr val="bg1"/>
+            </a:solidFill>
+            <a:ln>
+              <a:solidFill>
+                <a:schemeClr val="tx1"/>
+              </a:solidFill>
+            </a:ln>
+          </p:spPr>
+          <p:style>
+            <a:lnRef idx="2">
+              <a:schemeClr val="accent1">
+                <a:shade val="50000"/>
+              </a:schemeClr>
+            </a:lnRef>
+            <a:fillRef idx="1">
+              <a:schemeClr val="accent1"/>
+            </a:fillRef>
+            <a:effectRef idx="0">
+              <a:schemeClr val="accent1"/>
+            </a:effectRef>
+            <a:fontRef idx="minor">
+              <a:schemeClr val="lt1"/>
+            </a:fontRef>
+          </p:style>
+          <p:txBody>
+            <a:bodyPr rtlCol="0" anchor="ctr"/>
+            <a:lstStyle/>
+            <a:p>
+              <a:pPr algn="ctr"/>
+              <a:endParaRPr lang="zh-TW" altLang="en-US" sz="2000" dirty="0"/>
+            </a:p>
+          </p:txBody>
+        </p:sp>
+        <p:sp>
+          <p:nvSpPr>
+            <p:cNvPr id="27" name="橢圓 26">
+              <a:extLst>
+                <a:ext uri="{FF2B5EF4-FFF2-40B4-BE49-F238E27FC236}">
+                  <a16:creationId xmlns:a16="http://schemas.microsoft.com/office/drawing/2014/main" id="{DFA2CD90-8F7D-4D98-901E-434B027FB1AA}"/>
+                </a:ext>
+              </a:extLst>
+            </p:cNvPr>
+            <p:cNvSpPr/>
+            <p:nvPr/>
+          </p:nvSpPr>
+          <p:spPr>
+            <a:xfrm>
+              <a:off x="7951738" y="2936332"/>
+              <a:ext cx="118877" cy="118877"/>
+            </a:xfrm>
+            <a:prstGeom prst="ellipse">
+              <a:avLst/>
+            </a:prstGeom>
+            <a:solidFill>
+              <a:schemeClr val="tx1"/>
+            </a:solidFill>
+            <a:ln>
+              <a:solidFill>
+                <a:schemeClr val="tx1"/>
+              </a:solidFill>
+            </a:ln>
+          </p:spPr>
+          <p:style>
+            <a:lnRef idx="2">
+              <a:schemeClr val="accent1">
+                <a:shade val="50000"/>
+              </a:schemeClr>
+            </a:lnRef>
+            <a:fillRef idx="1">
+              <a:schemeClr val="accent1"/>
+            </a:fillRef>
+            <a:effectRef idx="0">
+              <a:schemeClr val="accent1"/>
+            </a:effectRef>
+            <a:fontRef idx="minor">
+              <a:schemeClr val="lt1"/>
+            </a:fontRef>
+          </p:style>
+          <p:txBody>
+            <a:bodyPr rtlCol="0" anchor="ctr"/>
+            <a:lstStyle/>
+            <a:p>
+              <a:pPr algn="ctr"/>
+              <a:endParaRPr lang="zh-TW" altLang="en-US" sz="2000" dirty="0"/>
+            </a:p>
+          </p:txBody>
+        </p:sp>
+        <p:sp>
+          <p:nvSpPr>
+            <p:cNvPr id="28" name="文字方塊 27">
+              <a:extLst>
+                <a:ext uri="{FF2B5EF4-FFF2-40B4-BE49-F238E27FC236}">
+                  <a16:creationId xmlns:a16="http://schemas.microsoft.com/office/drawing/2014/main" id="{554DDEA1-971F-41C9-87F7-5D8F553925A7}"/>
+                </a:ext>
+              </a:extLst>
+            </p:cNvPr>
+            <p:cNvSpPr txBox="1"/>
+            <p:nvPr/>
+          </p:nvSpPr>
+          <p:spPr>
+            <a:xfrm>
+              <a:off x="6513598" y="2292526"/>
+              <a:ext cx="1796377" cy="707886"/>
+            </a:xfrm>
+            <a:prstGeom prst="rect">
+              <a:avLst/>
+            </a:prstGeom>
+            <a:noFill/>
+          </p:spPr>
+          <p:txBody>
+            <a:bodyPr wrap="square" rtlCol="0">
+              <a:spAutoFit/>
+            </a:bodyPr>
+            <a:lstStyle/>
+            <a:p>
+              <a:pPr algn="ctr"/>
+              <a:r>
+                <a:rPr lang="en-US" altLang="zh-TW" sz="2000" dirty="0">
+                  <a:latin typeface="Times New Roman" panose="02020603050405020304" pitchFamily="18" charset="0"/>
+                  <a:cs typeface="Times New Roman" panose="02020603050405020304" pitchFamily="18" charset="0"/>
+                </a:rPr>
+                <a:t>Momentum-forbidden </a:t>
+              </a:r>
+              <a:endParaRPr lang="zh-TW" altLang="en-US" sz="2000" dirty="0">
+                <a:latin typeface="Times New Roman" panose="02020603050405020304" pitchFamily="18" charset="0"/>
+                <a:cs typeface="Times New Roman" panose="02020603050405020304" pitchFamily="18" charset="0"/>
+              </a:endParaRPr>
+            </a:p>
+          </p:txBody>
+        </p:sp>
+        <p:cxnSp>
+          <p:nvCxnSpPr>
+            <p:cNvPr id="29" name="直線單箭頭接點 28">
+              <a:extLst>
+                <a:ext uri="{FF2B5EF4-FFF2-40B4-BE49-F238E27FC236}">
+                  <a16:creationId xmlns:a16="http://schemas.microsoft.com/office/drawing/2014/main" id="{70C3CD04-9E2F-4659-AD6C-545B20981E20}"/>
+                </a:ext>
+              </a:extLst>
+            </p:cNvPr>
+            <p:cNvCxnSpPr>
+              <a:cxnSpLocks/>
+            </p:cNvCxnSpPr>
+            <p:nvPr/>
+          </p:nvCxnSpPr>
+          <p:spPr>
+            <a:xfrm>
+              <a:off x="8319781" y="4866711"/>
+              <a:ext cx="1548800" cy="0"/>
+            </a:xfrm>
+            <a:prstGeom prst="straightConnector1">
+              <a:avLst/>
+            </a:prstGeom>
+            <a:ln>
+              <a:tailEnd type="triangle" w="lg" len="lg"/>
+            </a:ln>
+          </p:spPr>
+          <p:style>
+            <a:lnRef idx="3">
+              <a:schemeClr val="dk1"/>
+            </a:lnRef>
+            <a:fillRef idx="0">
+              <a:schemeClr val="dk1"/>
+            </a:fillRef>
+            <a:effectRef idx="2">
+              <a:schemeClr val="dk1"/>
+            </a:effectRef>
+            <a:fontRef idx="minor">
+              <a:schemeClr val="tx1"/>
+            </a:fontRef>
+          </p:style>
+        </p:cxnSp>
+        <p:cxnSp>
+          <p:nvCxnSpPr>
+            <p:cNvPr id="30" name="直線單箭頭接點 29">
+              <a:extLst>
+                <a:ext uri="{FF2B5EF4-FFF2-40B4-BE49-F238E27FC236}">
+                  <a16:creationId xmlns:a16="http://schemas.microsoft.com/office/drawing/2014/main" id="{718782EF-F4FE-4BE6-9A8B-2D354FEEFED6}"/>
+                </a:ext>
+              </a:extLst>
+            </p:cNvPr>
+            <p:cNvCxnSpPr>
+              <a:cxnSpLocks/>
+            </p:cNvCxnSpPr>
+            <p:nvPr/>
+          </p:nvCxnSpPr>
+          <p:spPr>
+            <a:xfrm>
+              <a:off x="6676313" y="4866713"/>
+              <a:ext cx="1548802" cy="0"/>
+            </a:xfrm>
+            <a:prstGeom prst="straightConnector1">
+              <a:avLst/>
+            </a:prstGeom>
+            <a:ln>
+              <a:tailEnd type="triangle" w="lg" len="lg"/>
+            </a:ln>
+          </p:spPr>
+          <p:style>
+            <a:lnRef idx="3">
+              <a:schemeClr val="dk1"/>
+            </a:lnRef>
+            <a:fillRef idx="0">
+              <a:schemeClr val="dk1"/>
+            </a:fillRef>
+            <a:effectRef idx="2">
+              <a:schemeClr val="dk1"/>
+            </a:effectRef>
+            <a:fontRef idx="minor">
+              <a:schemeClr val="tx1"/>
+            </a:fontRef>
+          </p:style>
+        </p:cxnSp>
+        <p:cxnSp>
+          <p:nvCxnSpPr>
+            <p:cNvPr id="31" name="直線單箭頭接點 30">
+              <a:extLst>
+                <a:ext uri="{FF2B5EF4-FFF2-40B4-BE49-F238E27FC236}">
+                  <a16:creationId xmlns:a16="http://schemas.microsoft.com/office/drawing/2014/main" id="{463E0AB0-DB4E-43F6-9729-954DEC745AFE}"/>
+                </a:ext>
+              </a:extLst>
+            </p:cNvPr>
+            <p:cNvCxnSpPr>
+              <a:cxnSpLocks/>
+            </p:cNvCxnSpPr>
+            <p:nvPr/>
+          </p:nvCxnSpPr>
+          <p:spPr>
+            <a:xfrm>
+              <a:off x="4960154" y="4866713"/>
+              <a:ext cx="1612513" cy="0"/>
+            </a:xfrm>
+            <a:prstGeom prst="straightConnector1">
+              <a:avLst/>
+            </a:prstGeom>
+            <a:ln>
+              <a:tailEnd type="triangle" w="lg" len="lg"/>
+            </a:ln>
+          </p:spPr>
+          <p:style>
+            <a:lnRef idx="3">
+              <a:schemeClr val="dk1"/>
+            </a:lnRef>
+            <a:fillRef idx="0">
+              <a:schemeClr val="dk1"/>
+            </a:fillRef>
+            <a:effectRef idx="2">
+              <a:schemeClr val="dk1"/>
+            </a:effectRef>
+            <a:fontRef idx="minor">
+              <a:schemeClr val="tx1"/>
+            </a:fontRef>
+          </p:style>
+        </p:cxnSp>
+        <p:sp>
+          <p:nvSpPr>
+            <p:cNvPr id="32" name="箭號: 向上 31">
+              <a:extLst>
+                <a:ext uri="{FF2B5EF4-FFF2-40B4-BE49-F238E27FC236}">
+                  <a16:creationId xmlns:a16="http://schemas.microsoft.com/office/drawing/2014/main" id="{5960BB8F-ACA6-4450-9DCA-B86E71C7B61B}"/>
+                </a:ext>
+              </a:extLst>
+            </p:cNvPr>
+            <p:cNvSpPr/>
+            <p:nvPr/>
+          </p:nvSpPr>
+          <p:spPr>
+            <a:xfrm>
+              <a:off x="4967917" y="2647488"/>
+              <a:ext cx="118753" cy="273974"/>
+            </a:xfrm>
+            <a:prstGeom prst="upArrow">
+              <a:avLst>
+                <a:gd name="adj1" fmla="val 30192"/>
+                <a:gd name="adj2" fmla="val 76408"/>
+              </a:avLst>
+            </a:prstGeom>
+            <a:solidFill>
+              <a:srgbClr val="FF0000"/>
+            </a:solidFill>
+            <a:ln>
+              <a:noFill/>
+            </a:ln>
+          </p:spPr>
+          <p:style>
+            <a:lnRef idx="2">
+              <a:schemeClr val="accent1">
+                <a:shade val="50000"/>
+              </a:schemeClr>
+            </a:lnRef>
+            <a:fillRef idx="1">
+              <a:schemeClr val="accent1"/>
+            </a:fillRef>
+            <a:effectRef idx="0">
+              <a:schemeClr val="accent1"/>
+            </a:effectRef>
+            <a:fontRef idx="minor">
+              <a:schemeClr val="lt1"/>
+            </a:fontRef>
+          </p:style>
+          <p:txBody>
+            <a:bodyPr rtlCol="0" anchor="ctr"/>
+            <a:lstStyle/>
+            <a:p>
+              <a:pPr algn="ctr"/>
+              <a:endParaRPr lang="zh-TW" altLang="en-US" sz="2000" dirty="0"/>
+            </a:p>
+          </p:txBody>
+        </p:sp>
+        <p:sp>
+          <p:nvSpPr>
+            <p:cNvPr id="33" name="箭號: 向上 32">
+              <a:extLst>
+                <a:ext uri="{FF2B5EF4-FFF2-40B4-BE49-F238E27FC236}">
+                  <a16:creationId xmlns:a16="http://schemas.microsoft.com/office/drawing/2014/main" id="{3DC1E270-1674-4CD5-84FC-5910226CC46D}"/>
+                </a:ext>
+              </a:extLst>
+            </p:cNvPr>
+            <p:cNvSpPr/>
+            <p:nvPr/>
+          </p:nvSpPr>
+          <p:spPr>
+            <a:xfrm rot="10800000">
+              <a:off x="4967919" y="3019438"/>
+              <a:ext cx="118753" cy="273974"/>
+            </a:xfrm>
+            <a:prstGeom prst="upArrow">
+              <a:avLst>
+                <a:gd name="adj1" fmla="val 30192"/>
+                <a:gd name="adj2" fmla="val 76408"/>
+              </a:avLst>
+            </a:prstGeom>
+            <a:solidFill>
+              <a:srgbClr val="0070C0"/>
+            </a:solidFill>
+            <a:ln>
+              <a:noFill/>
+            </a:ln>
+          </p:spPr>
+          <p:style>
+            <a:lnRef idx="2">
+              <a:schemeClr val="accent1">
+                <a:shade val="50000"/>
+              </a:schemeClr>
+            </a:lnRef>
+            <a:fillRef idx="1">
+              <a:schemeClr val="accent1"/>
+            </a:fillRef>
+            <a:effectRef idx="0">
+              <a:schemeClr val="accent1"/>
+            </a:effectRef>
+            <a:fontRef idx="minor">
+              <a:schemeClr val="lt1"/>
+            </a:fontRef>
+          </p:style>
+          <p:txBody>
+            <a:bodyPr rtlCol="0" anchor="ctr"/>
+            <a:lstStyle/>
+            <a:p>
+              <a:pPr algn="ctr"/>
+              <a:endParaRPr lang="zh-TW" altLang="en-US" sz="2000"/>
+            </a:p>
+          </p:txBody>
+        </p:sp>
+        <p:sp>
+          <p:nvSpPr>
+            <p:cNvPr id="34" name="箭號: 向上 33">
+              <a:extLst>
+                <a:ext uri="{FF2B5EF4-FFF2-40B4-BE49-F238E27FC236}">
+                  <a16:creationId xmlns:a16="http://schemas.microsoft.com/office/drawing/2014/main" id="{B2EB9341-CA68-4189-A533-F1D7101C98EB}"/>
+                </a:ext>
+              </a:extLst>
+            </p:cNvPr>
+            <p:cNvSpPr/>
+            <p:nvPr/>
+          </p:nvSpPr>
+          <p:spPr>
+            <a:xfrm>
+              <a:off x="4967919" y="4532854"/>
+              <a:ext cx="118753" cy="273974"/>
+            </a:xfrm>
+            <a:prstGeom prst="upArrow">
+              <a:avLst>
+                <a:gd name="adj1" fmla="val 30192"/>
+                <a:gd name="adj2" fmla="val 76408"/>
+              </a:avLst>
+            </a:prstGeom>
+            <a:solidFill>
+              <a:srgbClr val="FF0000"/>
+            </a:solidFill>
+            <a:ln>
+              <a:noFill/>
+            </a:ln>
+          </p:spPr>
+          <p:style>
+            <a:lnRef idx="2">
+              <a:schemeClr val="accent1">
+                <a:shade val="50000"/>
+              </a:schemeClr>
+            </a:lnRef>
+            <a:fillRef idx="1">
+              <a:schemeClr val="accent1"/>
+            </a:fillRef>
+            <a:effectRef idx="0">
+              <a:schemeClr val="accent1"/>
+            </a:effectRef>
+            <a:fontRef idx="minor">
+              <a:schemeClr val="lt1"/>
+            </a:fontRef>
+          </p:style>
+          <p:txBody>
+            <a:bodyPr rtlCol="0" anchor="ctr"/>
+            <a:lstStyle/>
+            <a:p>
+              <a:pPr algn="ctr"/>
+              <a:endParaRPr lang="zh-TW" altLang="en-US" sz="2000"/>
+            </a:p>
+          </p:txBody>
+        </p:sp>
+        <p:pic>
+          <p:nvPicPr>
+            <p:cNvPr id="35" name="圖片 34">
+              <a:extLst>
+                <a:ext uri="{FF2B5EF4-FFF2-40B4-BE49-F238E27FC236}">
+                  <a16:creationId xmlns:a16="http://schemas.microsoft.com/office/drawing/2014/main" id="{4C8C1008-E062-454B-81A1-48B46279BD49}"/>
+                </a:ext>
+              </a:extLst>
+            </p:cNvPr>
+            <p:cNvPicPr>
+              <a:picLocks noChangeAspect="1"/>
+            </p:cNvPicPr>
+            <p:nvPr/>
+          </p:nvPicPr>
+          <p:blipFill rotWithShape="1">
+            <a:blip r:embed="rId4"/>
+            <a:srcRect l="7992" t="38920" r="6883"/>
+            <a:stretch/>
+          </p:blipFill>
+          <p:spPr>
+            <a:xfrm>
+              <a:off x="5091432" y="3046536"/>
+              <a:ext cx="1409273" cy="614324"/>
+            </a:xfrm>
+            <a:prstGeom prst="rect">
+              <a:avLst/>
+            </a:prstGeom>
+          </p:spPr>
+        </p:pic>
+        <p:pic>
+          <p:nvPicPr>
+            <p:cNvPr id="36" name="圖片 35">
+              <a:extLst>
+                <a:ext uri="{FF2B5EF4-FFF2-40B4-BE49-F238E27FC236}">
+                  <a16:creationId xmlns:a16="http://schemas.microsoft.com/office/drawing/2014/main" id="{8BB3FEA9-F254-46DC-A5C6-9C5E50CE8892}"/>
+                </a:ext>
+              </a:extLst>
+            </p:cNvPr>
+            <p:cNvPicPr>
+              <a:picLocks noChangeAspect="1"/>
+            </p:cNvPicPr>
+            <p:nvPr/>
+          </p:nvPicPr>
+          <p:blipFill rotWithShape="1">
+            <a:blip r:embed="rId5"/>
+            <a:srcRect l="7872" t="40135" r="7992" b="-2"/>
+            <a:stretch/>
+          </p:blipFill>
+          <p:spPr>
+            <a:xfrm rot="10800000">
+              <a:off x="5099633" y="4221734"/>
+              <a:ext cx="1392887" cy="602118"/>
+            </a:xfrm>
+            <a:prstGeom prst="rect">
+              <a:avLst/>
+            </a:prstGeom>
+          </p:spPr>
+        </p:pic>
+        <p:pic>
+          <p:nvPicPr>
+            <p:cNvPr id="37" name="圖片 36">
+              <a:extLst>
+                <a:ext uri="{FF2B5EF4-FFF2-40B4-BE49-F238E27FC236}">
+                  <a16:creationId xmlns:a16="http://schemas.microsoft.com/office/drawing/2014/main" id="{C69D8C0D-B726-4BE8-A062-FE2CC106B535}"/>
+                </a:ext>
+              </a:extLst>
+            </p:cNvPr>
+            <p:cNvPicPr>
+              <a:picLocks noChangeAspect="1"/>
+            </p:cNvPicPr>
+            <p:nvPr/>
+          </p:nvPicPr>
+          <p:blipFill rotWithShape="1">
+            <a:blip r:embed="rId5"/>
+            <a:srcRect l="7663" t="40135" r="7542" b="-2"/>
+            <a:stretch/>
+          </p:blipFill>
+          <p:spPr>
+            <a:xfrm>
+              <a:off x="5094165" y="2784184"/>
+              <a:ext cx="1403813" cy="602118"/>
+            </a:xfrm>
+            <a:prstGeom prst="rect">
+              <a:avLst/>
+            </a:prstGeom>
+          </p:spPr>
+        </p:pic>
+        <p:sp>
+          <p:nvSpPr>
+            <p:cNvPr id="38" name="橢圓 37">
+              <a:extLst>
+                <a:ext uri="{FF2B5EF4-FFF2-40B4-BE49-F238E27FC236}">
+                  <a16:creationId xmlns:a16="http://schemas.microsoft.com/office/drawing/2014/main" id="{D2A2C652-E0EB-404A-9B8D-03C4C663D54D}"/>
+                </a:ext>
+              </a:extLst>
+            </p:cNvPr>
+            <p:cNvSpPr/>
+            <p:nvPr/>
+          </p:nvSpPr>
+          <p:spPr>
+            <a:xfrm>
+              <a:off x="6016361" y="3226604"/>
+              <a:ext cx="118879" cy="118879"/>
+            </a:xfrm>
+            <a:prstGeom prst="ellipse">
+              <a:avLst/>
+            </a:prstGeom>
+            <a:solidFill>
+              <a:schemeClr val="tx1"/>
+            </a:solidFill>
+            <a:ln>
+              <a:solidFill>
+                <a:schemeClr val="tx1"/>
+              </a:solidFill>
+            </a:ln>
+          </p:spPr>
+          <p:style>
+            <a:lnRef idx="2">
+              <a:schemeClr val="accent1">
+                <a:shade val="50000"/>
+              </a:schemeClr>
+            </a:lnRef>
+            <a:fillRef idx="1">
+              <a:schemeClr val="accent1"/>
+            </a:fillRef>
+            <a:effectRef idx="0">
+              <a:schemeClr val="accent1"/>
+            </a:effectRef>
+            <a:fontRef idx="minor">
+              <a:schemeClr val="lt1"/>
+            </a:fontRef>
+          </p:style>
+          <p:txBody>
+            <a:bodyPr rtlCol="0" anchor="ctr"/>
+            <a:lstStyle/>
+            <a:p>
+              <a:pPr algn="ctr"/>
+              <a:endParaRPr lang="zh-TW" altLang="en-US" sz="2000" dirty="0"/>
+            </a:p>
+          </p:txBody>
+        </p:sp>
+        <p:cxnSp>
+          <p:nvCxnSpPr>
+            <p:cNvPr id="39" name="直線單箭頭接點 38">
+              <a:extLst>
+                <a:ext uri="{FF2B5EF4-FFF2-40B4-BE49-F238E27FC236}">
+                  <a16:creationId xmlns:a16="http://schemas.microsoft.com/office/drawing/2014/main" id="{4F6336AC-ABF1-43F7-8D14-5F0F8CA9DFAE}"/>
+                </a:ext>
+              </a:extLst>
+            </p:cNvPr>
+            <p:cNvCxnSpPr>
+              <a:cxnSpLocks/>
+            </p:cNvCxnSpPr>
+            <p:nvPr/>
+          </p:nvCxnSpPr>
+          <p:spPr>
+            <a:xfrm flipV="1">
+              <a:off x="5810033" y="3333882"/>
+              <a:ext cx="255222" cy="915694"/>
+            </a:xfrm>
+            <a:prstGeom prst="straightConnector1">
+              <a:avLst/>
+            </a:prstGeom>
+            <a:ln w="57150">
+              <a:solidFill>
+                <a:srgbClr val="E1B037"/>
+              </a:solidFill>
+              <a:headEnd w="sm" len="sm"/>
+              <a:tailEnd type="triangle" w="med" len="lg"/>
+            </a:ln>
+          </p:spPr>
+          <p:style>
+            <a:lnRef idx="3">
+              <a:schemeClr val="accent4"/>
+            </a:lnRef>
+            <a:fillRef idx="0">
+              <a:schemeClr val="accent4"/>
+            </a:fillRef>
+            <a:effectRef idx="2">
+              <a:schemeClr val="accent4"/>
+            </a:effectRef>
+            <a:fontRef idx="minor">
+              <a:schemeClr val="tx1"/>
+            </a:fontRef>
+          </p:style>
+        </p:cxnSp>
+        <p:sp>
+          <p:nvSpPr>
+            <p:cNvPr id="40" name="橢圓 39">
+              <a:extLst>
+                <a:ext uri="{FF2B5EF4-FFF2-40B4-BE49-F238E27FC236}">
+                  <a16:creationId xmlns:a16="http://schemas.microsoft.com/office/drawing/2014/main" id="{FFFF96C8-E573-4F31-AA36-EE9B47C5F562}"/>
+                </a:ext>
+              </a:extLst>
+            </p:cNvPr>
+            <p:cNvSpPr/>
+            <p:nvPr/>
+          </p:nvSpPr>
+          <p:spPr>
+            <a:xfrm>
+              <a:off x="5751069" y="4188369"/>
+              <a:ext cx="118879" cy="118879"/>
+            </a:xfrm>
+            <a:prstGeom prst="ellipse">
+              <a:avLst/>
+            </a:prstGeom>
+            <a:solidFill>
+              <a:schemeClr val="bg1"/>
+            </a:solidFill>
+            <a:ln>
+              <a:solidFill>
+                <a:schemeClr val="tx1"/>
+              </a:solidFill>
+            </a:ln>
+          </p:spPr>
+          <p:style>
+            <a:lnRef idx="2">
+              <a:schemeClr val="accent1">
+                <a:shade val="50000"/>
+              </a:schemeClr>
+            </a:lnRef>
+            <a:fillRef idx="1">
+              <a:schemeClr val="accent1"/>
+            </a:fillRef>
+            <a:effectRef idx="0">
+              <a:schemeClr val="accent1"/>
+            </a:effectRef>
+            <a:fontRef idx="minor">
+              <a:schemeClr val="lt1"/>
+            </a:fontRef>
+          </p:style>
+          <p:txBody>
+            <a:bodyPr rtlCol="0" anchor="ctr"/>
+            <a:lstStyle/>
+            <a:p>
+              <a:pPr algn="ctr"/>
+              <a:endParaRPr lang="zh-TW" altLang="en-US" sz="2000" dirty="0"/>
+            </a:p>
+          </p:txBody>
+        </p:sp>
+        <p:sp>
+          <p:nvSpPr>
+            <p:cNvPr id="41" name="文字方塊 40">
+              <a:extLst>
+                <a:ext uri="{FF2B5EF4-FFF2-40B4-BE49-F238E27FC236}">
+                  <a16:creationId xmlns:a16="http://schemas.microsoft.com/office/drawing/2014/main" id="{B088AF2C-62FA-44D3-9352-4075C7BA55C7}"/>
+                </a:ext>
+              </a:extLst>
+            </p:cNvPr>
+            <p:cNvSpPr txBox="1"/>
+            <p:nvPr/>
+          </p:nvSpPr>
+          <p:spPr>
+            <a:xfrm>
+              <a:off x="4650574" y="3777943"/>
+              <a:ext cx="1403813" cy="338554"/>
+            </a:xfrm>
+            <a:prstGeom prst="rect">
+              <a:avLst/>
+            </a:prstGeom>
+            <a:noFill/>
+          </p:spPr>
+          <p:txBody>
+            <a:bodyPr wrap="square" rtlCol="0">
+              <a:spAutoFit/>
+            </a:bodyPr>
+            <a:lstStyle/>
+            <a:p>
+              <a:pPr algn="ctr"/>
+              <a:r>
+                <a:rPr lang="en-US" altLang="zh-TW" sz="1600" dirty="0">
+                  <a:latin typeface="Times New Roman" panose="02020603050405020304" pitchFamily="18" charset="0"/>
+                  <a:cs typeface="Times New Roman" panose="02020603050405020304" pitchFamily="18" charset="0"/>
+                </a:rPr>
+                <a:t>Light-cone</a:t>
+              </a:r>
+              <a:endParaRPr lang="zh-TW" altLang="en-US" sz="1600" dirty="0">
+                <a:latin typeface="Times New Roman" panose="02020603050405020304" pitchFamily="18" charset="0"/>
+                <a:cs typeface="Times New Roman" panose="02020603050405020304" pitchFamily="18" charset="0"/>
+              </a:endParaRPr>
+            </a:p>
+          </p:txBody>
+        </p:sp>
+        <mc:AlternateContent xmlns:mc="http://schemas.openxmlformats.org/markup-compatibility/2006" xmlns:a14="http://schemas.microsoft.com/office/drawing/2010/main">
+          <mc:Choice Requires="a14">
+            <p:sp>
+              <p:nvSpPr>
+                <p:cNvPr id="42" name="文字方塊 41">
+                  <a:extLst>
+                    <a:ext uri="{FF2B5EF4-FFF2-40B4-BE49-F238E27FC236}">
+                      <a16:creationId xmlns:a16="http://schemas.microsoft.com/office/drawing/2014/main" id="{2AE40D80-7245-4D10-949D-D68A9F97FFCD}"/>
+                    </a:ext>
+                  </a:extLst>
+                </p:cNvPr>
+                <p:cNvSpPr txBox="1"/>
+                <p:nvPr/>
+              </p:nvSpPr>
+              <p:spPr>
+                <a:xfrm>
+                  <a:off x="4932933" y="4848497"/>
+                  <a:ext cx="242450" cy="400110"/>
+                </a:xfrm>
+                <a:prstGeom prst="rect">
+                  <a:avLst/>
+                </a:prstGeom>
+                <a:noFill/>
+              </p:spPr>
+              <p:txBody>
+                <a:bodyPr wrap="square" rtlCol="0">
+                  <a:spAutoFit/>
+                </a:bodyPr>
+                <a:lstStyle/>
+                <a:p>
+                  <a:pPr algn="ctr"/>
+                  <a14:m>
+                    <m:oMathPara xmlns:m="http://schemas.openxmlformats.org/officeDocument/2006/math">
+                      <m:oMathParaPr>
+                        <m:jc m:val="centerGroup"/>
+                      </m:oMathParaPr>
+                      <m:oMath xmlns:m="http://schemas.openxmlformats.org/officeDocument/2006/math">
+                        <m:r>
+                          <a:rPr lang="en-US" altLang="zh-TW" sz="2000" b="1" i="1" dirty="0">
+                            <a:latin typeface="Cambria Math" panose="02040503050406030204" pitchFamily="18" charset="0"/>
+                            <a:cs typeface="Times New Roman" panose="02020603050405020304" pitchFamily="18" charset="0"/>
+                          </a:rPr>
+                          <m:t>𝒌</m:t>
+                        </m:r>
+                      </m:oMath>
+                    </m:oMathPara>
+                  </a14:m>
+                  <a:endParaRPr lang="zh-TW" altLang="en-US" sz="2000" b="1" dirty="0">
+                    <a:latin typeface="Times New Roman" panose="02020603050405020304" pitchFamily="18" charset="0"/>
+                    <a:cs typeface="Times New Roman" panose="02020603050405020304" pitchFamily="18" charset="0"/>
+                  </a:endParaRPr>
+                </a:p>
+              </p:txBody>
+            </p:sp>
+          </mc:Choice>
+          <mc:Fallback xmlns="">
+            <p:sp>
+              <p:nvSpPr>
+                <p:cNvPr id="42" name="文字方塊 41">
+                  <a:extLst>
+                    <a:ext uri="{FF2B5EF4-FFF2-40B4-BE49-F238E27FC236}">
+                      <a16:creationId xmlns:a16="http://schemas.microsoft.com/office/drawing/2014/main" id="{2AE40D80-7245-4D10-949D-D68A9F97FFCD}"/>
+                    </a:ext>
+                  </a:extLst>
+                </p:cNvPr>
+                <p:cNvSpPr txBox="1">
+                  <a:spLocks noRot="1" noChangeAspect="1" noMove="1" noResize="1" noEditPoints="1" noAdjustHandles="1" noChangeArrowheads="1" noChangeShapeType="1" noTextEdit="1"/>
+                </p:cNvSpPr>
+                <p:nvPr/>
+              </p:nvSpPr>
+              <p:spPr>
+                <a:xfrm>
+                  <a:off x="4932933" y="4848497"/>
+                  <a:ext cx="242450" cy="400110"/>
+                </a:xfrm>
+                <a:prstGeom prst="rect">
+                  <a:avLst/>
+                </a:prstGeom>
+                <a:blipFill>
+                  <a:blip r:embed="rId6"/>
+                  <a:stretch>
+                    <a:fillRect l="-32500" r="-10000"/>
+                  </a:stretch>
+                </a:blipFill>
+              </p:spPr>
+              <p:txBody>
+                <a:bodyPr/>
+                <a:lstStyle/>
+                <a:p>
+                  <a:r>
+                    <a:rPr lang="zh-TW" altLang="en-US">
+                      <a:noFill/>
+                    </a:rPr>
+                    <a:t> </a:t>
+                  </a:r>
+                </a:p>
+              </p:txBody>
+            </p:sp>
+          </mc:Fallback>
+        </mc:AlternateContent>
+      </p:grpSp>
+    </p:spTree>
+    <p:extLst>
+      <p:ext uri="{BB962C8B-B14F-4D97-AF65-F5344CB8AC3E}">
+        <p14:creationId xmlns:p14="http://schemas.microsoft.com/office/powerpoint/2010/main" val="1602662389"/>
       </p:ext>
     </p:extLst>
   </p:cSld>
